--- a/slides/team-decks/Week3-Tue-guantanamo-bay-wendys.pptx
+++ b/slides/team-decks/Week3-Tue-guantanamo-bay-wendys.pptx
@@ -13,6 +13,10 @@
     <p:sldId id="261" r:id="rId13"/>
     <p:sldId id="262" r:id="rId14"/>
     <p:sldId id="263" r:id="rId15"/>
+    <p:sldId id="264" r:id="rId16"/>
+    <p:sldId id="265" r:id="rId17"/>
+    <p:sldId id="266" r:id="rId18"/>
+    <p:sldId id="267" r:id="rId19"/>
   </p:sldIdLst>
   <p:sldSz cx="12191695" cy="6858000" type="screen4x3"/>
   <p:notesSz cx="6858000" cy="9144000"/>
@@ -534,6 +538,76 @@
 </p:notes>
 </file>
 
+<file path=ppt/notesSlides/notesSlide10.xml><?xml version="1.0" encoding="utf-8"?>
+<p:notes xmlns:a="http://schemas.openxmlformats.org/drawingml/2006/main" xmlns:p="http://schemas.openxmlformats.org/presentationml/2006/main" xmlns:r="http://schemas.openxmlformats.org/officeDocument/2006/relationships">
+  <p:cSld>
+    <p:spTree>
+      <p:nvGrpSpPr>
+        <p:cNvPr id="1" name=""/>
+        <p:cNvGrpSpPr/>
+        <p:nvPr/>
+      </p:nvGrpSpPr>
+      <p:grpSpPr>
+        <a:xfrm>
+          <a:off x="0" y="0"/>
+          <a:ext cx="0" cy="0"/>
+          <a:chOff x="0" y="0"/>
+          <a:chExt cx="0" cy="0"/>
+        </a:xfrm>
+      </p:grpSpPr>
+      <p:sp>
+        <p:nvSpPr>
+          <p:cNvPr id="2" name="Slide Image Placeholder 1"/>
+          <p:cNvSpPr>
+            <a:spLocks noGrp="1"/>
+          </p:cNvSpPr>
+          <p:nvPr>
+            <p:ph type="sldImg" idx="2"/>
+          </p:nvPr>
+        </p:nvSpPr>
+        <p:spPr/>
+      </p:sp>
+      <p:sp>
+        <p:nvSpPr>
+          <p:cNvPr id="3" name="Notes Placeholder 2"/>
+          <p:cNvSpPr>
+            <a:spLocks noGrp="1"/>
+          </p:cNvSpPr>
+          <p:nvPr>
+            <p:ph type="body" idx="3" sz="quarter"/>
+          </p:nvPr>
+        </p:nvSpPr>
+        <p:spPr/>
+        <p:txBody>
+          <a:bodyPr/>
+          <a:lstStyle/>
+          <a:p>
+            <a:r>
+              <a:t>Section header — the team's own slides go after this one.</a:t>
+            </a:r>
+          </a:p>
+        </p:txBody>
+      </p:sp>
+      <p:sp>
+        <p:nvSpPr>
+          <p:cNvPr id="4" name="Slide Number Placeholder 3"/>
+          <p:cNvSpPr>
+            <a:spLocks noGrp="1"/>
+          </p:cNvSpPr>
+          <p:nvPr>
+            <p:ph type="sldNum" idx="5" sz="quarter"/>
+          </p:nvPr>
+        </p:nvSpPr>
+        <p:spPr/>
+      </p:sp>
+    </p:spTree>
+  </p:cSld>
+  <p:clrMapOvr>
+    <a:masterClrMapping/>
+  </p:clrMapOvr>
+</p:notes>
+</file>
+
 <file path=ppt/notesSlides/notesSlide2.xml><?xml version="1.0" encoding="utf-8"?>
 <p:notes xmlns:a="http://schemas.openxmlformats.org/drawingml/2006/main" xmlns:p="http://schemas.openxmlformats.org/presentationml/2006/main" xmlns:r="http://schemas.openxmlformats.org/officeDocument/2006/relationships">
   <p:cSld>
@@ -789,7 +863,7 @@
           <a:lstStyle/>
           <a:p>
             <a:r>
-              <a:t>Section header — the team's own slides go after this one.</a:t>
+              <a:t>Evan Birnbaum's individually graded section. Their reflection lives in their own lane on the team FigJam canvas.</a:t>
             </a:r>
           </a:p>
         </p:txBody>
@@ -815,6 +889,216 @@
 </file>
 
 <file path=ppt/notesSlides/notesSlide6.xml><?xml version="1.0" encoding="utf-8"?>
+<p:notes xmlns:a="http://schemas.openxmlformats.org/drawingml/2006/main" xmlns:p="http://schemas.openxmlformats.org/presentationml/2006/main" xmlns:r="http://schemas.openxmlformats.org/officeDocument/2006/relationships">
+  <p:cSld>
+    <p:spTree>
+      <p:nvGrpSpPr>
+        <p:cNvPr id="1" name=""/>
+        <p:cNvGrpSpPr/>
+        <p:nvPr/>
+      </p:nvGrpSpPr>
+      <p:grpSpPr>
+        <a:xfrm>
+          <a:off x="0" y="0"/>
+          <a:ext cx="0" cy="0"/>
+          <a:chOff x="0" y="0"/>
+          <a:chExt cx="0" cy="0"/>
+        </a:xfrm>
+      </p:grpSpPr>
+      <p:sp>
+        <p:nvSpPr>
+          <p:cNvPr id="2" name="Slide Image Placeholder 1"/>
+          <p:cNvSpPr>
+            <a:spLocks noGrp="1"/>
+          </p:cNvSpPr>
+          <p:nvPr>
+            <p:ph type="sldImg" idx="2"/>
+          </p:nvPr>
+        </p:nvSpPr>
+        <p:spPr/>
+      </p:sp>
+      <p:sp>
+        <p:nvSpPr>
+          <p:cNvPr id="3" name="Notes Placeholder 2"/>
+          <p:cNvSpPr>
+            <a:spLocks noGrp="1"/>
+          </p:cNvSpPr>
+          <p:nvPr>
+            <p:ph type="body" idx="3" sz="quarter"/>
+          </p:nvPr>
+        </p:nvSpPr>
+        <p:spPr/>
+        <p:txBody>
+          <a:bodyPr/>
+          <a:lstStyle/>
+          <a:p>
+            <a:r>
+              <a:t>Derin Sezgin's individually graded section. Their reflection lives in their own lane on the team FigJam canvas.</a:t>
+            </a:r>
+          </a:p>
+        </p:txBody>
+      </p:sp>
+      <p:sp>
+        <p:nvSpPr>
+          <p:cNvPr id="4" name="Slide Number Placeholder 3"/>
+          <p:cNvSpPr>
+            <a:spLocks noGrp="1"/>
+          </p:cNvSpPr>
+          <p:nvPr>
+            <p:ph type="sldNum" idx="5" sz="quarter"/>
+          </p:nvPr>
+        </p:nvSpPr>
+        <p:spPr/>
+      </p:sp>
+    </p:spTree>
+  </p:cSld>
+  <p:clrMapOvr>
+    <a:masterClrMapping/>
+  </p:clrMapOvr>
+</p:notes>
+</file>
+
+<file path=ppt/notesSlides/notesSlide7.xml><?xml version="1.0" encoding="utf-8"?>
+<p:notes xmlns:a="http://schemas.openxmlformats.org/drawingml/2006/main" xmlns:p="http://schemas.openxmlformats.org/presentationml/2006/main" xmlns:r="http://schemas.openxmlformats.org/officeDocument/2006/relationships">
+  <p:cSld>
+    <p:spTree>
+      <p:nvGrpSpPr>
+        <p:cNvPr id="1" name=""/>
+        <p:cNvGrpSpPr/>
+        <p:nvPr/>
+      </p:nvGrpSpPr>
+      <p:grpSpPr>
+        <a:xfrm>
+          <a:off x="0" y="0"/>
+          <a:ext cx="0" cy="0"/>
+          <a:chOff x="0" y="0"/>
+          <a:chExt cx="0" cy="0"/>
+        </a:xfrm>
+      </p:grpSpPr>
+      <p:sp>
+        <p:nvSpPr>
+          <p:cNvPr id="2" name="Slide Image Placeholder 1"/>
+          <p:cNvSpPr>
+            <a:spLocks noGrp="1"/>
+          </p:cNvSpPr>
+          <p:nvPr>
+            <p:ph type="sldImg" idx="2"/>
+          </p:nvPr>
+        </p:nvSpPr>
+        <p:spPr/>
+      </p:sp>
+      <p:sp>
+        <p:nvSpPr>
+          <p:cNvPr id="3" name="Notes Placeholder 2"/>
+          <p:cNvSpPr>
+            <a:spLocks noGrp="1"/>
+          </p:cNvSpPr>
+          <p:nvPr>
+            <p:ph type="body" idx="3" sz="quarter"/>
+          </p:nvPr>
+        </p:nvSpPr>
+        <p:spPr/>
+        <p:txBody>
+          <a:bodyPr/>
+          <a:lstStyle/>
+          <a:p>
+            <a:r>
+              <a:t>Magnes Dugan's individually graded section. Their reflection lives in their own lane on the team FigJam canvas.</a:t>
+            </a:r>
+          </a:p>
+        </p:txBody>
+      </p:sp>
+      <p:sp>
+        <p:nvSpPr>
+          <p:cNvPr id="4" name="Slide Number Placeholder 3"/>
+          <p:cNvSpPr>
+            <a:spLocks noGrp="1"/>
+          </p:cNvSpPr>
+          <p:nvPr>
+            <p:ph type="sldNum" idx="5" sz="quarter"/>
+          </p:nvPr>
+        </p:nvSpPr>
+        <p:spPr/>
+      </p:sp>
+    </p:spTree>
+  </p:cSld>
+  <p:clrMapOvr>
+    <a:masterClrMapping/>
+  </p:clrMapOvr>
+</p:notes>
+</file>
+
+<file path=ppt/notesSlides/notesSlide8.xml><?xml version="1.0" encoding="utf-8"?>
+<p:notes xmlns:a="http://schemas.openxmlformats.org/drawingml/2006/main" xmlns:p="http://schemas.openxmlformats.org/presentationml/2006/main" xmlns:r="http://schemas.openxmlformats.org/officeDocument/2006/relationships">
+  <p:cSld>
+    <p:spTree>
+      <p:nvGrpSpPr>
+        <p:cNvPr id="1" name=""/>
+        <p:cNvGrpSpPr/>
+        <p:nvPr/>
+      </p:nvGrpSpPr>
+      <p:grpSpPr>
+        <a:xfrm>
+          <a:off x="0" y="0"/>
+          <a:ext cx="0" cy="0"/>
+          <a:chOff x="0" y="0"/>
+          <a:chExt cx="0" cy="0"/>
+        </a:xfrm>
+      </p:grpSpPr>
+      <p:sp>
+        <p:nvSpPr>
+          <p:cNvPr id="2" name="Slide Image Placeholder 1"/>
+          <p:cNvSpPr>
+            <a:spLocks noGrp="1"/>
+          </p:cNvSpPr>
+          <p:nvPr>
+            <p:ph type="sldImg" idx="2"/>
+          </p:nvPr>
+        </p:nvSpPr>
+        <p:spPr/>
+      </p:sp>
+      <p:sp>
+        <p:nvSpPr>
+          <p:cNvPr id="3" name="Notes Placeholder 2"/>
+          <p:cNvSpPr>
+            <a:spLocks noGrp="1"/>
+          </p:cNvSpPr>
+          <p:nvPr>
+            <p:ph type="body" idx="3" sz="quarter"/>
+          </p:nvPr>
+        </p:nvSpPr>
+        <p:spPr/>
+        <p:txBody>
+          <a:bodyPr/>
+          <a:lstStyle/>
+          <a:p>
+            <a:r>
+              <a:t>[ +1 — add your name ]'s individually graded section. Their reflection lives in their own lane on the team FigJam canvas.</a:t>
+            </a:r>
+          </a:p>
+        </p:txBody>
+      </p:sp>
+      <p:sp>
+        <p:nvSpPr>
+          <p:cNvPr id="4" name="Slide Number Placeholder 3"/>
+          <p:cNvSpPr>
+            <a:spLocks noGrp="1"/>
+          </p:cNvSpPr>
+          <p:nvPr>
+            <p:ph type="sldNum" idx="5" sz="quarter"/>
+          </p:nvPr>
+        </p:nvSpPr>
+        <p:spPr/>
+      </p:sp>
+    </p:spTree>
+  </p:cSld>
+  <p:clrMapOvr>
+    <a:masterClrMapping/>
+  </p:clrMapOvr>
+</p:notes>
+</file>
+
+<file path=ppt/notesSlides/notesSlide9.xml><?xml version="1.0" encoding="utf-8"?>
 <p:notes xmlns:a="http://schemas.openxmlformats.org/drawingml/2006/main" xmlns:p="http://schemas.openxmlformats.org/presentationml/2006/main" xmlns:r="http://schemas.openxmlformats.org/officeDocument/2006/relationships">
   <p:cSld>
     <p:spTree>
@@ -4129,6 +4413,1003 @@
 </p:sld>
 </file>
 
+<file path=ppt/slides/slide10.xml><?xml version="1.0" encoding="utf-8"?>
+<p:sld xmlns:a="http://schemas.openxmlformats.org/drawingml/2006/main" xmlns:p="http://schemas.openxmlformats.org/presentationml/2006/main" xmlns:r="http://schemas.openxmlformats.org/officeDocument/2006/relationships">
+  <p:cSld>
+    <p:bg>
+      <p:bgPr>
+        <a:solidFill>
+          <a:srgbClr val="0B0E14"/>
+        </a:solidFill>
+        <a:effectLst/>
+      </p:bgPr>
+    </p:bg>
+    <p:spTree>
+      <p:nvGrpSpPr>
+        <p:cNvPr id="1" name=""/>
+        <p:cNvGrpSpPr/>
+        <p:nvPr/>
+      </p:nvGrpSpPr>
+      <p:grpSpPr/>
+      <p:sp>
+        <p:nvSpPr>
+          <p:cNvPr id="2" name="Rectangle 1"/>
+          <p:cNvSpPr/>
+          <p:nvPr/>
+        </p:nvSpPr>
+        <p:spPr>
+          <a:xfrm>
+            <a:off x="0" y="0"/>
+            <a:ext cx="256032" cy="6858000"/>
+          </a:xfrm>
+          <a:prstGeom prst="rect">
+            <a:avLst/>
+          </a:prstGeom>
+          <a:solidFill>
+            <a:srgbClr val="00FF41"/>
+          </a:solidFill>
+          <a:ln>
+            <a:noFill/>
+          </a:ln>
+          <a:effectLst/>
+        </p:spPr>
+        <p:style>
+          <a:lnRef idx="1">
+            <a:schemeClr val="accent1"/>
+          </a:lnRef>
+          <a:fillRef idx="3">
+            <a:schemeClr val="accent1"/>
+          </a:fillRef>
+          <a:effectRef idx="2">
+            <a:schemeClr val="accent1"/>
+          </a:effectRef>
+          <a:fontRef idx="minor">
+            <a:schemeClr val="lt1"/>
+          </a:fontRef>
+        </p:style>
+        <p:txBody>
+          <a:bodyPr rtlCol="0" anchor="ctr"/>
+          <a:lstStyle/>
+          <a:p>
+            <a:pPr algn="ctr"/>
+          </a:p>
+        </p:txBody>
+      </p:sp>
+      <p:sp>
+        <p:nvSpPr>
+          <p:cNvPr id="3" name="TextBox 2"/>
+          <p:cNvSpPr txBox="1"/>
+          <p:nvPr/>
+        </p:nvSpPr>
+        <p:spPr>
+          <a:xfrm>
+            <a:off x="822960" y="1417320"/>
+            <a:ext cx="2743200" cy="1097280"/>
+          </a:xfrm>
+          <a:prstGeom prst="rect">
+            <a:avLst/>
+          </a:prstGeom>
+          <a:noFill/>
+        </p:spPr>
+        <p:txBody>
+          <a:bodyPr wrap="square" anchor="t">
+            <a:spAutoFit/>
+          </a:bodyPr>
+          <a:lstStyle/>
+          <a:p>
+            <a:pPr algn="l">
+              <a:lnSpc>
+                <a:spcPct val="100000"/>
+              </a:lnSpc>
+            </a:pPr>
+            <a:r>
+              <a:rPr sz="6400" b="1">
+                <a:solidFill>
+                  <a:srgbClr val="00FF41"/>
+                </a:solidFill>
+                <a:latin typeface="Courier New"/>
+              </a:rPr>
+              <a:t>04</a:t>
+            </a:r>
+          </a:p>
+        </p:txBody>
+      </p:sp>
+      <p:sp>
+        <p:nvSpPr>
+          <p:cNvPr id="4" name="TextBox 3"/>
+          <p:cNvSpPr txBox="1"/>
+          <p:nvPr/>
+        </p:nvSpPr>
+        <p:spPr>
+          <a:xfrm>
+            <a:off x="841248" y="2487168"/>
+            <a:ext cx="10424160" cy="457200"/>
+          </a:xfrm>
+          <a:prstGeom prst="rect">
+            <a:avLst/>
+          </a:prstGeom>
+          <a:noFill/>
+        </p:spPr>
+        <p:txBody>
+          <a:bodyPr wrap="square" anchor="t">
+            <a:spAutoFit/>
+          </a:bodyPr>
+          <a:lstStyle/>
+          <a:p>
+            <a:pPr algn="l">
+              <a:lnSpc>
+                <a:spcPct val="100000"/>
+              </a:lnSpc>
+            </a:pPr>
+            <a:r>
+              <a:rPr sz="1500" b="1">
+                <a:solidFill>
+                  <a:srgbClr val="00FF41"/>
+                </a:solidFill>
+                <a:latin typeface="Courier New"/>
+              </a:rPr>
+              <a:t>PART 3 — OUTLOOK</a:t>
+            </a:r>
+          </a:p>
+        </p:txBody>
+      </p:sp>
+      <p:sp>
+        <p:nvSpPr>
+          <p:cNvPr id="5" name="TextBox 4"/>
+          <p:cNvSpPr txBox="1"/>
+          <p:nvPr/>
+        </p:nvSpPr>
+        <p:spPr>
+          <a:xfrm>
+            <a:off x="804672" y="2971800"/>
+            <a:ext cx="10607040" cy="1097280"/>
+          </a:xfrm>
+          <a:prstGeom prst="rect">
+            <a:avLst/>
+          </a:prstGeom>
+          <a:noFill/>
+        </p:spPr>
+        <p:txBody>
+          <a:bodyPr wrap="square" anchor="t">
+            <a:spAutoFit/>
+          </a:bodyPr>
+          <a:lstStyle/>
+          <a:p>
+            <a:pPr algn="l">
+              <a:lnSpc>
+                <a:spcPct val="103000"/>
+              </a:lnSpc>
+            </a:pPr>
+            <a:r>
+              <a:rPr sz="3800" b="1">
+                <a:solidFill>
+                  <a:srgbClr val="F5F7FA"/>
+                </a:solidFill>
+                <a:latin typeface="Arial"/>
+              </a:rPr>
+              <a:t>What related research has already found</a:t>
+            </a:r>
+          </a:p>
+        </p:txBody>
+      </p:sp>
+      <p:sp>
+        <p:nvSpPr>
+          <p:cNvPr id="6" name="TextBox 5"/>
+          <p:cNvSpPr txBox="1"/>
+          <p:nvPr/>
+        </p:nvSpPr>
+        <p:spPr>
+          <a:xfrm>
+            <a:off x="841248" y="4224528"/>
+            <a:ext cx="10424160" cy="1737360"/>
+          </a:xfrm>
+          <a:prstGeom prst="rect">
+            <a:avLst/>
+          </a:prstGeom>
+          <a:noFill/>
+        </p:spPr>
+        <p:txBody>
+          <a:bodyPr wrap="square" anchor="t">
+            <a:spAutoFit/>
+          </a:bodyPr>
+          <a:lstStyle/>
+          <a:p>
+            <a:pPr algn="l">
+              <a:lnSpc>
+                <a:spcPct val="128000"/>
+              </a:lnSpc>
+            </a:pPr>
+            <a:r>
+              <a:rPr sz="1700" b="1">
+                <a:solidFill>
+                  <a:srgbClr val="00FF41"/>
+                </a:solidFill>
+                <a:latin typeface="Arial"/>
+              </a:rPr>
+              <a:t>→  </a:t>
+            </a:r>
+            <a:r>
+              <a:rPr sz="1700" b="0">
+                <a:solidFill>
+                  <a:srgbClr val="8A94A6"/>
+                </a:solidFill>
+                <a:latin typeface="Arial"/>
+              </a:rPr>
+              <a:t>What have others tried in order to move this value?</a:t>
+            </a:r>
+          </a:p>
+          <a:p>
+            <a:pPr algn="l">
+              <a:lnSpc>
+                <a:spcPct val="128000"/>
+              </a:lnSpc>
+            </a:pPr>
+            <a:r>
+              <a:rPr sz="1700" b="1">
+                <a:solidFill>
+                  <a:srgbClr val="00FF41"/>
+                </a:solidFill>
+                <a:latin typeface="Arial"/>
+              </a:rPr>
+              <a:t>→  </a:t>
+            </a:r>
+            <a:r>
+              <a:rPr sz="1700" b="0">
+                <a:solidFill>
+                  <a:srgbClr val="8A94A6"/>
+                </a:solidFill>
+                <a:latin typeface="Arial"/>
+              </a:rPr>
+              <a:t>What worked — and what failed?</a:t>
+            </a:r>
+          </a:p>
+          <a:p>
+            <a:pPr algn="l">
+              <a:lnSpc>
+                <a:spcPct val="128000"/>
+              </a:lnSpc>
+            </a:pPr>
+            <a:r>
+              <a:rPr sz="1700" b="1">
+                <a:solidFill>
+                  <a:srgbClr val="00FF41"/>
+                </a:solidFill>
+                <a:latin typeface="Arial"/>
+              </a:rPr>
+              <a:t>→  </a:t>
+            </a:r>
+            <a:r>
+              <a:rPr sz="1700" b="0">
+                <a:solidFill>
+                  <a:srgbClr val="8A94A6"/>
+                </a:solidFill>
+                <a:latin typeface="Arial"/>
+              </a:rPr>
+              <a:t>2–3 REAL sources. Never invent a citation.</a:t>
+            </a:r>
+          </a:p>
+        </p:txBody>
+      </p:sp>
+      <p:sp>
+        <p:nvSpPr>
+          <p:cNvPr id="7" name="TextBox 6"/>
+          <p:cNvSpPr txBox="1"/>
+          <p:nvPr/>
+        </p:nvSpPr>
+        <p:spPr>
+          <a:xfrm>
+            <a:off x="640080" y="6355080"/>
+            <a:ext cx="10972800" cy="365760"/>
+          </a:xfrm>
+          <a:prstGeom prst="rect">
+            <a:avLst/>
+          </a:prstGeom>
+          <a:noFill/>
+        </p:spPr>
+        <p:txBody>
+          <a:bodyPr wrap="square" anchor="t">
+            <a:spAutoFit/>
+          </a:bodyPr>
+          <a:lstStyle/>
+          <a:p>
+            <a:pPr algn="l">
+              <a:lnSpc>
+                <a:spcPct val="100000"/>
+              </a:lnSpc>
+            </a:pPr>
+            <a:r>
+              <a:rPr sz="1000" b="0">
+                <a:solidFill>
+                  <a:srgbClr val="5A6474"/>
+                </a:solidFill>
+                <a:latin typeface="Courier New"/>
+              </a:rPr>
+              <a:t>Value Verification · TECHIE 1121 · Cornell Tech · Tue Jul 28</a:t>
+            </a:r>
+          </a:p>
+        </p:txBody>
+      </p:sp>
+    </p:spTree>
+  </p:cSld>
+  <p:clrMapOvr>
+    <a:masterClrMapping/>
+  </p:clrMapOvr>
+</p:sld>
+</file>
+
+<file path=ppt/slides/slide11.xml><?xml version="1.0" encoding="utf-8"?>
+<p:sld xmlns:a="http://schemas.openxmlformats.org/drawingml/2006/main" xmlns:p="http://schemas.openxmlformats.org/presentationml/2006/main" xmlns:r="http://schemas.openxmlformats.org/officeDocument/2006/relationships">
+  <p:cSld>
+    <p:bg>
+      <p:bgPr>
+        <a:solidFill>
+          <a:srgbClr val="0B0E14"/>
+        </a:solidFill>
+        <a:effectLst/>
+      </p:bgPr>
+    </p:bg>
+    <p:spTree>
+      <p:nvGrpSpPr>
+        <p:cNvPr id="1" name=""/>
+        <p:cNvGrpSpPr/>
+        <p:nvPr/>
+      </p:nvGrpSpPr>
+      <p:grpSpPr/>
+      <p:sp>
+        <p:nvSpPr>
+          <p:cNvPr id="2" name="Rectangle 1"/>
+          <p:cNvSpPr/>
+          <p:nvPr/>
+        </p:nvSpPr>
+        <p:spPr>
+          <a:xfrm>
+            <a:off x="0" y="0"/>
+            <a:ext cx="256032" cy="6858000"/>
+          </a:xfrm>
+          <a:prstGeom prst="rect">
+            <a:avLst/>
+          </a:prstGeom>
+          <a:solidFill>
+            <a:srgbClr val="00FF41"/>
+          </a:solidFill>
+          <a:ln>
+            <a:noFill/>
+          </a:ln>
+          <a:effectLst/>
+        </p:spPr>
+        <p:style>
+          <a:lnRef idx="1">
+            <a:schemeClr val="accent1"/>
+          </a:lnRef>
+          <a:fillRef idx="3">
+            <a:schemeClr val="accent1"/>
+          </a:fillRef>
+          <a:effectRef idx="2">
+            <a:schemeClr val="accent1"/>
+          </a:effectRef>
+          <a:fontRef idx="minor">
+            <a:schemeClr val="lt1"/>
+          </a:fontRef>
+        </p:style>
+        <p:txBody>
+          <a:bodyPr rtlCol="0" anchor="ctr"/>
+          <a:lstStyle/>
+          <a:p>
+            <a:pPr algn="ctr"/>
+          </a:p>
+        </p:txBody>
+      </p:sp>
+      <p:sp>
+        <p:nvSpPr>
+          <p:cNvPr id="3" name="TextBox 2"/>
+          <p:cNvSpPr txBox="1"/>
+          <p:nvPr/>
+        </p:nvSpPr>
+        <p:spPr>
+          <a:xfrm>
+            <a:off x="822960" y="1417320"/>
+            <a:ext cx="2743200" cy="1097280"/>
+          </a:xfrm>
+          <a:prstGeom prst="rect">
+            <a:avLst/>
+          </a:prstGeom>
+          <a:noFill/>
+        </p:spPr>
+        <p:txBody>
+          <a:bodyPr wrap="square" anchor="t">
+            <a:spAutoFit/>
+          </a:bodyPr>
+          <a:lstStyle/>
+          <a:p>
+            <a:pPr algn="l">
+              <a:lnSpc>
+                <a:spcPct val="100000"/>
+              </a:lnSpc>
+            </a:pPr>
+            <a:r>
+              <a:rPr sz="6400" b="1">
+                <a:solidFill>
+                  <a:srgbClr val="00FF41"/>
+                </a:solidFill>
+                <a:latin typeface="Courier New"/>
+              </a:rPr>
+              <a:t>05</a:t>
+            </a:r>
+          </a:p>
+        </p:txBody>
+      </p:sp>
+      <p:sp>
+        <p:nvSpPr>
+          <p:cNvPr id="4" name="TextBox 3"/>
+          <p:cNvSpPr txBox="1"/>
+          <p:nvPr/>
+        </p:nvSpPr>
+        <p:spPr>
+          <a:xfrm>
+            <a:off x="841248" y="2487168"/>
+            <a:ext cx="10424160" cy="457200"/>
+          </a:xfrm>
+          <a:prstGeom prst="rect">
+            <a:avLst/>
+          </a:prstGeom>
+          <a:noFill/>
+        </p:spPr>
+        <p:txBody>
+          <a:bodyPr wrap="square" anchor="t">
+            <a:spAutoFit/>
+          </a:bodyPr>
+          <a:lstStyle/>
+          <a:p>
+            <a:pPr algn="l">
+              <a:lnSpc>
+                <a:spcPct val="100000"/>
+              </a:lnSpc>
+            </a:pPr>
+            <a:r>
+              <a:rPr sz="1500" b="1">
+                <a:solidFill>
+                  <a:srgbClr val="00FF41"/>
+                </a:solidFill>
+                <a:latin typeface="Courier New"/>
+              </a:rPr>
+              <a:t>SO WHAT</a:t>
+            </a:r>
+          </a:p>
+        </p:txBody>
+      </p:sp>
+      <p:sp>
+        <p:nvSpPr>
+          <p:cNvPr id="5" name="TextBox 4"/>
+          <p:cNvSpPr txBox="1"/>
+          <p:nvPr/>
+        </p:nvSpPr>
+        <p:spPr>
+          <a:xfrm>
+            <a:off x="804672" y="2971800"/>
+            <a:ext cx="10607040" cy="1097280"/>
+          </a:xfrm>
+          <a:prstGeom prst="rect">
+            <a:avLst/>
+          </a:prstGeom>
+          <a:noFill/>
+        </p:spPr>
+        <p:txBody>
+          <a:bodyPr wrap="square" anchor="t">
+            <a:spAutoFit/>
+          </a:bodyPr>
+          <a:lstStyle/>
+          <a:p>
+            <a:pPr algn="l">
+              <a:lnSpc>
+                <a:spcPct val="103000"/>
+              </a:lnSpc>
+            </a:pPr>
+            <a:r>
+              <a:rPr sz="3800" b="1">
+                <a:solidFill>
+                  <a:srgbClr val="F5F7FA"/>
+                </a:solidFill>
+                <a:latin typeface="Arial"/>
+              </a:rPr>
+              <a:t>Our next design brief</a:t>
+            </a:r>
+          </a:p>
+        </p:txBody>
+      </p:sp>
+      <p:sp>
+        <p:nvSpPr>
+          <p:cNvPr id="6" name="TextBox 5"/>
+          <p:cNvSpPr txBox="1"/>
+          <p:nvPr/>
+        </p:nvSpPr>
+        <p:spPr>
+          <a:xfrm>
+            <a:off x="841248" y="4224528"/>
+            <a:ext cx="10424160" cy="1737360"/>
+          </a:xfrm>
+          <a:prstGeom prst="rect">
+            <a:avLst/>
+          </a:prstGeom>
+          <a:noFill/>
+        </p:spPr>
+        <p:txBody>
+          <a:bodyPr wrap="square" anchor="t">
+            <a:spAutoFit/>
+          </a:bodyPr>
+          <a:lstStyle/>
+          <a:p>
+            <a:pPr algn="l">
+              <a:lnSpc>
+                <a:spcPct val="128000"/>
+              </a:lnSpc>
+            </a:pPr>
+            <a:r>
+              <a:rPr sz="1700" b="1">
+                <a:solidFill>
+                  <a:srgbClr val="00FF41"/>
+                </a:solidFill>
+                <a:latin typeface="Arial"/>
+              </a:rPr>
+              <a:t>→  </a:t>
+            </a:r>
+            <a:r>
+              <a:rPr sz="1700" b="0">
+                <a:solidFill>
+                  <a:srgbClr val="8A94A6"/>
+                </a:solidFill>
+                <a:latin typeface="Arial"/>
+              </a:rPr>
+              <a:t>Verification is a beginning, not a verdict.</a:t>
+            </a:r>
+          </a:p>
+          <a:p>
+            <a:pPr algn="l">
+              <a:lnSpc>
+                <a:spcPct val="128000"/>
+              </a:lnSpc>
+            </a:pPr>
+            <a:r>
+              <a:rPr sz="1700" b="1">
+                <a:solidFill>
+                  <a:srgbClr val="00FF41"/>
+                </a:solidFill>
+                <a:latin typeface="Arial"/>
+              </a:rPr>
+              <a:t>→  </a:t>
+            </a:r>
+            <a:r>
+              <a:rPr sz="1700" b="0">
+                <a:solidFill>
+                  <a:srgbClr val="8A94A6"/>
+                </a:solidFill>
+                <a:latin typeface="Arial"/>
+              </a:rPr>
+              <a:t>What OTHER design could actually achieve this value?</a:t>
+            </a:r>
+          </a:p>
+          <a:p>
+            <a:pPr algn="l">
+              <a:lnSpc>
+                <a:spcPct val="128000"/>
+              </a:lnSpc>
+            </a:pPr>
+            <a:r>
+              <a:rPr sz="1700" b="1">
+                <a:solidFill>
+                  <a:srgbClr val="00FF41"/>
+                </a:solidFill>
+                <a:latin typeface="Arial"/>
+              </a:rPr>
+              <a:t>→  </a:t>
+            </a:r>
+            <a:r>
+              <a:rPr sz="1700" b="0">
+                <a:solidFill>
+                  <a:srgbClr val="8A94A6"/>
+                </a:solidFill>
+                <a:latin typeface="Arial"/>
+              </a:rPr>
+              <a:t>What should the next cycle discover? (You carry this into Wednesday.)</a:t>
+            </a:r>
+          </a:p>
+        </p:txBody>
+      </p:sp>
+      <p:sp>
+        <p:nvSpPr>
+          <p:cNvPr id="7" name="TextBox 6"/>
+          <p:cNvSpPr txBox="1"/>
+          <p:nvPr/>
+        </p:nvSpPr>
+        <p:spPr>
+          <a:xfrm>
+            <a:off x="640080" y="6355080"/>
+            <a:ext cx="10972800" cy="365760"/>
+          </a:xfrm>
+          <a:prstGeom prst="rect">
+            <a:avLst/>
+          </a:prstGeom>
+          <a:noFill/>
+        </p:spPr>
+        <p:txBody>
+          <a:bodyPr wrap="square" anchor="t">
+            <a:spAutoFit/>
+          </a:bodyPr>
+          <a:lstStyle/>
+          <a:p>
+            <a:pPr algn="l">
+              <a:lnSpc>
+                <a:spcPct val="100000"/>
+              </a:lnSpc>
+            </a:pPr>
+            <a:r>
+              <a:rPr sz="1000" b="0">
+                <a:solidFill>
+                  <a:srgbClr val="5A6474"/>
+                </a:solidFill>
+                <a:latin typeface="Courier New"/>
+              </a:rPr>
+              <a:t>Value Verification · TECHIE 1121 · Cornell Tech · Tue Jul 28</a:t>
+            </a:r>
+          </a:p>
+        </p:txBody>
+      </p:sp>
+    </p:spTree>
+  </p:cSld>
+  <p:clrMapOvr>
+    <a:masterClrMapping/>
+  </p:clrMapOvr>
+</p:sld>
+</file>
+
+<file path=ppt/slides/slide12.xml><?xml version="1.0" encoding="utf-8"?>
+<p:sld xmlns:a="http://schemas.openxmlformats.org/drawingml/2006/main" xmlns:p="http://schemas.openxmlformats.org/presentationml/2006/main" xmlns:r="http://schemas.openxmlformats.org/officeDocument/2006/relationships">
+  <p:cSld>
+    <p:bg>
+      <p:bgPr>
+        <a:solidFill>
+          <a:srgbClr val="0B0E14"/>
+        </a:solidFill>
+        <a:effectLst/>
+      </p:bgPr>
+    </p:bg>
+    <p:spTree>
+      <p:nvGrpSpPr>
+        <p:cNvPr id="1" name=""/>
+        <p:cNvGrpSpPr/>
+        <p:nvPr/>
+      </p:nvGrpSpPr>
+      <p:grpSpPr/>
+      <p:sp>
+        <p:nvSpPr>
+          <p:cNvPr id="2" name="TextBox 1"/>
+          <p:cNvSpPr txBox="1"/>
+          <p:nvPr/>
+        </p:nvSpPr>
+        <p:spPr>
+          <a:xfrm>
+            <a:off x="640080" y="502920"/>
+            <a:ext cx="10058400" cy="365760"/>
+          </a:xfrm>
+          <a:prstGeom prst="rect">
+            <a:avLst/>
+          </a:prstGeom>
+          <a:noFill/>
+        </p:spPr>
+        <p:txBody>
+          <a:bodyPr wrap="square" anchor="t">
+            <a:spAutoFit/>
+          </a:bodyPr>
+          <a:lstStyle/>
+          <a:p>
+            <a:pPr algn="l">
+              <a:lnSpc>
+                <a:spcPct val="100000"/>
+              </a:lnSpc>
+            </a:pPr>
+            <a:r>
+              <a:rPr sz="1300" b="1">
+                <a:solidFill>
+                  <a:srgbClr val="00FF41"/>
+                </a:solidFill>
+                <a:latin typeface="Courier New"/>
+              </a:rPr>
+              <a:t>SOURCES</a:t>
+            </a:r>
+          </a:p>
+        </p:txBody>
+      </p:sp>
+      <p:sp>
+        <p:nvSpPr>
+          <p:cNvPr id="3" name="Rectangle 2"/>
+          <p:cNvSpPr/>
+          <p:nvPr/>
+        </p:nvSpPr>
+        <p:spPr>
+          <a:xfrm>
+            <a:off x="640080" y="932688"/>
+            <a:ext cx="822960" cy="73152"/>
+          </a:xfrm>
+          <a:prstGeom prst="rect">
+            <a:avLst/>
+          </a:prstGeom>
+          <a:solidFill>
+            <a:srgbClr val="00FF41"/>
+          </a:solidFill>
+          <a:ln>
+            <a:noFill/>
+          </a:ln>
+          <a:effectLst/>
+        </p:spPr>
+        <p:style>
+          <a:lnRef idx="1">
+            <a:schemeClr val="accent1"/>
+          </a:lnRef>
+          <a:fillRef idx="3">
+            <a:schemeClr val="accent1"/>
+          </a:fillRef>
+          <a:effectRef idx="2">
+            <a:schemeClr val="accent1"/>
+          </a:effectRef>
+          <a:fontRef idx="minor">
+            <a:schemeClr val="lt1"/>
+          </a:fontRef>
+        </p:style>
+        <p:txBody>
+          <a:bodyPr rtlCol="0" anchor="ctr"/>
+          <a:lstStyle/>
+          <a:p>
+            <a:pPr algn="ctr"/>
+          </a:p>
+        </p:txBody>
+      </p:sp>
+      <p:sp>
+        <p:nvSpPr>
+          <p:cNvPr id="4" name="TextBox 3"/>
+          <p:cNvSpPr txBox="1"/>
+          <p:nvPr/>
+        </p:nvSpPr>
+        <p:spPr>
+          <a:xfrm>
+            <a:off x="640080" y="1188720"/>
+            <a:ext cx="10972800" cy="914400"/>
+          </a:xfrm>
+          <a:prstGeom prst="rect">
+            <a:avLst/>
+          </a:prstGeom>
+          <a:noFill/>
+        </p:spPr>
+        <p:txBody>
+          <a:bodyPr wrap="square" anchor="t">
+            <a:spAutoFit/>
+          </a:bodyPr>
+          <a:lstStyle/>
+          <a:p>
+            <a:pPr algn="l">
+              <a:lnSpc>
+                <a:spcPct val="100000"/>
+              </a:lnSpc>
+            </a:pPr>
+            <a:r>
+              <a:rPr sz="3200" b="1">
+                <a:solidFill>
+                  <a:srgbClr val="F5F7FA"/>
+                </a:solidFill>
+                <a:latin typeface="Arial"/>
+              </a:rPr>
+              <a:t>What we read</a:t>
+            </a:r>
+          </a:p>
+        </p:txBody>
+      </p:sp>
+      <p:sp>
+        <p:nvSpPr>
+          <p:cNvPr id="5" name="TextBox 4"/>
+          <p:cNvSpPr txBox="1"/>
+          <p:nvPr/>
+        </p:nvSpPr>
+        <p:spPr>
+          <a:xfrm>
+            <a:off x="658368" y="2377440"/>
+            <a:ext cx="10881360" cy="3108960"/>
+          </a:xfrm>
+          <a:prstGeom prst="rect">
+            <a:avLst/>
+          </a:prstGeom>
+          <a:noFill/>
+        </p:spPr>
+        <p:txBody>
+          <a:bodyPr wrap="square" anchor="t">
+            <a:spAutoFit/>
+          </a:bodyPr>
+          <a:lstStyle/>
+          <a:p>
+            <a:pPr algn="l">
+              <a:lnSpc>
+                <a:spcPct val="145000"/>
+              </a:lnSpc>
+            </a:pPr>
+            <a:r>
+              <a:rPr sz="1700" b="1">
+                <a:solidFill>
+                  <a:srgbClr val="00FF41"/>
+                </a:solidFill>
+                <a:latin typeface="Arial"/>
+              </a:rPr>
+              <a:t>•  </a:t>
+            </a:r>
+            <a:r>
+              <a:rPr sz="1700" b="0">
+                <a:solidFill>
+                  <a:srgbClr val="8A94A6"/>
+                </a:solidFill>
+                <a:latin typeface="Arial"/>
+              </a:rPr>
+              <a:t>Author, Year. Title. Where it appeared.  —  what it found</a:t>
+            </a:r>
+          </a:p>
+          <a:p>
+            <a:pPr algn="l">
+              <a:lnSpc>
+                <a:spcPct val="145000"/>
+              </a:lnSpc>
+            </a:pPr>
+            <a:r>
+              <a:rPr sz="1700" b="1">
+                <a:solidFill>
+                  <a:srgbClr val="00FF41"/>
+                </a:solidFill>
+                <a:latin typeface="Arial"/>
+              </a:rPr>
+              <a:t>•  </a:t>
+            </a:r>
+            <a:r>
+              <a:rPr sz="1700" b="0">
+                <a:solidFill>
+                  <a:srgbClr val="8A94A6"/>
+                </a:solidFill>
+                <a:latin typeface="Arial"/>
+              </a:rPr>
+              <a:t>Author, Year. Title. Where it appeared.  —  what it found</a:t>
+            </a:r>
+          </a:p>
+          <a:p>
+            <a:pPr algn="l">
+              <a:lnSpc>
+                <a:spcPct val="145000"/>
+              </a:lnSpc>
+            </a:pPr>
+            <a:r>
+              <a:rPr sz="1700" b="1">
+                <a:solidFill>
+                  <a:srgbClr val="00FF41"/>
+                </a:solidFill>
+                <a:latin typeface="Arial"/>
+              </a:rPr>
+              <a:t>•  </a:t>
+            </a:r>
+            <a:r>
+              <a:rPr sz="1700" b="0">
+                <a:solidFill>
+                  <a:srgbClr val="8A94A6"/>
+                </a:solidFill>
+                <a:latin typeface="Arial"/>
+              </a:rPr>
+              <a:t>Author, Year. Title. Where it appeared.  —  what it found</a:t>
+            </a:r>
+          </a:p>
+          <a:p>
+            <a:pPr algn="l">
+              <a:lnSpc>
+                <a:spcPct val="145000"/>
+              </a:lnSpc>
+            </a:pPr>
+            <a:r>
+              <a:rPr sz="1700" b="1">
+                <a:solidFill>
+                  <a:srgbClr val="00FF41"/>
+                </a:solidFill>
+                <a:latin typeface="Arial"/>
+              </a:rPr>
+              <a:t>•  </a:t>
+            </a:r>
+            <a:r>
+              <a:rPr sz="1700" b="0">
+                <a:solidFill>
+                  <a:srgbClr val="8A94A6"/>
+                </a:solidFill>
+                <a:latin typeface="Arial"/>
+              </a:rPr>
+              <a:t>Author, Year. Title. Where it appeared.  —  what it found</a:t>
+            </a:r>
+          </a:p>
+        </p:txBody>
+      </p:sp>
+      <p:sp>
+        <p:nvSpPr>
+          <p:cNvPr id="6" name="TextBox 5"/>
+          <p:cNvSpPr txBox="1"/>
+          <p:nvPr/>
+        </p:nvSpPr>
+        <p:spPr>
+          <a:xfrm>
+            <a:off x="658368" y="5715000"/>
+            <a:ext cx="10881360" cy="365760"/>
+          </a:xfrm>
+          <a:prstGeom prst="rect">
+            <a:avLst/>
+          </a:prstGeom>
+          <a:noFill/>
+        </p:spPr>
+        <p:txBody>
+          <a:bodyPr wrap="square" anchor="t">
+            <a:spAutoFit/>
+          </a:bodyPr>
+          <a:lstStyle/>
+          <a:p>
+            <a:pPr algn="l">
+              <a:lnSpc>
+                <a:spcPct val="100000"/>
+              </a:lnSpc>
+            </a:pPr>
+            <a:r>
+              <a:rPr sz="1300" b="0">
+                <a:solidFill>
+                  <a:srgbClr val="5A6474"/>
+                </a:solidFill>
+                <a:latin typeface="Courier New"/>
+              </a:rPr>
+              <a:t>Real papers only — never invent a citation.</a:t>
+            </a:r>
+          </a:p>
+        </p:txBody>
+      </p:sp>
+      <p:sp>
+        <p:nvSpPr>
+          <p:cNvPr id="7" name="TextBox 6"/>
+          <p:cNvSpPr txBox="1"/>
+          <p:nvPr/>
+        </p:nvSpPr>
+        <p:spPr>
+          <a:xfrm>
+            <a:off x="640080" y="6355080"/>
+            <a:ext cx="10972800" cy="365760"/>
+          </a:xfrm>
+          <a:prstGeom prst="rect">
+            <a:avLst/>
+          </a:prstGeom>
+          <a:noFill/>
+        </p:spPr>
+        <p:txBody>
+          <a:bodyPr wrap="square" anchor="t">
+            <a:spAutoFit/>
+          </a:bodyPr>
+          <a:lstStyle/>
+          <a:p>
+            <a:pPr algn="l">
+              <a:lnSpc>
+                <a:spcPct val="100000"/>
+              </a:lnSpc>
+            </a:pPr>
+            <a:r>
+              <a:rPr sz="1000" b="0">
+                <a:solidFill>
+                  <a:srgbClr val="5A6474"/>
+                </a:solidFill>
+                <a:latin typeface="Courier New"/>
+              </a:rPr>
+              <a:t>Value Verification · TECHIE 1121 · Cornell Tech · Tue Jul 28</a:t>
+            </a:r>
+          </a:p>
+        </p:txBody>
+      </p:sp>
+    </p:spTree>
+  </p:cSld>
+  <p:clrMapOvr>
+    <a:masterClrMapping/>
+  </p:clrMapOvr>
+</p:sld>
+</file>
+
 <file path=ppt/slides/slide2.xml><?xml version="1.0" encoding="utf-8"?>
 <p:sld xmlns:a="http://schemas.openxmlformats.org/drawingml/2006/main" xmlns:p="http://schemas.openxmlformats.org/presentationml/2006/main" xmlns:r="http://schemas.openxmlformats.org/officeDocument/2006/relationships">
   <p:cSld>
@@ -4337,7 +5618,7 @@
                 </a:solidFill>
                 <a:latin typeface="Arial"/>
               </a:rPr>
-              <a:t>Add your own slides AFTER each header. Don't delete the headers.</a:t>
+              <a:t>Sections 01, 02, 04, 05 are the TEAM's. Section 03 has one named slide per person — that one is graded individually.</a:t>
             </a:r>
           </a:p>
           <a:p>
@@ -4362,7 +5643,7 @@
                 </a:solidFill>
                 <a:latin typeface="Arial"/>
               </a:rPr>
-              <a:t>Evidence beats assertion: screenshots, numbers, quotes from what you actually observed.</a:t>
+              <a:t>Add your own slides AFTER each header. Don't delete the headers.</a:t>
             </a:r>
           </a:p>
           <a:p>
@@ -4387,7 +5668,57 @@
                 </a:solidFill>
                 <a:latin typeface="Arial"/>
               </a:rPr>
+              <a:t>Evidence beats assertion: screenshots, numbers, quotes from what you actually observed.</a:t>
+            </a:r>
+          </a:p>
+          <a:p>
+            <a:pPr algn="l">
+              <a:lnSpc>
+                <a:spcPct val="130000"/>
+              </a:lnSpc>
+            </a:pPr>
+            <a:r>
+              <a:rPr sz="1900" b="1">
+                <a:solidFill>
+                  <a:srgbClr val="00FF41"/>
+                </a:solidFill>
+                <a:latin typeface="Arial"/>
+              </a:rPr>
+              <a:t>•  </a:t>
+            </a:r>
+            <a:r>
+              <a:rPr sz="1900" b="0">
+                <a:solidFill>
+                  <a:srgbClr val="F5F7FA"/>
+                </a:solidFill>
+                <a:latin typeface="Arial"/>
+              </a:rPr>
               <a:t>Real citations only — if you can't find the paper, leave the claim out.</a:t>
+            </a:r>
+          </a:p>
+          <a:p>
+            <a:pPr algn="l">
+              <a:lnSpc>
+                <a:spcPct val="130000"/>
+              </a:lnSpc>
+            </a:pPr>
+            <a:r>
+              <a:rPr sz="1900" b="1">
+                <a:solidFill>
+                  <a:srgbClr val="00FF41"/>
+                </a:solidFill>
+                <a:latin typeface="Arial"/>
+              </a:rPr>
+              <a:t>•  </a:t>
+            </a:r>
+            <a:r>
+              <a:rPr sz="1900" b="0">
+                <a:solidFill>
+                  <a:srgbClr val="F5F7FA"/>
+                </a:solidFill>
+                <a:latin typeface="Arial"/>
+              </a:rPr>
+              <a:t>Your reflection is NOT a document — it goes in your own lane on the team FigJam canvas.</a:t>
             </a:r>
           </a:p>
           <a:p>
@@ -5334,7 +6665,7 @@
                 </a:solidFill>
                 <a:latin typeface="Arial"/>
               </a:rPr>
-              <a:t>What WORKS in the current prototype — with evidence.</a:t>
+              <a:t>Each team member presents their OWN slide — the named slides that follow.</a:t>
             </a:r>
           </a:p>
           <a:p>
@@ -5359,7 +6690,7 @@
                 </a:solidFill>
                 <a:latin typeface="Arial"/>
               </a:rPr>
-              <a:t>What does NOT work — with evidence. An evidenced 'it doesn't' beats a hopeful 'it does'.</a:t>
+              <a:t>What WORKS and what does NOT — with evidence. An evidenced 'it doesn't' beats a hopeful 'it does'.</a:t>
             </a:r>
           </a:p>
           <a:p>
@@ -5456,14 +6787,53 @@
       <p:grpSpPr/>
       <p:sp>
         <p:nvSpPr>
-          <p:cNvPr id="2" name="Rectangle 1"/>
+          <p:cNvPr id="2" name="TextBox 1"/>
+          <p:cNvSpPr txBox="1"/>
+          <p:nvPr/>
+        </p:nvSpPr>
+        <p:spPr>
+          <a:xfrm>
+            <a:off x="640080" y="502920"/>
+            <a:ext cx="10058400" cy="365760"/>
+          </a:xfrm>
+          <a:prstGeom prst="rect">
+            <a:avLst/>
+          </a:prstGeom>
+          <a:noFill/>
+        </p:spPr>
+        <p:txBody>
+          <a:bodyPr wrap="square" anchor="t">
+            <a:spAutoFit/>
+          </a:bodyPr>
+          <a:lstStyle/>
+          <a:p>
+            <a:pPr algn="l">
+              <a:lnSpc>
+                <a:spcPct val="100000"/>
+              </a:lnSpc>
+            </a:pPr>
+            <a:r>
+              <a:rPr sz="1300" b="1">
+                <a:solidFill>
+                  <a:srgbClr val="00FF41"/>
+                </a:solidFill>
+                <a:latin typeface="Courier New"/>
+              </a:rPr>
+              <a:t>03.1  ·  YOUR SECTION (graded individually)</a:t>
+            </a:r>
+          </a:p>
+        </p:txBody>
+      </p:sp>
+      <p:sp>
+        <p:nvSpPr>
+          <p:cNvPr id="3" name="Rectangle 2"/>
           <p:cNvSpPr/>
           <p:nvPr/>
         </p:nvSpPr>
         <p:spPr>
           <a:xfrm>
-            <a:off x="0" y="0"/>
-            <a:ext cx="256032" cy="6858000"/>
+            <a:off x="640080" y="932688"/>
+            <a:ext cx="822960" cy="73152"/>
           </a:xfrm>
           <a:prstGeom prst="rect">
             <a:avLst/>
@@ -5500,14 +6870,14 @@
       </p:sp>
       <p:sp>
         <p:nvSpPr>
-          <p:cNvPr id="3" name="TextBox 2"/>
+          <p:cNvPr id="4" name="TextBox 3"/>
           <p:cNvSpPr txBox="1"/>
           <p:nvPr/>
         </p:nvSpPr>
         <p:spPr>
           <a:xfrm>
-            <a:off x="822960" y="1417320"/>
-            <a:ext cx="2743200" cy="1097280"/>
+            <a:off x="640080" y="1170432"/>
+            <a:ext cx="10972800" cy="914400"/>
           </a:xfrm>
           <a:prstGeom prst="rect">
             <a:avLst/>
@@ -5526,27 +6896,27 @@
               </a:lnSpc>
             </a:pPr>
             <a:r>
-              <a:rPr sz="6400" b="1">
-                <a:solidFill>
-                  <a:srgbClr val="00FF41"/>
-                </a:solidFill>
-                <a:latin typeface="Courier New"/>
-              </a:rPr>
-              <a:t>04</a:t>
-            </a:r>
-          </a:p>
-        </p:txBody>
-      </p:sp>
-      <p:sp>
-        <p:nvSpPr>
-          <p:cNvPr id="4" name="TextBox 3"/>
+              <a:rPr sz="3600" b="1">
+                <a:solidFill>
+                  <a:srgbClr val="F5F7FA"/>
+                </a:solidFill>
+                <a:latin typeface="Arial"/>
+              </a:rPr>
+              <a:t>Evan Birnbaum</a:t>
+            </a:r>
+          </a:p>
+        </p:txBody>
+      </p:sp>
+      <p:sp>
+        <p:nvSpPr>
+          <p:cNvPr id="5" name="TextBox 4"/>
           <p:cNvSpPr txBox="1"/>
           <p:nvPr/>
         </p:nvSpPr>
         <p:spPr>
           <a:xfrm>
-            <a:off x="841248" y="2487168"/>
-            <a:ext cx="10424160" cy="457200"/>
+            <a:off x="658368" y="2286000"/>
+            <a:ext cx="10881360" cy="2834640"/>
           </a:xfrm>
           <a:prstGeom prst="rect">
             <a:avLst/>
@@ -5555,6 +6925,175 @@
         </p:spPr>
         <p:txBody>
           <a:bodyPr wrap="square" anchor="t">
+            <a:spAutoFit/>
+          </a:bodyPr>
+          <a:lstStyle/>
+          <a:p>
+            <a:pPr algn="l">
+              <a:lnSpc>
+                <a:spcPct val="134000"/>
+              </a:lnSpc>
+            </a:pPr>
+            <a:r>
+              <a:rPr sz="1900" b="1">
+                <a:solidFill>
+                  <a:srgbClr val="00FF41"/>
+                </a:solidFill>
+                <a:latin typeface="Arial"/>
+              </a:rPr>
+              <a:t>→  </a:t>
+            </a:r>
+            <a:r>
+              <a:rPr sz="1900" b="0">
+                <a:solidFill>
+                  <a:srgbClr val="F5F7FA"/>
+                </a:solidFill>
+                <a:latin typeface="Arial"/>
+              </a:rPr>
+              <a:t>The lens + method I ran, and why our reading demanded it</a:t>
+            </a:r>
+          </a:p>
+          <a:p>
+            <a:pPr algn="l">
+              <a:lnSpc>
+                <a:spcPct val="134000"/>
+              </a:lnSpc>
+            </a:pPr>
+            <a:r>
+              <a:rPr sz="1900" b="1">
+                <a:solidFill>
+                  <a:srgbClr val="00FF41"/>
+                </a:solidFill>
+                <a:latin typeface="Arial"/>
+              </a:rPr>
+              <a:t>→  </a:t>
+            </a:r>
+            <a:r>
+              <a:rPr sz="1900" b="0">
+                <a:solidFill>
+                  <a:srgbClr val="F5F7FA"/>
+                </a:solidFill>
+                <a:latin typeface="Arial"/>
+              </a:rPr>
+              <a:t>My evidence - what I actually observed or measured</a:t>
+            </a:r>
+          </a:p>
+          <a:p>
+            <a:pPr algn="l">
+              <a:lnSpc>
+                <a:spcPct val="134000"/>
+              </a:lnSpc>
+            </a:pPr>
+            <a:r>
+              <a:rPr sz="1900" b="1">
+                <a:solidFill>
+                  <a:srgbClr val="00FF41"/>
+                </a:solidFill>
+                <a:latin typeface="Arial"/>
+              </a:rPr>
+              <a:t>→  </a:t>
+            </a:r>
+            <a:r>
+              <a:rPr sz="1900" b="0">
+                <a:solidFill>
+                  <a:srgbClr val="F5F7FA"/>
+                </a:solidFill>
+                <a:latin typeface="Arial"/>
+              </a:rPr>
+              <a:t>What this says WORKS - and what does NOT</a:t>
+            </a:r>
+          </a:p>
+          <a:p>
+            <a:pPr algn="l">
+              <a:lnSpc>
+                <a:spcPct val="134000"/>
+              </a:lnSpc>
+            </a:pPr>
+            <a:r>
+              <a:rPr sz="1900" b="1">
+                <a:solidFill>
+                  <a:srgbClr val="00FF41"/>
+                </a:solidFill>
+                <a:latin typeface="Arial"/>
+              </a:rPr>
+              <a:t>→  </a:t>
+            </a:r>
+            <a:r>
+              <a:rPr sz="1900" b="0">
+                <a:solidFill>
+                  <a:srgbClr val="F5F7FA"/>
+                </a:solidFill>
+                <a:latin typeface="Arial"/>
+              </a:rPr>
+              <a:t>The paper I found (real citation) and what it changes</a:t>
+            </a:r>
+          </a:p>
+        </p:txBody>
+      </p:sp>
+      <p:sp>
+        <p:nvSpPr>
+          <p:cNvPr id="6" name="Rounded Rectangle 5"/>
+          <p:cNvSpPr/>
+          <p:nvPr/>
+        </p:nvSpPr>
+        <p:spPr>
+          <a:xfrm>
+            <a:off x="640080" y="5440680"/>
+            <a:ext cx="10881360" cy="658368"/>
+          </a:xfrm>
+          <a:prstGeom prst="roundRect">
+            <a:avLst/>
+          </a:prstGeom>
+          <a:solidFill>
+            <a:srgbClr val="151B26"/>
+          </a:solidFill>
+          <a:ln w="19050">
+            <a:solidFill>
+              <a:srgbClr val="00FF41"/>
+            </a:solidFill>
+          </a:ln>
+          <a:effectLst/>
+        </p:spPr>
+        <p:style>
+          <a:lnRef idx="1">
+            <a:schemeClr val="accent1"/>
+          </a:lnRef>
+          <a:fillRef idx="3">
+            <a:schemeClr val="accent1"/>
+          </a:fillRef>
+          <a:effectRef idx="2">
+            <a:schemeClr val="accent1"/>
+          </a:effectRef>
+          <a:fontRef idx="minor">
+            <a:schemeClr val="lt1"/>
+          </a:fontRef>
+        </p:style>
+        <p:txBody>
+          <a:bodyPr rtlCol="0" anchor="ctr"/>
+          <a:lstStyle/>
+          <a:p>
+            <a:pPr algn="ctr"/>
+          </a:p>
+        </p:txBody>
+      </p:sp>
+      <p:sp>
+        <p:nvSpPr>
+          <p:cNvPr id="7" name="TextBox 6"/>
+          <p:cNvSpPr txBox="1"/>
+          <p:nvPr/>
+        </p:nvSpPr>
+        <p:spPr>
+          <a:xfrm>
+            <a:off x="914400" y="5440680"/>
+            <a:ext cx="10332720" cy="658368"/>
+          </a:xfrm>
+          <a:prstGeom prst="rect">
+            <a:avLst/>
+          </a:prstGeom>
+          <a:noFill/>
+        </p:spPr>
+        <p:txBody>
+          <a:bodyPr wrap="square" anchor="ctr">
             <a:spAutoFit/>
           </a:bodyPr>
           <a:lstStyle/>
@@ -5565,157 +7104,29 @@
               </a:lnSpc>
             </a:pPr>
             <a:r>
+              <a:rPr sz="1600" b="1">
+                <a:solidFill>
+                  <a:srgbClr val="00FF41"/>
+                </a:solidFill>
+                <a:latin typeface="Arial"/>
+              </a:rPr>
+              <a:t>▸  </a:t>
+            </a:r>
+            <a:r>
               <a:rPr sz="1500" b="1">
                 <a:solidFill>
-                  <a:srgbClr val="00FF41"/>
-                </a:solidFill>
-                <a:latin typeface="Courier New"/>
-              </a:rPr>
-              <a:t>PART 3 — OUTLOOK</a:t>
-            </a:r>
-          </a:p>
-        </p:txBody>
-      </p:sp>
-      <p:sp>
-        <p:nvSpPr>
-          <p:cNvPr id="5" name="TextBox 4"/>
-          <p:cNvSpPr txBox="1"/>
-          <p:nvPr/>
-        </p:nvSpPr>
-        <p:spPr>
-          <a:xfrm>
-            <a:off x="804672" y="2971800"/>
-            <a:ext cx="10607040" cy="1097280"/>
-          </a:xfrm>
-          <a:prstGeom prst="rect">
-            <a:avLst/>
-          </a:prstGeom>
-          <a:noFill/>
-        </p:spPr>
-        <p:txBody>
-          <a:bodyPr wrap="square" anchor="t">
-            <a:spAutoFit/>
-          </a:bodyPr>
-          <a:lstStyle/>
-          <a:p>
-            <a:pPr algn="l">
-              <a:lnSpc>
-                <a:spcPct val="103000"/>
-              </a:lnSpc>
-            </a:pPr>
-            <a:r>
-              <a:rPr sz="3800" b="1">
-                <a:solidFill>
                   <a:srgbClr val="F5F7FA"/>
                 </a:solidFill>
                 <a:latin typeface="Arial"/>
               </a:rPr>
-              <a:t>What related research has already found</a:t>
-            </a:r>
-          </a:p>
-        </p:txBody>
-      </p:sp>
-      <p:sp>
-        <p:nvSpPr>
-          <p:cNvPr id="6" name="TextBox 5"/>
-          <p:cNvSpPr txBox="1"/>
-          <p:nvPr/>
-        </p:nvSpPr>
-        <p:spPr>
-          <a:xfrm>
-            <a:off x="841248" y="4224528"/>
-            <a:ext cx="10424160" cy="1737360"/>
-          </a:xfrm>
-          <a:prstGeom prst="rect">
-            <a:avLst/>
-          </a:prstGeom>
-          <a:noFill/>
-        </p:spPr>
-        <p:txBody>
-          <a:bodyPr wrap="square" anchor="t">
-            <a:spAutoFit/>
-          </a:bodyPr>
-          <a:lstStyle/>
-          <a:p>
-            <a:pPr algn="l">
-              <a:lnSpc>
-                <a:spcPct val="128000"/>
-              </a:lnSpc>
-            </a:pPr>
-            <a:r>
-              <a:rPr sz="1700" b="1">
-                <a:solidFill>
-                  <a:srgbClr val="00FF41"/>
-                </a:solidFill>
-                <a:latin typeface="Arial"/>
-              </a:rPr>
-              <a:t>→  </a:t>
-            </a:r>
-            <a:r>
-              <a:rPr sz="1700" b="0">
-                <a:solidFill>
-                  <a:srgbClr val="8A94A6"/>
-                </a:solidFill>
-                <a:latin typeface="Arial"/>
-              </a:rPr>
-              <a:t>What have others tried in order to move this value?</a:t>
-            </a:r>
-          </a:p>
-          <a:p>
-            <a:pPr algn="l">
-              <a:lnSpc>
-                <a:spcPct val="128000"/>
-              </a:lnSpc>
-            </a:pPr>
-            <a:r>
-              <a:rPr sz="1700" b="1">
-                <a:solidFill>
-                  <a:srgbClr val="00FF41"/>
-                </a:solidFill>
-                <a:latin typeface="Arial"/>
-              </a:rPr>
-              <a:t>→  </a:t>
-            </a:r>
-            <a:r>
-              <a:rPr sz="1700" b="0">
-                <a:solidFill>
-                  <a:srgbClr val="8A94A6"/>
-                </a:solidFill>
-                <a:latin typeface="Arial"/>
-              </a:rPr>
-              <a:t>What worked — and what failed?</a:t>
-            </a:r>
-          </a:p>
-          <a:p>
-            <a:pPr algn="l">
-              <a:lnSpc>
-                <a:spcPct val="128000"/>
-              </a:lnSpc>
-            </a:pPr>
-            <a:r>
-              <a:rPr sz="1700" b="1">
-                <a:solidFill>
-                  <a:srgbClr val="00FF41"/>
-                </a:solidFill>
-                <a:latin typeface="Arial"/>
-              </a:rPr>
-              <a:t>→  </a:t>
-            </a:r>
-            <a:r>
-              <a:rPr sz="1700" b="0">
-                <a:solidFill>
-                  <a:srgbClr val="8A94A6"/>
-                </a:solidFill>
-                <a:latin typeface="Arial"/>
-              </a:rPr>
-              <a:t>2–3 REAL sources. Never invent a citation.</a:t>
-            </a:r>
-          </a:p>
-        </p:txBody>
-      </p:sp>
-      <p:sp>
-        <p:nvSpPr>
-          <p:cNvPr id="7" name="TextBox 6"/>
+              <a:t>This slide is yours. Add more slides behind it if you need them - keep your name on them.</a:t>
+            </a:r>
+          </a:p>
+        </p:txBody>
+      </p:sp>
+      <p:sp>
+        <p:nvSpPr>
+          <p:cNvPr id="8" name="TextBox 7"/>
           <p:cNvSpPr txBox="1"/>
           <p:nvPr/>
         </p:nvSpPr>
@@ -5780,14 +7191,53 @@
       <p:grpSpPr/>
       <p:sp>
         <p:nvSpPr>
-          <p:cNvPr id="2" name="Rectangle 1"/>
+          <p:cNvPr id="2" name="TextBox 1"/>
+          <p:cNvSpPr txBox="1"/>
+          <p:nvPr/>
+        </p:nvSpPr>
+        <p:spPr>
+          <a:xfrm>
+            <a:off x="640080" y="502920"/>
+            <a:ext cx="10058400" cy="365760"/>
+          </a:xfrm>
+          <a:prstGeom prst="rect">
+            <a:avLst/>
+          </a:prstGeom>
+          <a:noFill/>
+        </p:spPr>
+        <p:txBody>
+          <a:bodyPr wrap="square" anchor="t">
+            <a:spAutoFit/>
+          </a:bodyPr>
+          <a:lstStyle/>
+          <a:p>
+            <a:pPr algn="l">
+              <a:lnSpc>
+                <a:spcPct val="100000"/>
+              </a:lnSpc>
+            </a:pPr>
+            <a:r>
+              <a:rPr sz="1300" b="1">
+                <a:solidFill>
+                  <a:srgbClr val="00FF41"/>
+                </a:solidFill>
+                <a:latin typeface="Courier New"/>
+              </a:rPr>
+              <a:t>03.2  ·  YOUR SECTION (graded individually)</a:t>
+            </a:r>
+          </a:p>
+        </p:txBody>
+      </p:sp>
+      <p:sp>
+        <p:nvSpPr>
+          <p:cNvPr id="3" name="Rectangle 2"/>
           <p:cNvSpPr/>
           <p:nvPr/>
         </p:nvSpPr>
         <p:spPr>
           <a:xfrm>
-            <a:off x="0" y="0"/>
-            <a:ext cx="256032" cy="6858000"/>
+            <a:off x="640080" y="932688"/>
+            <a:ext cx="822960" cy="73152"/>
           </a:xfrm>
           <a:prstGeom prst="rect">
             <a:avLst/>
@@ -5824,14 +7274,14 @@
       </p:sp>
       <p:sp>
         <p:nvSpPr>
-          <p:cNvPr id="3" name="TextBox 2"/>
+          <p:cNvPr id="4" name="TextBox 3"/>
           <p:cNvSpPr txBox="1"/>
           <p:nvPr/>
         </p:nvSpPr>
         <p:spPr>
           <a:xfrm>
-            <a:off x="822960" y="1417320"/>
-            <a:ext cx="2743200" cy="1097280"/>
+            <a:off x="640080" y="1170432"/>
+            <a:ext cx="10972800" cy="914400"/>
           </a:xfrm>
           <a:prstGeom prst="rect">
             <a:avLst/>
@@ -5850,27 +7300,27 @@
               </a:lnSpc>
             </a:pPr>
             <a:r>
-              <a:rPr sz="6400" b="1">
-                <a:solidFill>
-                  <a:srgbClr val="00FF41"/>
-                </a:solidFill>
-                <a:latin typeface="Courier New"/>
-              </a:rPr>
-              <a:t>05</a:t>
-            </a:r>
-          </a:p>
-        </p:txBody>
-      </p:sp>
-      <p:sp>
-        <p:nvSpPr>
-          <p:cNvPr id="4" name="TextBox 3"/>
+              <a:rPr sz="3600" b="1">
+                <a:solidFill>
+                  <a:srgbClr val="F5F7FA"/>
+                </a:solidFill>
+                <a:latin typeface="Arial"/>
+              </a:rPr>
+              <a:t>Derin Sezgin</a:t>
+            </a:r>
+          </a:p>
+        </p:txBody>
+      </p:sp>
+      <p:sp>
+        <p:nvSpPr>
+          <p:cNvPr id="5" name="TextBox 4"/>
           <p:cNvSpPr txBox="1"/>
           <p:nvPr/>
         </p:nvSpPr>
         <p:spPr>
           <a:xfrm>
-            <a:off x="841248" y="2487168"/>
-            <a:ext cx="10424160" cy="457200"/>
+            <a:off x="658368" y="2286000"/>
+            <a:ext cx="10881360" cy="2834640"/>
           </a:xfrm>
           <a:prstGeom prst="rect">
             <a:avLst/>
@@ -5879,6 +7329,175 @@
         </p:spPr>
         <p:txBody>
           <a:bodyPr wrap="square" anchor="t">
+            <a:spAutoFit/>
+          </a:bodyPr>
+          <a:lstStyle/>
+          <a:p>
+            <a:pPr algn="l">
+              <a:lnSpc>
+                <a:spcPct val="134000"/>
+              </a:lnSpc>
+            </a:pPr>
+            <a:r>
+              <a:rPr sz="1900" b="1">
+                <a:solidFill>
+                  <a:srgbClr val="00FF41"/>
+                </a:solidFill>
+                <a:latin typeface="Arial"/>
+              </a:rPr>
+              <a:t>→  </a:t>
+            </a:r>
+            <a:r>
+              <a:rPr sz="1900" b="0">
+                <a:solidFill>
+                  <a:srgbClr val="F5F7FA"/>
+                </a:solidFill>
+                <a:latin typeface="Arial"/>
+              </a:rPr>
+              <a:t>The lens + method I ran, and why our reading demanded it</a:t>
+            </a:r>
+          </a:p>
+          <a:p>
+            <a:pPr algn="l">
+              <a:lnSpc>
+                <a:spcPct val="134000"/>
+              </a:lnSpc>
+            </a:pPr>
+            <a:r>
+              <a:rPr sz="1900" b="1">
+                <a:solidFill>
+                  <a:srgbClr val="00FF41"/>
+                </a:solidFill>
+                <a:latin typeface="Arial"/>
+              </a:rPr>
+              <a:t>→  </a:t>
+            </a:r>
+            <a:r>
+              <a:rPr sz="1900" b="0">
+                <a:solidFill>
+                  <a:srgbClr val="F5F7FA"/>
+                </a:solidFill>
+                <a:latin typeface="Arial"/>
+              </a:rPr>
+              <a:t>My evidence - what I actually observed or measured</a:t>
+            </a:r>
+          </a:p>
+          <a:p>
+            <a:pPr algn="l">
+              <a:lnSpc>
+                <a:spcPct val="134000"/>
+              </a:lnSpc>
+            </a:pPr>
+            <a:r>
+              <a:rPr sz="1900" b="1">
+                <a:solidFill>
+                  <a:srgbClr val="00FF41"/>
+                </a:solidFill>
+                <a:latin typeface="Arial"/>
+              </a:rPr>
+              <a:t>→  </a:t>
+            </a:r>
+            <a:r>
+              <a:rPr sz="1900" b="0">
+                <a:solidFill>
+                  <a:srgbClr val="F5F7FA"/>
+                </a:solidFill>
+                <a:latin typeface="Arial"/>
+              </a:rPr>
+              <a:t>What this says WORKS - and what does NOT</a:t>
+            </a:r>
+          </a:p>
+          <a:p>
+            <a:pPr algn="l">
+              <a:lnSpc>
+                <a:spcPct val="134000"/>
+              </a:lnSpc>
+            </a:pPr>
+            <a:r>
+              <a:rPr sz="1900" b="1">
+                <a:solidFill>
+                  <a:srgbClr val="00FF41"/>
+                </a:solidFill>
+                <a:latin typeface="Arial"/>
+              </a:rPr>
+              <a:t>→  </a:t>
+            </a:r>
+            <a:r>
+              <a:rPr sz="1900" b="0">
+                <a:solidFill>
+                  <a:srgbClr val="F5F7FA"/>
+                </a:solidFill>
+                <a:latin typeface="Arial"/>
+              </a:rPr>
+              <a:t>The paper I found (real citation) and what it changes</a:t>
+            </a:r>
+          </a:p>
+        </p:txBody>
+      </p:sp>
+      <p:sp>
+        <p:nvSpPr>
+          <p:cNvPr id="6" name="Rounded Rectangle 5"/>
+          <p:cNvSpPr/>
+          <p:nvPr/>
+        </p:nvSpPr>
+        <p:spPr>
+          <a:xfrm>
+            <a:off x="640080" y="5440680"/>
+            <a:ext cx="10881360" cy="658368"/>
+          </a:xfrm>
+          <a:prstGeom prst="roundRect">
+            <a:avLst/>
+          </a:prstGeom>
+          <a:solidFill>
+            <a:srgbClr val="151B26"/>
+          </a:solidFill>
+          <a:ln w="19050">
+            <a:solidFill>
+              <a:srgbClr val="00FF41"/>
+            </a:solidFill>
+          </a:ln>
+          <a:effectLst/>
+        </p:spPr>
+        <p:style>
+          <a:lnRef idx="1">
+            <a:schemeClr val="accent1"/>
+          </a:lnRef>
+          <a:fillRef idx="3">
+            <a:schemeClr val="accent1"/>
+          </a:fillRef>
+          <a:effectRef idx="2">
+            <a:schemeClr val="accent1"/>
+          </a:effectRef>
+          <a:fontRef idx="minor">
+            <a:schemeClr val="lt1"/>
+          </a:fontRef>
+        </p:style>
+        <p:txBody>
+          <a:bodyPr rtlCol="0" anchor="ctr"/>
+          <a:lstStyle/>
+          <a:p>
+            <a:pPr algn="ctr"/>
+          </a:p>
+        </p:txBody>
+      </p:sp>
+      <p:sp>
+        <p:nvSpPr>
+          <p:cNvPr id="7" name="TextBox 6"/>
+          <p:cNvSpPr txBox="1"/>
+          <p:nvPr/>
+        </p:nvSpPr>
+        <p:spPr>
+          <a:xfrm>
+            <a:off x="914400" y="5440680"/>
+            <a:ext cx="10332720" cy="658368"/>
+          </a:xfrm>
+          <a:prstGeom prst="rect">
+            <a:avLst/>
+          </a:prstGeom>
+          <a:noFill/>
+        </p:spPr>
+        <p:txBody>
+          <a:bodyPr wrap="square" anchor="ctr">
             <a:spAutoFit/>
           </a:bodyPr>
           <a:lstStyle/>
@@ -5889,157 +7508,29 @@
               </a:lnSpc>
             </a:pPr>
             <a:r>
+              <a:rPr sz="1600" b="1">
+                <a:solidFill>
+                  <a:srgbClr val="00FF41"/>
+                </a:solidFill>
+                <a:latin typeface="Arial"/>
+              </a:rPr>
+              <a:t>▸  </a:t>
+            </a:r>
+            <a:r>
               <a:rPr sz="1500" b="1">
                 <a:solidFill>
-                  <a:srgbClr val="00FF41"/>
-                </a:solidFill>
-                <a:latin typeface="Courier New"/>
-              </a:rPr>
-              <a:t>SO WHAT</a:t>
-            </a:r>
-          </a:p>
-        </p:txBody>
-      </p:sp>
-      <p:sp>
-        <p:nvSpPr>
-          <p:cNvPr id="5" name="TextBox 4"/>
-          <p:cNvSpPr txBox="1"/>
-          <p:nvPr/>
-        </p:nvSpPr>
-        <p:spPr>
-          <a:xfrm>
-            <a:off x="804672" y="2971800"/>
-            <a:ext cx="10607040" cy="1097280"/>
-          </a:xfrm>
-          <a:prstGeom prst="rect">
-            <a:avLst/>
-          </a:prstGeom>
-          <a:noFill/>
-        </p:spPr>
-        <p:txBody>
-          <a:bodyPr wrap="square" anchor="t">
-            <a:spAutoFit/>
-          </a:bodyPr>
-          <a:lstStyle/>
-          <a:p>
-            <a:pPr algn="l">
-              <a:lnSpc>
-                <a:spcPct val="103000"/>
-              </a:lnSpc>
-            </a:pPr>
-            <a:r>
-              <a:rPr sz="3800" b="1">
-                <a:solidFill>
                   <a:srgbClr val="F5F7FA"/>
                 </a:solidFill>
                 <a:latin typeface="Arial"/>
               </a:rPr>
-              <a:t>Our next design brief</a:t>
-            </a:r>
-          </a:p>
-        </p:txBody>
-      </p:sp>
-      <p:sp>
-        <p:nvSpPr>
-          <p:cNvPr id="6" name="TextBox 5"/>
-          <p:cNvSpPr txBox="1"/>
-          <p:nvPr/>
-        </p:nvSpPr>
-        <p:spPr>
-          <a:xfrm>
-            <a:off x="841248" y="4224528"/>
-            <a:ext cx="10424160" cy="1737360"/>
-          </a:xfrm>
-          <a:prstGeom prst="rect">
-            <a:avLst/>
-          </a:prstGeom>
-          <a:noFill/>
-        </p:spPr>
-        <p:txBody>
-          <a:bodyPr wrap="square" anchor="t">
-            <a:spAutoFit/>
-          </a:bodyPr>
-          <a:lstStyle/>
-          <a:p>
-            <a:pPr algn="l">
-              <a:lnSpc>
-                <a:spcPct val="128000"/>
-              </a:lnSpc>
-            </a:pPr>
-            <a:r>
-              <a:rPr sz="1700" b="1">
-                <a:solidFill>
-                  <a:srgbClr val="00FF41"/>
-                </a:solidFill>
-                <a:latin typeface="Arial"/>
-              </a:rPr>
-              <a:t>→  </a:t>
-            </a:r>
-            <a:r>
-              <a:rPr sz="1700" b="0">
-                <a:solidFill>
-                  <a:srgbClr val="8A94A6"/>
-                </a:solidFill>
-                <a:latin typeface="Arial"/>
-              </a:rPr>
-              <a:t>Verification is a beginning, not a verdict.</a:t>
-            </a:r>
-          </a:p>
-          <a:p>
-            <a:pPr algn="l">
-              <a:lnSpc>
-                <a:spcPct val="128000"/>
-              </a:lnSpc>
-            </a:pPr>
-            <a:r>
-              <a:rPr sz="1700" b="1">
-                <a:solidFill>
-                  <a:srgbClr val="00FF41"/>
-                </a:solidFill>
-                <a:latin typeface="Arial"/>
-              </a:rPr>
-              <a:t>→  </a:t>
-            </a:r>
-            <a:r>
-              <a:rPr sz="1700" b="0">
-                <a:solidFill>
-                  <a:srgbClr val="8A94A6"/>
-                </a:solidFill>
-                <a:latin typeface="Arial"/>
-              </a:rPr>
-              <a:t>What OTHER design could actually achieve this value?</a:t>
-            </a:r>
-          </a:p>
-          <a:p>
-            <a:pPr algn="l">
-              <a:lnSpc>
-                <a:spcPct val="128000"/>
-              </a:lnSpc>
-            </a:pPr>
-            <a:r>
-              <a:rPr sz="1700" b="1">
-                <a:solidFill>
-                  <a:srgbClr val="00FF41"/>
-                </a:solidFill>
-                <a:latin typeface="Arial"/>
-              </a:rPr>
-              <a:t>→  </a:t>
-            </a:r>
-            <a:r>
-              <a:rPr sz="1700" b="0">
-                <a:solidFill>
-                  <a:srgbClr val="8A94A6"/>
-                </a:solidFill>
-                <a:latin typeface="Arial"/>
-              </a:rPr>
-              <a:t>What should the next cycle discover? (You carry this into Wednesday.)</a:t>
-            </a:r>
-          </a:p>
-        </p:txBody>
-      </p:sp>
-      <p:sp>
-        <p:nvSpPr>
-          <p:cNvPr id="7" name="TextBox 6"/>
+              <a:t>This slide is yours. Add more slides behind it if you need them - keep your name on them.</a:t>
+            </a:r>
+          </a:p>
+        </p:txBody>
+      </p:sp>
+      <p:sp>
+        <p:nvSpPr>
+          <p:cNvPr id="8" name="TextBox 7"/>
           <p:cNvSpPr txBox="1"/>
           <p:nvPr/>
         </p:nvSpPr>
@@ -6136,7 +7627,7 @@
                 </a:solidFill>
                 <a:latin typeface="Courier New"/>
               </a:rPr>
-              <a:t>SOURCES</a:t>
+              <a:t>03.3  ·  YOUR SECTION (graded individually)</a:t>
             </a:r>
           </a:p>
         </p:txBody>
@@ -6193,7 +7684,7 @@
         </p:nvSpPr>
         <p:spPr>
           <a:xfrm>
-            <a:off x="640080" y="1188720"/>
+            <a:off x="640080" y="1170432"/>
             <a:ext cx="10972800" cy="914400"/>
           </a:xfrm>
           <a:prstGeom prst="rect">
@@ -6213,13 +7704,13 @@
               </a:lnSpc>
             </a:pPr>
             <a:r>
-              <a:rPr sz="3200" b="1">
+              <a:rPr sz="3600" b="1">
                 <a:solidFill>
                   <a:srgbClr val="F5F7FA"/>
                 </a:solidFill>
                 <a:latin typeface="Arial"/>
               </a:rPr>
-              <a:t>What we read</a:t>
+              <a:t>Magnes Dugan</a:t>
             </a:r>
           </a:p>
         </p:txBody>
@@ -6232,8 +7723,8 @@
         </p:nvSpPr>
         <p:spPr>
           <a:xfrm>
-            <a:off x="658368" y="2377440"/>
-            <a:ext cx="10881360" cy="3108960"/>
+            <a:off x="658368" y="2286000"/>
+            <a:ext cx="10881360" cy="2834640"/>
           </a:xfrm>
           <a:prstGeom prst="rect">
             <a:avLst/>
@@ -6248,115 +7739,161 @@
           <a:p>
             <a:pPr algn="l">
               <a:lnSpc>
-                <a:spcPct val="145000"/>
+                <a:spcPct val="134000"/>
               </a:lnSpc>
             </a:pPr>
             <a:r>
-              <a:rPr sz="1700" b="1">
+              <a:rPr sz="1900" b="1">
                 <a:solidFill>
                   <a:srgbClr val="00FF41"/>
                 </a:solidFill>
                 <a:latin typeface="Arial"/>
               </a:rPr>
-              <a:t>•  </a:t>
-            </a:r>
-            <a:r>
-              <a:rPr sz="1700" b="0">
-                <a:solidFill>
-                  <a:srgbClr val="8A94A6"/>
-                </a:solidFill>
-                <a:latin typeface="Arial"/>
-              </a:rPr>
-              <a:t>Author, Year. Title. Where it appeared.  —  what it found</a:t>
+              <a:t>→  </a:t>
+            </a:r>
+            <a:r>
+              <a:rPr sz="1900" b="0">
+                <a:solidFill>
+                  <a:srgbClr val="F5F7FA"/>
+                </a:solidFill>
+                <a:latin typeface="Arial"/>
+              </a:rPr>
+              <a:t>The lens + method I ran, and why our reading demanded it</a:t>
             </a:r>
           </a:p>
           <a:p>
             <a:pPr algn="l">
               <a:lnSpc>
-                <a:spcPct val="145000"/>
+                <a:spcPct val="134000"/>
               </a:lnSpc>
             </a:pPr>
             <a:r>
-              <a:rPr sz="1700" b="1">
+              <a:rPr sz="1900" b="1">
                 <a:solidFill>
                   <a:srgbClr val="00FF41"/>
                 </a:solidFill>
                 <a:latin typeface="Arial"/>
               </a:rPr>
-              <a:t>•  </a:t>
-            </a:r>
-            <a:r>
-              <a:rPr sz="1700" b="0">
-                <a:solidFill>
-                  <a:srgbClr val="8A94A6"/>
-                </a:solidFill>
-                <a:latin typeface="Arial"/>
-              </a:rPr>
-              <a:t>Author, Year. Title. Where it appeared.  —  what it found</a:t>
+              <a:t>→  </a:t>
+            </a:r>
+            <a:r>
+              <a:rPr sz="1900" b="0">
+                <a:solidFill>
+                  <a:srgbClr val="F5F7FA"/>
+                </a:solidFill>
+                <a:latin typeface="Arial"/>
+              </a:rPr>
+              <a:t>My evidence - what I actually observed or measured</a:t>
             </a:r>
           </a:p>
           <a:p>
             <a:pPr algn="l">
               <a:lnSpc>
-                <a:spcPct val="145000"/>
+                <a:spcPct val="134000"/>
               </a:lnSpc>
             </a:pPr>
             <a:r>
-              <a:rPr sz="1700" b="1">
+              <a:rPr sz="1900" b="1">
                 <a:solidFill>
                   <a:srgbClr val="00FF41"/>
                 </a:solidFill>
                 <a:latin typeface="Arial"/>
               </a:rPr>
-              <a:t>•  </a:t>
-            </a:r>
-            <a:r>
-              <a:rPr sz="1700" b="0">
-                <a:solidFill>
-                  <a:srgbClr val="8A94A6"/>
-                </a:solidFill>
-                <a:latin typeface="Arial"/>
-              </a:rPr>
-              <a:t>Author, Year. Title. Where it appeared.  —  what it found</a:t>
+              <a:t>→  </a:t>
+            </a:r>
+            <a:r>
+              <a:rPr sz="1900" b="0">
+                <a:solidFill>
+                  <a:srgbClr val="F5F7FA"/>
+                </a:solidFill>
+                <a:latin typeface="Arial"/>
+              </a:rPr>
+              <a:t>What this says WORKS - and what does NOT</a:t>
             </a:r>
           </a:p>
           <a:p>
             <a:pPr algn="l">
               <a:lnSpc>
-                <a:spcPct val="145000"/>
+                <a:spcPct val="134000"/>
               </a:lnSpc>
             </a:pPr>
             <a:r>
-              <a:rPr sz="1700" b="1">
+              <a:rPr sz="1900" b="1">
                 <a:solidFill>
                   <a:srgbClr val="00FF41"/>
                 </a:solidFill>
                 <a:latin typeface="Arial"/>
               </a:rPr>
-              <a:t>•  </a:t>
-            </a:r>
-            <a:r>
-              <a:rPr sz="1700" b="0">
-                <a:solidFill>
-                  <a:srgbClr val="8A94A6"/>
-                </a:solidFill>
-                <a:latin typeface="Arial"/>
-              </a:rPr>
-              <a:t>Author, Year. Title. Where it appeared.  —  what it found</a:t>
-            </a:r>
-          </a:p>
-        </p:txBody>
-      </p:sp>
-      <p:sp>
-        <p:nvSpPr>
-          <p:cNvPr id="6" name="TextBox 5"/>
+              <a:t>→  </a:t>
+            </a:r>
+            <a:r>
+              <a:rPr sz="1900" b="0">
+                <a:solidFill>
+                  <a:srgbClr val="F5F7FA"/>
+                </a:solidFill>
+                <a:latin typeface="Arial"/>
+              </a:rPr>
+              <a:t>The paper I found (real citation) and what it changes</a:t>
+            </a:r>
+          </a:p>
+        </p:txBody>
+      </p:sp>
+      <p:sp>
+        <p:nvSpPr>
+          <p:cNvPr id="6" name="Rounded Rectangle 5"/>
+          <p:cNvSpPr/>
+          <p:nvPr/>
+        </p:nvSpPr>
+        <p:spPr>
+          <a:xfrm>
+            <a:off x="640080" y="5440680"/>
+            <a:ext cx="10881360" cy="658368"/>
+          </a:xfrm>
+          <a:prstGeom prst="roundRect">
+            <a:avLst/>
+          </a:prstGeom>
+          <a:solidFill>
+            <a:srgbClr val="151B26"/>
+          </a:solidFill>
+          <a:ln w="19050">
+            <a:solidFill>
+              <a:srgbClr val="00FF41"/>
+            </a:solidFill>
+          </a:ln>
+          <a:effectLst/>
+        </p:spPr>
+        <p:style>
+          <a:lnRef idx="1">
+            <a:schemeClr val="accent1"/>
+          </a:lnRef>
+          <a:fillRef idx="3">
+            <a:schemeClr val="accent1"/>
+          </a:fillRef>
+          <a:effectRef idx="2">
+            <a:schemeClr val="accent1"/>
+          </a:effectRef>
+          <a:fontRef idx="minor">
+            <a:schemeClr val="lt1"/>
+          </a:fontRef>
+        </p:style>
+        <p:txBody>
+          <a:bodyPr rtlCol="0" anchor="ctr"/>
+          <a:lstStyle/>
+          <a:p>
+            <a:pPr algn="ctr"/>
+          </a:p>
+        </p:txBody>
+      </p:sp>
+      <p:sp>
+        <p:nvSpPr>
+          <p:cNvPr id="7" name="TextBox 6"/>
           <p:cNvSpPr txBox="1"/>
           <p:nvPr/>
         </p:nvSpPr>
         <p:spPr>
           <a:xfrm>
-            <a:off x="658368" y="5715000"/>
-            <a:ext cx="10881360" cy="365760"/>
+            <a:off x="914400" y="5440680"/>
+            <a:ext cx="10332720" cy="658368"/>
           </a:xfrm>
           <a:prstGeom prst="rect">
             <a:avLst/>
@@ -6364,7 +7901,7 @@
           <a:noFill/>
         </p:spPr>
         <p:txBody>
-          <a:bodyPr wrap="square" anchor="t">
+          <a:bodyPr wrap="square" anchor="ctr">
             <a:spAutoFit/>
           </a:bodyPr>
           <a:lstStyle/>
@@ -6375,20 +7912,433 @@
               </a:lnSpc>
             </a:pPr>
             <a:r>
-              <a:rPr sz="1300" b="0">
+              <a:rPr sz="1600" b="1">
+                <a:solidFill>
+                  <a:srgbClr val="00FF41"/>
+                </a:solidFill>
+                <a:latin typeface="Arial"/>
+              </a:rPr>
+              <a:t>▸  </a:t>
+            </a:r>
+            <a:r>
+              <a:rPr sz="1500" b="1">
+                <a:solidFill>
+                  <a:srgbClr val="F5F7FA"/>
+                </a:solidFill>
+                <a:latin typeface="Arial"/>
+              </a:rPr>
+              <a:t>This slide is yours. Add more slides behind it if you need them - keep your name on them.</a:t>
+            </a:r>
+          </a:p>
+        </p:txBody>
+      </p:sp>
+      <p:sp>
+        <p:nvSpPr>
+          <p:cNvPr id="8" name="TextBox 7"/>
+          <p:cNvSpPr txBox="1"/>
+          <p:nvPr/>
+        </p:nvSpPr>
+        <p:spPr>
+          <a:xfrm>
+            <a:off x="640080" y="6355080"/>
+            <a:ext cx="10972800" cy="365760"/>
+          </a:xfrm>
+          <a:prstGeom prst="rect">
+            <a:avLst/>
+          </a:prstGeom>
+          <a:noFill/>
+        </p:spPr>
+        <p:txBody>
+          <a:bodyPr wrap="square" anchor="t">
+            <a:spAutoFit/>
+          </a:bodyPr>
+          <a:lstStyle/>
+          <a:p>
+            <a:pPr algn="l">
+              <a:lnSpc>
+                <a:spcPct val="100000"/>
+              </a:lnSpc>
+            </a:pPr>
+            <a:r>
+              <a:rPr sz="1000" b="0">
                 <a:solidFill>
                   <a:srgbClr val="5A6474"/>
                 </a:solidFill>
                 <a:latin typeface="Courier New"/>
               </a:rPr>
-              <a:t>Real papers only — never invent a citation.</a:t>
-            </a:r>
+              <a:t>Value Verification · TECHIE 1121 · Cornell Tech · Tue Jul 28</a:t>
+            </a:r>
+          </a:p>
+        </p:txBody>
+      </p:sp>
+    </p:spTree>
+  </p:cSld>
+  <p:clrMapOvr>
+    <a:masterClrMapping/>
+  </p:clrMapOvr>
+</p:sld>
+</file>
+
+<file path=ppt/slides/slide9.xml><?xml version="1.0" encoding="utf-8"?>
+<p:sld xmlns:a="http://schemas.openxmlformats.org/drawingml/2006/main" xmlns:p="http://schemas.openxmlformats.org/presentationml/2006/main" xmlns:r="http://schemas.openxmlformats.org/officeDocument/2006/relationships">
+  <p:cSld>
+    <p:bg>
+      <p:bgPr>
+        <a:solidFill>
+          <a:srgbClr val="0B0E14"/>
+        </a:solidFill>
+        <a:effectLst/>
+      </p:bgPr>
+    </p:bg>
+    <p:spTree>
+      <p:nvGrpSpPr>
+        <p:cNvPr id="1" name=""/>
+        <p:cNvGrpSpPr/>
+        <p:nvPr/>
+      </p:nvGrpSpPr>
+      <p:grpSpPr/>
+      <p:sp>
+        <p:nvSpPr>
+          <p:cNvPr id="2" name="TextBox 1"/>
+          <p:cNvSpPr txBox="1"/>
+          <p:nvPr/>
+        </p:nvSpPr>
+        <p:spPr>
+          <a:xfrm>
+            <a:off x="640080" y="502920"/>
+            <a:ext cx="10058400" cy="365760"/>
+          </a:xfrm>
+          <a:prstGeom prst="rect">
+            <a:avLst/>
+          </a:prstGeom>
+          <a:noFill/>
+        </p:spPr>
+        <p:txBody>
+          <a:bodyPr wrap="square" anchor="t">
+            <a:spAutoFit/>
+          </a:bodyPr>
+          <a:lstStyle/>
+          <a:p>
+            <a:pPr algn="l">
+              <a:lnSpc>
+                <a:spcPct val="100000"/>
+              </a:lnSpc>
+            </a:pPr>
+            <a:r>
+              <a:rPr sz="1300" b="1">
+                <a:solidFill>
+                  <a:srgbClr val="00FF41"/>
+                </a:solidFill>
+                <a:latin typeface="Courier New"/>
+              </a:rPr>
+              <a:t>03.4  ·  YOUR SECTION (graded individually)</a:t>
+            </a:r>
+          </a:p>
+        </p:txBody>
+      </p:sp>
+      <p:sp>
+        <p:nvSpPr>
+          <p:cNvPr id="3" name="Rectangle 2"/>
+          <p:cNvSpPr/>
+          <p:nvPr/>
+        </p:nvSpPr>
+        <p:spPr>
+          <a:xfrm>
+            <a:off x="640080" y="932688"/>
+            <a:ext cx="822960" cy="73152"/>
+          </a:xfrm>
+          <a:prstGeom prst="rect">
+            <a:avLst/>
+          </a:prstGeom>
+          <a:solidFill>
+            <a:srgbClr val="00FF41"/>
+          </a:solidFill>
+          <a:ln>
+            <a:noFill/>
+          </a:ln>
+          <a:effectLst/>
+        </p:spPr>
+        <p:style>
+          <a:lnRef idx="1">
+            <a:schemeClr val="accent1"/>
+          </a:lnRef>
+          <a:fillRef idx="3">
+            <a:schemeClr val="accent1"/>
+          </a:fillRef>
+          <a:effectRef idx="2">
+            <a:schemeClr val="accent1"/>
+          </a:effectRef>
+          <a:fontRef idx="minor">
+            <a:schemeClr val="lt1"/>
+          </a:fontRef>
+        </p:style>
+        <p:txBody>
+          <a:bodyPr rtlCol="0" anchor="ctr"/>
+          <a:lstStyle/>
+          <a:p>
+            <a:pPr algn="ctr"/>
+          </a:p>
+        </p:txBody>
+      </p:sp>
+      <p:sp>
+        <p:nvSpPr>
+          <p:cNvPr id="4" name="TextBox 3"/>
+          <p:cNvSpPr txBox="1"/>
+          <p:nvPr/>
+        </p:nvSpPr>
+        <p:spPr>
+          <a:xfrm>
+            <a:off x="640080" y="1170432"/>
+            <a:ext cx="10972800" cy="914400"/>
+          </a:xfrm>
+          <a:prstGeom prst="rect">
+            <a:avLst/>
+          </a:prstGeom>
+          <a:noFill/>
+        </p:spPr>
+        <p:txBody>
+          <a:bodyPr wrap="square" anchor="t">
+            <a:spAutoFit/>
+          </a:bodyPr>
+          <a:lstStyle/>
+          <a:p>
+            <a:pPr algn="l">
+              <a:lnSpc>
+                <a:spcPct val="100000"/>
+              </a:lnSpc>
+            </a:pPr>
+            <a:r>
+              <a:rPr sz="3600" b="1">
+                <a:solidFill>
+                  <a:srgbClr val="F5F7FA"/>
+                </a:solidFill>
+                <a:latin typeface="Arial"/>
+              </a:rPr>
+              <a:t>[ +1 — add your name ]</a:t>
+            </a:r>
+          </a:p>
+        </p:txBody>
+      </p:sp>
+      <p:sp>
+        <p:nvSpPr>
+          <p:cNvPr id="5" name="TextBox 4"/>
+          <p:cNvSpPr txBox="1"/>
+          <p:nvPr/>
+        </p:nvSpPr>
+        <p:spPr>
+          <a:xfrm>
+            <a:off x="658368" y="2286000"/>
+            <a:ext cx="10881360" cy="2834640"/>
+          </a:xfrm>
+          <a:prstGeom prst="rect">
+            <a:avLst/>
+          </a:prstGeom>
+          <a:noFill/>
+        </p:spPr>
+        <p:txBody>
+          <a:bodyPr wrap="square" anchor="t">
+            <a:spAutoFit/>
+          </a:bodyPr>
+          <a:lstStyle/>
+          <a:p>
+            <a:pPr algn="l">
+              <a:lnSpc>
+                <a:spcPct val="134000"/>
+              </a:lnSpc>
+            </a:pPr>
+            <a:r>
+              <a:rPr sz="1900" b="1">
+                <a:solidFill>
+                  <a:srgbClr val="00FF41"/>
+                </a:solidFill>
+                <a:latin typeface="Arial"/>
+              </a:rPr>
+              <a:t>→  </a:t>
+            </a:r>
+            <a:r>
+              <a:rPr sz="1900" b="0">
+                <a:solidFill>
+                  <a:srgbClr val="F5F7FA"/>
+                </a:solidFill>
+                <a:latin typeface="Arial"/>
+              </a:rPr>
+              <a:t>The lens + method I ran, and why our reading demanded it</a:t>
+            </a:r>
+          </a:p>
+          <a:p>
+            <a:pPr algn="l">
+              <a:lnSpc>
+                <a:spcPct val="134000"/>
+              </a:lnSpc>
+            </a:pPr>
+            <a:r>
+              <a:rPr sz="1900" b="1">
+                <a:solidFill>
+                  <a:srgbClr val="00FF41"/>
+                </a:solidFill>
+                <a:latin typeface="Arial"/>
+              </a:rPr>
+              <a:t>→  </a:t>
+            </a:r>
+            <a:r>
+              <a:rPr sz="1900" b="0">
+                <a:solidFill>
+                  <a:srgbClr val="F5F7FA"/>
+                </a:solidFill>
+                <a:latin typeface="Arial"/>
+              </a:rPr>
+              <a:t>My evidence - what I actually observed or measured</a:t>
+            </a:r>
+          </a:p>
+          <a:p>
+            <a:pPr algn="l">
+              <a:lnSpc>
+                <a:spcPct val="134000"/>
+              </a:lnSpc>
+            </a:pPr>
+            <a:r>
+              <a:rPr sz="1900" b="1">
+                <a:solidFill>
+                  <a:srgbClr val="00FF41"/>
+                </a:solidFill>
+                <a:latin typeface="Arial"/>
+              </a:rPr>
+              <a:t>→  </a:t>
+            </a:r>
+            <a:r>
+              <a:rPr sz="1900" b="0">
+                <a:solidFill>
+                  <a:srgbClr val="F5F7FA"/>
+                </a:solidFill>
+                <a:latin typeface="Arial"/>
+              </a:rPr>
+              <a:t>What this says WORKS - and what does NOT</a:t>
+            </a:r>
+          </a:p>
+          <a:p>
+            <a:pPr algn="l">
+              <a:lnSpc>
+                <a:spcPct val="134000"/>
+              </a:lnSpc>
+            </a:pPr>
+            <a:r>
+              <a:rPr sz="1900" b="1">
+                <a:solidFill>
+                  <a:srgbClr val="00FF41"/>
+                </a:solidFill>
+                <a:latin typeface="Arial"/>
+              </a:rPr>
+              <a:t>→  </a:t>
+            </a:r>
+            <a:r>
+              <a:rPr sz="1900" b="0">
+                <a:solidFill>
+                  <a:srgbClr val="F5F7FA"/>
+                </a:solidFill>
+                <a:latin typeface="Arial"/>
+              </a:rPr>
+              <a:t>The paper I found (real citation) and what it changes</a:t>
+            </a:r>
+          </a:p>
+        </p:txBody>
+      </p:sp>
+      <p:sp>
+        <p:nvSpPr>
+          <p:cNvPr id="6" name="Rounded Rectangle 5"/>
+          <p:cNvSpPr/>
+          <p:nvPr/>
+        </p:nvSpPr>
+        <p:spPr>
+          <a:xfrm>
+            <a:off x="640080" y="5440680"/>
+            <a:ext cx="10881360" cy="658368"/>
+          </a:xfrm>
+          <a:prstGeom prst="roundRect">
+            <a:avLst/>
+          </a:prstGeom>
+          <a:solidFill>
+            <a:srgbClr val="151B26"/>
+          </a:solidFill>
+          <a:ln w="19050">
+            <a:solidFill>
+              <a:srgbClr val="00FF41"/>
+            </a:solidFill>
+          </a:ln>
+          <a:effectLst/>
+        </p:spPr>
+        <p:style>
+          <a:lnRef idx="1">
+            <a:schemeClr val="accent1"/>
+          </a:lnRef>
+          <a:fillRef idx="3">
+            <a:schemeClr val="accent1"/>
+          </a:fillRef>
+          <a:effectRef idx="2">
+            <a:schemeClr val="accent1"/>
+          </a:effectRef>
+          <a:fontRef idx="minor">
+            <a:schemeClr val="lt1"/>
+          </a:fontRef>
+        </p:style>
+        <p:txBody>
+          <a:bodyPr rtlCol="0" anchor="ctr"/>
+          <a:lstStyle/>
+          <a:p>
+            <a:pPr algn="ctr"/>
           </a:p>
         </p:txBody>
       </p:sp>
       <p:sp>
         <p:nvSpPr>
           <p:cNvPr id="7" name="TextBox 6"/>
+          <p:cNvSpPr txBox="1"/>
+          <p:nvPr/>
+        </p:nvSpPr>
+        <p:spPr>
+          <a:xfrm>
+            <a:off x="914400" y="5440680"/>
+            <a:ext cx="10332720" cy="658368"/>
+          </a:xfrm>
+          <a:prstGeom prst="rect">
+            <a:avLst/>
+          </a:prstGeom>
+          <a:noFill/>
+        </p:spPr>
+        <p:txBody>
+          <a:bodyPr wrap="square" anchor="ctr">
+            <a:spAutoFit/>
+          </a:bodyPr>
+          <a:lstStyle/>
+          <a:p>
+            <a:pPr algn="l">
+              <a:lnSpc>
+                <a:spcPct val="100000"/>
+              </a:lnSpc>
+            </a:pPr>
+            <a:r>
+              <a:rPr sz="1600" b="1">
+                <a:solidFill>
+                  <a:srgbClr val="00FF41"/>
+                </a:solidFill>
+                <a:latin typeface="Arial"/>
+              </a:rPr>
+              <a:t>▸  </a:t>
+            </a:r>
+            <a:r>
+              <a:rPr sz="1500" b="1">
+                <a:solidFill>
+                  <a:srgbClr val="F5F7FA"/>
+                </a:solidFill>
+                <a:latin typeface="Arial"/>
+              </a:rPr>
+              <a:t>This slide is yours. Add more slides behind it if you need them - keep your name on them.</a:t>
+            </a:r>
+          </a:p>
+        </p:txBody>
+      </p:sp>
+      <p:sp>
+        <p:nvSpPr>
+          <p:cNvPr id="8" name="TextBox 7"/>
           <p:cNvSpPr txBox="1"/>
           <p:nvPr/>
         </p:nvSpPr>

--- a/slides/team-decks/Week3-Tue-guantanamo-bay-wendys.pptx
+++ b/slides/team-decks/Week3-Tue-guantanamo-bay-wendys.pptx
@@ -513,7 +513,7 @@
           <a:lstStyle/>
           <a:p>
             <a:r>
-              <a:t>Title slide. Confirm the value and the member list before presenting.</a:t>
+              <a:t>Team name = the value you carry into the final. Confirm the value + members before presenting.</a:t>
             </a:r>
           </a:p>
         </p:txBody>
@@ -4209,7 +4209,7 @@
         </p:nvSpPr>
         <p:spPr>
           <a:xfrm>
-            <a:off x="822960" y="1600200"/>
+            <a:off x="822960" y="1554480"/>
             <a:ext cx="10515600" cy="457200"/>
           </a:xfrm>
           <a:prstGeom prst="rect">
@@ -4248,7 +4248,7 @@
         </p:nvSpPr>
         <p:spPr>
           <a:xfrm>
-            <a:off x="804672" y="2148840"/>
+            <a:off x="804672" y="2103120"/>
             <a:ext cx="10607040" cy="1737360"/>
           </a:xfrm>
           <a:prstGeom prst="rect">
@@ -4270,11 +4270,11 @@
             <a:r>
               <a:rPr sz="4600" b="1">
                 <a:solidFill>
-                  <a:srgbClr val="F5F7FA"/>
-                </a:solidFill>
-                <a:latin typeface="Arial"/>
-              </a:rPr>
-              <a:t>Guantanamo Bay Wendy's</a:t>
+                  <a:srgbClr val="8A94A6"/>
+                </a:solidFill>
+                <a:latin typeface="Arial"/>
+              </a:rPr>
+              <a:t>[ name your team after your value ]</a:t>
             </a:r>
           </a:p>
         </p:txBody>
@@ -4326,8 +4326,8 @@
         </p:nvSpPr>
         <p:spPr>
           <a:xfrm>
-            <a:off x="841248" y="4526280"/>
-            <a:ext cx="10424160" cy="548640"/>
+            <a:off x="841248" y="4434840"/>
+            <a:ext cx="10424160" cy="457200"/>
           </a:xfrm>
           <a:prstGeom prst="rect">
             <a:avLst/>
@@ -4346,22 +4346,13 @@
               </a:lnSpc>
             </a:pPr>
             <a:r>
-              <a:rPr sz="1800" b="0">
-                <a:solidFill>
-                  <a:srgbClr val="F5F7FA"/>
-                </a:solidFill>
-                <a:latin typeface="Arial"/>
-              </a:rPr>
-              <a:t>The value we're carrying:  </a:t>
-            </a:r>
-            <a:r>
-              <a:rPr sz="1800" b="1">
-                <a:solidFill>
-                  <a:srgbClr val="8A94A6"/>
-                </a:solidFill>
-                <a:latin typeface="Arial"/>
-              </a:rPr>
-              <a:t>[ fill in ]</a:t>
+              <a:rPr sz="1300" b="0">
+                <a:solidFill>
+                  <a:srgbClr val="5A6474"/>
+                </a:solidFill>
+                <a:latin typeface="Courier New"/>
+              </a:rPr>
+              <a:t>GitHub team: Guantanamo Bay Wendy's</a:t>
             </a:r>
           </a:p>
         </p:txBody>

--- a/slides/team-decks/Week3-Tue-guantanamo-bay-wendys.pptx
+++ b/slides/team-decks/Week3-Tue-guantanamo-bay-wendys.pptx
@@ -4950,7 +4950,7 @@
                 </a:solidFill>
                 <a:latin typeface="Arial"/>
               </a:rPr>
-              <a:t>Verification is a beginning, not a verdict.</a:t>
+              <a:t>Verification opens the next design - it doesn't just grade this one.</a:t>
             </a:r>
           </a:p>
           <a:p>

--- a/slides/team-decks/Week3-Tue-guantanamo-bay-wendys.pptx
+++ b/slides/team-decks/Week3-Tue-guantanamo-bay-wendys.pptx
@@ -1073,7 +1073,7 @@
           <a:lstStyle/>
           <a:p>
             <a:r>
-              <a:t>[ +1 — add your name ]'s individually graded section. Their reflection lives in their own lane on the team FigJam canvas.</a:t>
+              <a:t>[ +1 - add your name ]'s individually graded section. Their reflection lives in their own lane on the team FigJam canvas.</a:t>
             </a:r>
           </a:p>
         </p:txBody>
@@ -4235,7 +4235,7 @@
                 </a:solidFill>
                 <a:latin typeface="Courier New"/>
               </a:rPr>
-              <a:t>VALUE VERIFICATION · TEAM RESEARCH DECK</a:t>
+              <a:t>VALUE-CENTERED USER RESEARCH DECK</a:t>
             </a:r>
           </a:p>
         </p:txBody>
@@ -4313,7 +4313,7 @@
                 </a:solidFill>
                 <a:latin typeface="Arial"/>
               </a:rPr>
-              <a:t>Evan Birnbaum · Derin Sezgin · Magnes Dugan · [ +1 — add your name ]</a:t>
+              <a:t>Evan Birnbaum · Derin Sezgin · Magnes Dugan · [ +1 - add your name ]</a:t>
             </a:r>
           </a:p>
         </p:txBody>
@@ -4326,8 +4326,8 @@
         </p:nvSpPr>
         <p:spPr>
           <a:xfrm>
-            <a:off x="841248" y="4434840"/>
-            <a:ext cx="10424160" cy="457200"/>
+            <a:off x="841248" y="4206240"/>
+            <a:ext cx="10607040" cy="457200"/>
           </a:xfrm>
           <a:prstGeom prst="rect">
             <a:avLst/>
@@ -4346,6 +4346,54 @@
               </a:lnSpc>
             </a:pPr>
             <a:r>
+              <a:rPr sz="1500" b="1">
+                <a:solidFill>
+                  <a:srgbClr val="00FF41"/>
+                </a:solidFill>
+                <a:latin typeface="Courier New"/>
+              </a:rPr>
+              <a:t>Project 2:  </a:t>
+            </a:r>
+            <a:r>
+              <a:rPr sz="1500" b="0">
+                <a:solidFill>
+                  <a:srgbClr val="8A94A6"/>
+                </a:solidFill>
+                <a:latin typeface="Arial"/>
+              </a:rPr>
+              <a:t>Fixr Findr</a:t>
+            </a:r>
+          </a:p>
+        </p:txBody>
+      </p:sp>
+      <p:sp>
+        <p:nvSpPr>
+          <p:cNvPr id="7" name="TextBox 6"/>
+          <p:cNvSpPr txBox="1"/>
+          <p:nvPr/>
+        </p:nvSpPr>
+        <p:spPr>
+          <a:xfrm>
+            <a:off x="841248" y="4709160"/>
+            <a:ext cx="10424160" cy="457200"/>
+          </a:xfrm>
+          <a:prstGeom prst="rect">
+            <a:avLst/>
+          </a:prstGeom>
+          <a:noFill/>
+        </p:spPr>
+        <p:txBody>
+          <a:bodyPr wrap="square" anchor="t">
+            <a:spAutoFit/>
+          </a:bodyPr>
+          <a:lstStyle/>
+          <a:p>
+            <a:pPr algn="l">
+              <a:lnSpc>
+                <a:spcPct val="100000"/>
+              </a:lnSpc>
+            </a:pPr>
+            <a:r>
               <a:rPr sz="1300" b="0">
                 <a:solidFill>
                   <a:srgbClr val="5A6474"/>
@@ -4359,7 +4407,7 @@
       </p:sp>
       <p:sp>
         <p:nvSpPr>
-          <p:cNvPr id="7" name="TextBox 6"/>
+          <p:cNvPr id="8" name="TextBox 7"/>
           <p:cNvSpPr txBox="1"/>
           <p:nvPr/>
         </p:nvSpPr>
@@ -5921,7 +5969,7 @@
                 </a:solidFill>
                 <a:latin typeface="Courier New"/>
               </a:rPr>
-              <a:t>THE VALUE &amp; THE READING</a:t>
+              <a:t>THE VALUE &amp; HOW WE DEFINE IT</a:t>
             </a:r>
           </a:p>
         </p:txBody>
@@ -5960,7 +6008,7 @@
                 </a:solidFill>
                 <a:latin typeface="Arial"/>
               </a:rPr>
-              <a:t>What we claimed — and which reading we built for</a:t>
+              <a:t>What we claimed — and how we operationalize it</a:t>
             </a:r>
           </a:p>
         </p:txBody>
@@ -6033,7 +6081,7 @@
                 </a:solidFill>
                 <a:latin typeface="Arial"/>
               </a:rPr>
-              <a:t>Which reading of the value did we actually design for? (e.g. privacy as control vs. security vs. contextual integrity)</a:t>
+              <a:t>How do we operationalize / define the value? (e.g. privacy as control vs. security vs. contextual integrity)</a:t>
             </a:r>
           </a:p>
           <a:p>
@@ -6058,7 +6106,7 @@
                 </a:solidFill>
                 <a:latin typeface="Arial"/>
               </a:rPr>
-              <a:t>Operationalized: if it's present, users will DO ___ / UNDERSTAND ___ / FEEL ___.</a:t>
+              <a:t>If it's present, users will DO ___ / UNDERSTAND ___ / FEEL ___.</a:t>
             </a:r>
           </a:p>
         </p:txBody>
@@ -8105,7 +8153,7 @@
                 </a:solidFill>
                 <a:latin typeface="Arial"/>
               </a:rPr>
-              <a:t>[ +1 — add your name ]</a:t>
+              <a:t>[ +1 - add your name ]</a:t>
             </a:r>
           </a:p>
         </p:txBody>

--- a/slides/team-decks/Week3-Tue-guantanamo-bay-wendys.pptx
+++ b/slides/team-decks/Week3-Tue-guantanamo-bay-wendys.pptx
@@ -16,7 +16,6 @@
     <p:sldId id="264" r:id="rId16"/>
     <p:sldId id="265" r:id="rId17"/>
     <p:sldId id="266" r:id="rId18"/>
-    <p:sldId id="267" r:id="rId19"/>
   </p:sldIdLst>
   <p:sldSz cx="12191695" cy="6858000" type="screen4x3"/>
   <p:notesSz cx="6858000" cy="9144000"/>
@@ -538,76 +537,6 @@
 </p:notes>
 </file>
 
-<file path=ppt/notesSlides/notesSlide10.xml><?xml version="1.0" encoding="utf-8"?>
-<p:notes xmlns:a="http://schemas.openxmlformats.org/drawingml/2006/main" xmlns:p="http://schemas.openxmlformats.org/presentationml/2006/main" xmlns:r="http://schemas.openxmlformats.org/officeDocument/2006/relationships">
-  <p:cSld>
-    <p:spTree>
-      <p:nvGrpSpPr>
-        <p:cNvPr id="1" name=""/>
-        <p:cNvGrpSpPr/>
-        <p:nvPr/>
-      </p:nvGrpSpPr>
-      <p:grpSpPr>
-        <a:xfrm>
-          <a:off x="0" y="0"/>
-          <a:ext cx="0" cy="0"/>
-          <a:chOff x="0" y="0"/>
-          <a:chExt cx="0" cy="0"/>
-        </a:xfrm>
-      </p:grpSpPr>
-      <p:sp>
-        <p:nvSpPr>
-          <p:cNvPr id="2" name="Slide Image Placeholder 1"/>
-          <p:cNvSpPr>
-            <a:spLocks noGrp="1"/>
-          </p:cNvSpPr>
-          <p:nvPr>
-            <p:ph type="sldImg" idx="2"/>
-          </p:nvPr>
-        </p:nvSpPr>
-        <p:spPr/>
-      </p:sp>
-      <p:sp>
-        <p:nvSpPr>
-          <p:cNvPr id="3" name="Notes Placeholder 2"/>
-          <p:cNvSpPr>
-            <a:spLocks noGrp="1"/>
-          </p:cNvSpPr>
-          <p:nvPr>
-            <p:ph type="body" idx="3" sz="quarter"/>
-          </p:nvPr>
-        </p:nvSpPr>
-        <p:spPr/>
-        <p:txBody>
-          <a:bodyPr/>
-          <a:lstStyle/>
-          <a:p>
-            <a:r>
-              <a:t>Section header — the team's own slides go after this one.</a:t>
-            </a:r>
-          </a:p>
-        </p:txBody>
-      </p:sp>
-      <p:sp>
-        <p:nvSpPr>
-          <p:cNvPr id="4" name="Slide Number Placeholder 3"/>
-          <p:cNvSpPr>
-            <a:spLocks noGrp="1"/>
-          </p:cNvSpPr>
-          <p:nvPr>
-            <p:ph type="sldNum" idx="5" sz="quarter"/>
-          </p:nvPr>
-        </p:nvSpPr>
-        <p:spPr/>
-      </p:sp>
-    </p:spTree>
-  </p:cSld>
-  <p:clrMapOvr>
-    <a:masterClrMapping/>
-  </p:clrMapOvr>
-</p:notes>
-</file>
-
 <file path=ppt/notesSlides/notesSlide2.xml><?xml version="1.0" encoding="utf-8"?>
 <p:notes xmlns:a="http://schemas.openxmlformats.org/drawingml/2006/main" xmlns:p="http://schemas.openxmlformats.org/presentationml/2006/main" xmlns:r="http://schemas.openxmlformats.org/officeDocument/2006/relationships">
   <p:cSld>
@@ -863,7 +792,7 @@
           <a:lstStyle/>
           <a:p>
             <a:r>
-              <a:t>Evan Birnbaum's individually graded section. Their reflection lives in their own lane on the team FigJam canvas.</a:t>
+              <a:t>Evan Birnbaum's individual contribution: the design intervention they researched. Reflection lives in their own FigJam lane.</a:t>
             </a:r>
           </a:p>
         </p:txBody>
@@ -933,7 +862,7 @@
           <a:lstStyle/>
           <a:p>
             <a:r>
-              <a:t>Derin Sezgin's individually graded section. Their reflection lives in their own lane on the team FigJam canvas.</a:t>
+              <a:t>Derin Sezgin's individual contribution: the design intervention they researched. Reflection lives in their own FigJam lane.</a:t>
             </a:r>
           </a:p>
         </p:txBody>
@@ -1003,7 +932,7 @@
           <a:lstStyle/>
           <a:p>
             <a:r>
-              <a:t>Magnes Dugan's individually graded section. Their reflection lives in their own lane on the team FigJam canvas.</a:t>
+              <a:t>Magnes Dugan's individual contribution: the design intervention they researched. Reflection lives in their own FigJam lane.</a:t>
             </a:r>
           </a:p>
         </p:txBody>
@@ -1073,7 +1002,7 @@
           <a:lstStyle/>
           <a:p>
             <a:r>
-              <a:t>[ +1 - add your name ]'s individually graded section. Their reflection lives in their own lane on the team FigJam canvas.</a:t>
+              <a:t>[ +1 - add your name ]'s individual contribution: the design intervention they researched. Reflection lives in their own FigJam lane.</a:t>
             </a:r>
           </a:p>
         </p:txBody>
@@ -4587,7 +4516,7 @@
                 </a:solidFill>
                 <a:latin typeface="Courier New"/>
               </a:rPr>
-              <a:t>PART 3 — OUTLOOK</a:t>
+              <a:t>OUR DESIGN DIRECTIONS</a:t>
             </a:r>
           </a:p>
         </p:txBody>
@@ -4626,7 +4555,7 @@
                 </a:solidFill>
                 <a:latin typeface="Arial"/>
               </a:rPr>
-              <a:t>What related research has already found</a:t>
+              <a:t>Generative - where the evidence points (carry into Wednesday)</a:t>
             </a:r>
           </a:p>
         </p:txBody>
@@ -4674,7 +4603,7 @@
                 </a:solidFill>
                 <a:latin typeface="Arial"/>
               </a:rPr>
-              <a:t>What have others tried in order to move this value?</a:t>
+              <a:t>2-3 design directions our research points to.</a:t>
             </a:r>
           </a:p>
           <a:p>
@@ -4699,7 +4628,7 @@
                 </a:solidFill>
                 <a:latin typeface="Arial"/>
               </a:rPr>
-              <a:t>What worked — and what failed?</a:t>
+              <a:t>Which one has the strongest evidence behind it?</a:t>
             </a:r>
           </a:p>
           <a:p>
@@ -4724,7 +4653,7 @@
                 </a:solidFill>
                 <a:latin typeface="Arial"/>
               </a:rPr>
-              <a:t>2–3 REAL sources. Never invent a citation.</a:t>
+              <a:t>What would we still need to verify - and how?</a:t>
             </a:r>
           </a:p>
         </p:txBody>
@@ -4796,330 +4725,6 @@
       <p:grpSpPr/>
       <p:sp>
         <p:nvSpPr>
-          <p:cNvPr id="2" name="Rectangle 1"/>
-          <p:cNvSpPr/>
-          <p:nvPr/>
-        </p:nvSpPr>
-        <p:spPr>
-          <a:xfrm>
-            <a:off x="0" y="0"/>
-            <a:ext cx="256032" cy="6858000"/>
-          </a:xfrm>
-          <a:prstGeom prst="rect">
-            <a:avLst/>
-          </a:prstGeom>
-          <a:solidFill>
-            <a:srgbClr val="00FF41"/>
-          </a:solidFill>
-          <a:ln>
-            <a:noFill/>
-          </a:ln>
-          <a:effectLst/>
-        </p:spPr>
-        <p:style>
-          <a:lnRef idx="1">
-            <a:schemeClr val="accent1"/>
-          </a:lnRef>
-          <a:fillRef idx="3">
-            <a:schemeClr val="accent1"/>
-          </a:fillRef>
-          <a:effectRef idx="2">
-            <a:schemeClr val="accent1"/>
-          </a:effectRef>
-          <a:fontRef idx="minor">
-            <a:schemeClr val="lt1"/>
-          </a:fontRef>
-        </p:style>
-        <p:txBody>
-          <a:bodyPr rtlCol="0" anchor="ctr"/>
-          <a:lstStyle/>
-          <a:p>
-            <a:pPr algn="ctr"/>
-          </a:p>
-        </p:txBody>
-      </p:sp>
-      <p:sp>
-        <p:nvSpPr>
-          <p:cNvPr id="3" name="TextBox 2"/>
-          <p:cNvSpPr txBox="1"/>
-          <p:nvPr/>
-        </p:nvSpPr>
-        <p:spPr>
-          <a:xfrm>
-            <a:off x="822960" y="1417320"/>
-            <a:ext cx="2743200" cy="1097280"/>
-          </a:xfrm>
-          <a:prstGeom prst="rect">
-            <a:avLst/>
-          </a:prstGeom>
-          <a:noFill/>
-        </p:spPr>
-        <p:txBody>
-          <a:bodyPr wrap="square" anchor="t">
-            <a:spAutoFit/>
-          </a:bodyPr>
-          <a:lstStyle/>
-          <a:p>
-            <a:pPr algn="l">
-              <a:lnSpc>
-                <a:spcPct val="100000"/>
-              </a:lnSpc>
-            </a:pPr>
-            <a:r>
-              <a:rPr sz="6400" b="1">
-                <a:solidFill>
-                  <a:srgbClr val="00FF41"/>
-                </a:solidFill>
-                <a:latin typeface="Courier New"/>
-              </a:rPr>
-              <a:t>05</a:t>
-            </a:r>
-          </a:p>
-        </p:txBody>
-      </p:sp>
-      <p:sp>
-        <p:nvSpPr>
-          <p:cNvPr id="4" name="TextBox 3"/>
-          <p:cNvSpPr txBox="1"/>
-          <p:nvPr/>
-        </p:nvSpPr>
-        <p:spPr>
-          <a:xfrm>
-            <a:off x="841248" y="2487168"/>
-            <a:ext cx="10424160" cy="457200"/>
-          </a:xfrm>
-          <a:prstGeom prst="rect">
-            <a:avLst/>
-          </a:prstGeom>
-          <a:noFill/>
-        </p:spPr>
-        <p:txBody>
-          <a:bodyPr wrap="square" anchor="t">
-            <a:spAutoFit/>
-          </a:bodyPr>
-          <a:lstStyle/>
-          <a:p>
-            <a:pPr algn="l">
-              <a:lnSpc>
-                <a:spcPct val="100000"/>
-              </a:lnSpc>
-            </a:pPr>
-            <a:r>
-              <a:rPr sz="1500" b="1">
-                <a:solidFill>
-                  <a:srgbClr val="00FF41"/>
-                </a:solidFill>
-                <a:latin typeface="Courier New"/>
-              </a:rPr>
-              <a:t>SO WHAT</a:t>
-            </a:r>
-          </a:p>
-        </p:txBody>
-      </p:sp>
-      <p:sp>
-        <p:nvSpPr>
-          <p:cNvPr id="5" name="TextBox 4"/>
-          <p:cNvSpPr txBox="1"/>
-          <p:nvPr/>
-        </p:nvSpPr>
-        <p:spPr>
-          <a:xfrm>
-            <a:off x="804672" y="2971800"/>
-            <a:ext cx="10607040" cy="1097280"/>
-          </a:xfrm>
-          <a:prstGeom prst="rect">
-            <a:avLst/>
-          </a:prstGeom>
-          <a:noFill/>
-        </p:spPr>
-        <p:txBody>
-          <a:bodyPr wrap="square" anchor="t">
-            <a:spAutoFit/>
-          </a:bodyPr>
-          <a:lstStyle/>
-          <a:p>
-            <a:pPr algn="l">
-              <a:lnSpc>
-                <a:spcPct val="103000"/>
-              </a:lnSpc>
-            </a:pPr>
-            <a:r>
-              <a:rPr sz="3800" b="1">
-                <a:solidFill>
-                  <a:srgbClr val="F5F7FA"/>
-                </a:solidFill>
-                <a:latin typeface="Arial"/>
-              </a:rPr>
-              <a:t>Our next design brief</a:t>
-            </a:r>
-          </a:p>
-        </p:txBody>
-      </p:sp>
-      <p:sp>
-        <p:nvSpPr>
-          <p:cNvPr id="6" name="TextBox 5"/>
-          <p:cNvSpPr txBox="1"/>
-          <p:nvPr/>
-        </p:nvSpPr>
-        <p:spPr>
-          <a:xfrm>
-            <a:off x="841248" y="4224528"/>
-            <a:ext cx="10424160" cy="1737360"/>
-          </a:xfrm>
-          <a:prstGeom prst="rect">
-            <a:avLst/>
-          </a:prstGeom>
-          <a:noFill/>
-        </p:spPr>
-        <p:txBody>
-          <a:bodyPr wrap="square" anchor="t">
-            <a:spAutoFit/>
-          </a:bodyPr>
-          <a:lstStyle/>
-          <a:p>
-            <a:pPr algn="l">
-              <a:lnSpc>
-                <a:spcPct val="128000"/>
-              </a:lnSpc>
-            </a:pPr>
-            <a:r>
-              <a:rPr sz="1700" b="1">
-                <a:solidFill>
-                  <a:srgbClr val="00FF41"/>
-                </a:solidFill>
-                <a:latin typeface="Arial"/>
-              </a:rPr>
-              <a:t>→  </a:t>
-            </a:r>
-            <a:r>
-              <a:rPr sz="1700" b="0">
-                <a:solidFill>
-                  <a:srgbClr val="8A94A6"/>
-                </a:solidFill>
-                <a:latin typeface="Arial"/>
-              </a:rPr>
-              <a:t>Verification opens the next design - it doesn't just grade this one.</a:t>
-            </a:r>
-          </a:p>
-          <a:p>
-            <a:pPr algn="l">
-              <a:lnSpc>
-                <a:spcPct val="128000"/>
-              </a:lnSpc>
-            </a:pPr>
-            <a:r>
-              <a:rPr sz="1700" b="1">
-                <a:solidFill>
-                  <a:srgbClr val="00FF41"/>
-                </a:solidFill>
-                <a:latin typeface="Arial"/>
-              </a:rPr>
-              <a:t>→  </a:t>
-            </a:r>
-            <a:r>
-              <a:rPr sz="1700" b="0">
-                <a:solidFill>
-                  <a:srgbClr val="8A94A6"/>
-                </a:solidFill>
-                <a:latin typeface="Arial"/>
-              </a:rPr>
-              <a:t>What OTHER design could actually achieve this value?</a:t>
-            </a:r>
-          </a:p>
-          <a:p>
-            <a:pPr algn="l">
-              <a:lnSpc>
-                <a:spcPct val="128000"/>
-              </a:lnSpc>
-            </a:pPr>
-            <a:r>
-              <a:rPr sz="1700" b="1">
-                <a:solidFill>
-                  <a:srgbClr val="00FF41"/>
-                </a:solidFill>
-                <a:latin typeface="Arial"/>
-              </a:rPr>
-              <a:t>→  </a:t>
-            </a:r>
-            <a:r>
-              <a:rPr sz="1700" b="0">
-                <a:solidFill>
-                  <a:srgbClr val="8A94A6"/>
-                </a:solidFill>
-                <a:latin typeface="Arial"/>
-              </a:rPr>
-              <a:t>What should the next cycle discover? (You carry this into Wednesday.)</a:t>
-            </a:r>
-          </a:p>
-        </p:txBody>
-      </p:sp>
-      <p:sp>
-        <p:nvSpPr>
-          <p:cNvPr id="7" name="TextBox 6"/>
-          <p:cNvSpPr txBox="1"/>
-          <p:nvPr/>
-        </p:nvSpPr>
-        <p:spPr>
-          <a:xfrm>
-            <a:off x="640080" y="6355080"/>
-            <a:ext cx="10972800" cy="365760"/>
-          </a:xfrm>
-          <a:prstGeom prst="rect">
-            <a:avLst/>
-          </a:prstGeom>
-          <a:noFill/>
-        </p:spPr>
-        <p:txBody>
-          <a:bodyPr wrap="square" anchor="t">
-            <a:spAutoFit/>
-          </a:bodyPr>
-          <a:lstStyle/>
-          <a:p>
-            <a:pPr algn="l">
-              <a:lnSpc>
-                <a:spcPct val="100000"/>
-              </a:lnSpc>
-            </a:pPr>
-            <a:r>
-              <a:rPr sz="1000" b="0">
-                <a:solidFill>
-                  <a:srgbClr val="5A6474"/>
-                </a:solidFill>
-                <a:latin typeface="Courier New"/>
-              </a:rPr>
-              <a:t>Value Verification · TECHIE 1121 · Cornell Tech · Tue Jul 28</a:t>
-            </a:r>
-          </a:p>
-        </p:txBody>
-      </p:sp>
-    </p:spTree>
-  </p:cSld>
-  <p:clrMapOvr>
-    <a:masterClrMapping/>
-  </p:clrMapOvr>
-</p:sld>
-</file>
-
-<file path=ppt/slides/slide12.xml><?xml version="1.0" encoding="utf-8"?>
-<p:sld xmlns:a="http://schemas.openxmlformats.org/drawingml/2006/main" xmlns:p="http://schemas.openxmlformats.org/presentationml/2006/main" xmlns:r="http://schemas.openxmlformats.org/officeDocument/2006/relationships">
-  <p:cSld>
-    <p:bg>
-      <p:bgPr>
-        <a:solidFill>
-          <a:srgbClr val="0B0E14"/>
-        </a:solidFill>
-        <a:effectLst/>
-      </p:bgPr>
-    </p:bg>
-    <p:spTree>
-      <p:nvGrpSpPr>
-        <p:cNvPr id="1" name=""/>
-        <p:cNvGrpSpPr/>
-        <p:nvPr/>
-      </p:nvGrpSpPr>
-      <p:grpSpPr/>
-      <p:sp>
-        <p:nvSpPr>
           <p:cNvPr id="2" name="TextBox 1"/>
           <p:cNvSpPr txBox="1"/>
           <p:nvPr/>
@@ -5632,7 +5237,7 @@
                 </a:solidFill>
                 <a:latin typeface="Arial"/>
               </a:rPr>
-              <a:t>Five section headers follow — they are the spine of your talk.</a:t>
+              <a:t>Four section headers follow — they are the spine of your talk.</a:t>
             </a:r>
           </a:p>
           <a:p>
@@ -5657,7 +5262,7 @@
                 </a:solidFill>
                 <a:latin typeface="Arial"/>
               </a:rPr>
-              <a:t>Sections 01, 02, 04, 05 are the TEAM's. Section 03 has one named slide per person — that one is graded individually.</a:t>
+              <a:t>Sections 01, 02, 04 are the TEAM's. Section 03 has one named slide per person — your individual contribution.</a:t>
             </a:r>
           </a:p>
           <a:p>
@@ -5707,7 +5312,7 @@
                 </a:solidFill>
                 <a:latin typeface="Arial"/>
               </a:rPr>
-              <a:t>Evidence beats assertion: screenshots, numbers, quotes from what you actually observed.</a:t>
+              <a:t>No time to run full tests today - so RESEARCH the method, and what interventions have actually moved this value.</a:t>
             </a:r>
           </a:p>
           <a:p>
@@ -6008,7 +5613,7 @@
                 </a:solidFill>
                 <a:latin typeface="Arial"/>
               </a:rPr>
-              <a:t>What we claimed — and how we operationalize it</a:t>
+              <a:t>Discovery - operationalize the value</a:t>
             </a:r>
           </a:p>
         </p:txBody>
@@ -6056,7 +5661,7 @@
                 </a:solidFill>
                 <a:latin typeface="Arial"/>
               </a:rPr>
-              <a:t>Our app, in one line — and the value it claims.</a:t>
+              <a:t>[ our app, in one line ]  -  and the value it claims.</a:t>
             </a:r>
           </a:p>
           <a:p>
@@ -6081,7 +5686,7 @@
                 </a:solidFill>
                 <a:latin typeface="Arial"/>
               </a:rPr>
-              <a:t>How do we operationalize / define the value? (e.g. privacy as control vs. security vs. contextual integrity)</a:t>
+              <a:t>How do we operationalize / define the value?  (privacy as control vs. security vs. contextual integrity)</a:t>
             </a:r>
           </a:p>
           <a:p>
@@ -6106,7 +5711,7 @@
                 </a:solidFill>
                 <a:latin typeface="Arial"/>
               </a:rPr>
-              <a:t>If it's present, users will DO ___ / UNDERSTAND ___ / FEEL ___.</a:t>
+              <a:t>If it is present, users will DO [ ___ ] / UNDERSTAND [ ___ ] / FEEL [ ___ ].</a:t>
             </a:r>
           </a:p>
         </p:txBody>
@@ -6293,7 +5898,7 @@
                 </a:solidFill>
                 <a:latin typeface="Courier New"/>
               </a:rPr>
-              <a:t>PART 1 — WAYS TO VERIFY</a:t>
+              <a:t>HOW WOULD WE VERIFY IT?</a:t>
             </a:r>
           </a:p>
         </p:txBody>
@@ -6332,7 +5937,7 @@
                 </a:solidFill>
                 <a:latin typeface="Arial"/>
               </a:rPr>
-              <a:t>How can this value be verified at all?</a:t>
+              <a:t>Pick a method per lens - we won't run them all today</a:t>
             </a:r>
           </a:p>
         </p:txBody>
@@ -6380,7 +5985,7 @@
                 </a:solidFill>
                 <a:latin typeface="Arial"/>
               </a:rPr>
-              <a:t>How have others measured this value? (Google Scholar + its AI search)</a:t>
+              <a:t>BEHAVIOR - do users ACT differently?  -&gt;  hard to test in class, so we RESEARCH it: [ method + what studies show ].</a:t>
             </a:r>
           </a:p>
           <a:p>
@@ -6405,7 +6010,7 @@
                 </a:solidFill>
                 <a:latin typeface="Arial"/>
               </a:rPr>
-              <a:t>Which method did we choose — and why does our reading demand it?</a:t>
+              <a:t>UNDERSTANDING - do they GRASP the value?  -&gt;  a quick check with fellow students is possible: [ method ].</a:t>
             </a:r>
           </a:p>
           <a:p>
@@ -6430,7 +6035,7 @@
                 </a:solidFill>
                 <a:latin typeface="Arial"/>
               </a:rPr>
-              <a:t>The instrument we borrowed: UEQ · an HRI/SDT scale · the slop detector · a task design.</a:t>
+              <a:t>AFFECT - do they FEEL differently?  -&gt;  a quick check with fellow students is possible: [ method ].</a:t>
             </a:r>
           </a:p>
         </p:txBody>
@@ -6617,7 +6222,7 @@
                 </a:solidFill>
                 <a:latin typeface="Courier New"/>
               </a:rPr>
-              <a:t>PART 2 — WHAT WE FOUND</a:t>
+              <a:t>DESIGN INTERVENTIONS THAT MOVED THIS VALUE</a:t>
             </a:r>
           </a:p>
         </p:txBody>
@@ -6656,7 +6261,7 @@
                 </a:solidFill>
                 <a:latin typeface="Arial"/>
               </a:rPr>
-              <a:t>Insights from our own verification</a:t>
+              <a:t>Research - what has actually worked? (each member owns a slide)</a:t>
             </a:r>
           </a:p>
         </p:txBody>
@@ -6704,7 +6309,7 @@
                 </a:solidFill>
                 <a:latin typeface="Arial"/>
               </a:rPr>
-              <a:t>Each team member presents their OWN slide — the named slides that follow.</a:t>
+              <a:t>Each member presents their OWN researched intervention - the named slides that follow.</a:t>
             </a:r>
           </a:p>
           <a:p>
@@ -6729,7 +6334,7 @@
                 </a:solidFill>
                 <a:latin typeface="Arial"/>
               </a:rPr>
-              <a:t>What WORKS and what does NOT — with evidence. An evidenced 'it doesn't' beats a hopeful 'it does'.</a:t>
+              <a:t>A real design intervention tried for this value, and its result: worked / mixed / failed.</a:t>
             </a:r>
           </a:p>
           <a:p>
@@ -6754,7 +6359,7 @@
                 </a:solidFill>
                 <a:latin typeface="Arial"/>
               </a:rPr>
-              <a:t>Across the lenses: behavior · understanding · affect — and which lenses did NOT fit this value.</a:t>
+              <a:t>Real sources only - never invent a citation.</a:t>
             </a:r>
           </a:p>
         </p:txBody>
@@ -6858,7 +6463,7 @@
                 </a:solidFill>
                 <a:latin typeface="Courier New"/>
               </a:rPr>
-              <a:t>03.1  ·  YOUR SECTION (graded individually)</a:t>
+              <a:t>03.1  ·  YOUR SLIDE (your individual contribution)</a:t>
             </a:r>
           </a:p>
         </p:txBody>
@@ -6989,7 +6594,7 @@
                 </a:solidFill>
                 <a:latin typeface="Arial"/>
               </a:rPr>
-              <a:t>The lens + method I ran, and why our reading demanded it</a:t>
+              <a:t>A design intervention someone tried to move THIS value - [ what they did ]</a:t>
             </a:r>
           </a:p>
           <a:p>
@@ -7014,7 +6619,7 @@
                 </a:solidFill>
                 <a:latin typeface="Arial"/>
               </a:rPr>
-              <a:t>My evidence - what I actually observed or measured</a:t>
+              <a:t>The result - [ worked / mixed / failed ] - and the real source [ author, year ]</a:t>
             </a:r>
           </a:p>
           <a:p>
@@ -7039,7 +6644,7 @@
                 </a:solidFill>
                 <a:latin typeface="Arial"/>
               </a:rPr>
-              <a:t>What this says WORKS - and what does NOT</a:t>
+              <a:t>How you'd test it - [ method ]  (behavior = research it; understanding/affect = quick student check)</a:t>
             </a:r>
           </a:p>
           <a:p>
@@ -7064,7 +6669,7 @@
                 </a:solidFill>
                 <a:latin typeface="Arial"/>
               </a:rPr>
-              <a:t>The paper I found (real citation) and what it changes</a:t>
+              <a:t>Does it support or challenge our design direction? - [ ___ ]</a:t>
             </a:r>
           </a:p>
         </p:txBody>
@@ -7262,7 +6867,7 @@
                 </a:solidFill>
                 <a:latin typeface="Courier New"/>
               </a:rPr>
-              <a:t>03.2  ·  YOUR SECTION (graded individually)</a:t>
+              <a:t>03.2  ·  YOUR SLIDE (your individual contribution)</a:t>
             </a:r>
           </a:p>
         </p:txBody>
@@ -7393,7 +6998,7 @@
                 </a:solidFill>
                 <a:latin typeface="Arial"/>
               </a:rPr>
-              <a:t>The lens + method I ran, and why our reading demanded it</a:t>
+              <a:t>A design intervention someone tried to move THIS value - [ what they did ]</a:t>
             </a:r>
           </a:p>
           <a:p>
@@ -7418,7 +7023,7 @@
                 </a:solidFill>
                 <a:latin typeface="Arial"/>
               </a:rPr>
-              <a:t>My evidence - what I actually observed or measured</a:t>
+              <a:t>The result - [ worked / mixed / failed ] - and the real source [ author, year ]</a:t>
             </a:r>
           </a:p>
           <a:p>
@@ -7443,7 +7048,7 @@
                 </a:solidFill>
                 <a:latin typeface="Arial"/>
               </a:rPr>
-              <a:t>What this says WORKS - and what does NOT</a:t>
+              <a:t>How you'd test it - [ method ]  (behavior = research it; understanding/affect = quick student check)</a:t>
             </a:r>
           </a:p>
           <a:p>
@@ -7468,7 +7073,7 @@
                 </a:solidFill>
                 <a:latin typeface="Arial"/>
               </a:rPr>
-              <a:t>The paper I found (real citation) and what it changes</a:t>
+              <a:t>Does it support or challenge our design direction? - [ ___ ]</a:t>
             </a:r>
           </a:p>
         </p:txBody>
@@ -7666,7 +7271,7 @@
                 </a:solidFill>
                 <a:latin typeface="Courier New"/>
               </a:rPr>
-              <a:t>03.3  ·  YOUR SECTION (graded individually)</a:t>
+              <a:t>03.3  ·  YOUR SLIDE (your individual contribution)</a:t>
             </a:r>
           </a:p>
         </p:txBody>
@@ -7797,7 +7402,7 @@
                 </a:solidFill>
                 <a:latin typeface="Arial"/>
               </a:rPr>
-              <a:t>The lens + method I ran, and why our reading demanded it</a:t>
+              <a:t>A design intervention someone tried to move THIS value - [ what they did ]</a:t>
             </a:r>
           </a:p>
           <a:p>
@@ -7822,7 +7427,7 @@
                 </a:solidFill>
                 <a:latin typeface="Arial"/>
               </a:rPr>
-              <a:t>My evidence - what I actually observed or measured</a:t>
+              <a:t>The result - [ worked / mixed / failed ] - and the real source [ author, year ]</a:t>
             </a:r>
           </a:p>
           <a:p>
@@ -7847,7 +7452,7 @@
                 </a:solidFill>
                 <a:latin typeface="Arial"/>
               </a:rPr>
-              <a:t>What this says WORKS - and what does NOT</a:t>
+              <a:t>How you'd test it - [ method ]  (behavior = research it; understanding/affect = quick student check)</a:t>
             </a:r>
           </a:p>
           <a:p>
@@ -7872,7 +7477,7 @@
                 </a:solidFill>
                 <a:latin typeface="Arial"/>
               </a:rPr>
-              <a:t>The paper I found (real citation) and what it changes</a:t>
+              <a:t>Does it support or challenge our design direction? - [ ___ ]</a:t>
             </a:r>
           </a:p>
         </p:txBody>
@@ -8070,7 +7675,7 @@
                 </a:solidFill>
                 <a:latin typeface="Courier New"/>
               </a:rPr>
-              <a:t>03.4  ·  YOUR SECTION (graded individually)</a:t>
+              <a:t>03.4  ·  YOUR SLIDE (your individual contribution)</a:t>
             </a:r>
           </a:p>
         </p:txBody>
@@ -8201,7 +7806,7 @@
                 </a:solidFill>
                 <a:latin typeface="Arial"/>
               </a:rPr>
-              <a:t>The lens + method I ran, and why our reading demanded it</a:t>
+              <a:t>A design intervention someone tried to move THIS value - [ what they did ]</a:t>
             </a:r>
           </a:p>
           <a:p>
@@ -8226,7 +7831,7 @@
                 </a:solidFill>
                 <a:latin typeface="Arial"/>
               </a:rPr>
-              <a:t>My evidence - what I actually observed or measured</a:t>
+              <a:t>The result - [ worked / mixed / failed ] - and the real source [ author, year ]</a:t>
             </a:r>
           </a:p>
           <a:p>
@@ -8251,7 +7856,7 @@
                 </a:solidFill>
                 <a:latin typeface="Arial"/>
               </a:rPr>
-              <a:t>What this says WORKS - and what does NOT</a:t>
+              <a:t>How you'd test it - [ method ]  (behavior = research it; understanding/affect = quick student check)</a:t>
             </a:r>
           </a:p>
           <a:p>
@@ -8276,7 +7881,7 @@
                 </a:solidFill>
                 <a:latin typeface="Arial"/>
               </a:rPr>
-              <a:t>The paper I found (real citation) and what it changes</a:t>
+              <a:t>Does it support or challenge our design direction? - [ ___ ]</a:t>
             </a:r>
           </a:p>
         </p:txBody>

--- a/slides/team-decks/Week3-Tue-guantanamo-bay-wendys.pptx
+++ b/slides/team-decks/Week3-Tue-guantanamo-bay-wendys.pptx
@@ -4199,11 +4199,11 @@
             <a:r>
               <a:rPr sz="4600" b="1">
                 <a:solidFill>
-                  <a:srgbClr val="8A94A6"/>
-                </a:solidFill>
-                <a:latin typeface="Arial"/>
-              </a:rPr>
-              <a:t>[ name your team after your value ]</a:t>
+                  <a:srgbClr val="F5F7FA"/>
+                </a:solidFill>
+                <a:latin typeface="Arial"/>
+              </a:rPr>
+              <a:t>The Sustainability &amp; Transparency Team</a:t>
             </a:r>
           </a:p>
         </p:txBody>
@@ -4290,7 +4290,7 @@
                 </a:solidFill>
                 <a:latin typeface="Arial"/>
               </a:rPr>
-              <a:t>Fixr Findr</a:t>
+              <a:t>Fixr Findr - fix-or-replace: repair cost + CO2 saved</a:t>
             </a:r>
           </a:p>
         </p:txBody>

--- a/slides/team-decks/Week3-Tue-guantanamo-bay-wendys.pptx
+++ b/slides/team-decks/Week3-Tue-guantanamo-bay-wendys.pptx
@@ -16,6 +16,7 @@
     <p:sldId id="264" r:id="rId16"/>
     <p:sldId id="265" r:id="rId17"/>
     <p:sldId id="266" r:id="rId18"/>
+    <p:sldId id="267" r:id="rId19"/>
   </p:sldIdLst>
   <p:sldSz cx="12191695" cy="6858000" type="screen4x3"/>
   <p:notesSz cx="6858000" cy="9144000"/>
@@ -537,6 +538,76 @@
 </p:notes>
 </file>
 
+<file path=ppt/notesSlides/notesSlide10.xml><?xml version="1.0" encoding="utf-8"?>
+<p:notes xmlns:a="http://schemas.openxmlformats.org/drawingml/2006/main" xmlns:p="http://schemas.openxmlformats.org/presentationml/2006/main" xmlns:r="http://schemas.openxmlformats.org/officeDocument/2006/relationships">
+  <p:cSld>
+    <p:spTree>
+      <p:nvGrpSpPr>
+        <p:cNvPr id="1" name=""/>
+        <p:cNvGrpSpPr/>
+        <p:nvPr/>
+      </p:nvGrpSpPr>
+      <p:grpSpPr>
+        <a:xfrm>
+          <a:off x="0" y="0"/>
+          <a:ext cx="0" cy="0"/>
+          <a:chOff x="0" y="0"/>
+          <a:chExt cx="0" cy="0"/>
+        </a:xfrm>
+      </p:grpSpPr>
+      <p:sp>
+        <p:nvSpPr>
+          <p:cNvPr id="2" name="Slide Image Placeholder 1"/>
+          <p:cNvSpPr>
+            <a:spLocks noGrp="1"/>
+          </p:cNvSpPr>
+          <p:nvPr>
+            <p:ph type="sldImg" idx="2"/>
+          </p:nvPr>
+        </p:nvSpPr>
+        <p:spPr/>
+      </p:sp>
+      <p:sp>
+        <p:nvSpPr>
+          <p:cNvPr id="3" name="Notes Placeholder 2"/>
+          <p:cNvSpPr>
+            <a:spLocks noGrp="1"/>
+          </p:cNvSpPr>
+          <p:nvPr>
+            <p:ph type="body" idx="3" sz="quarter"/>
+          </p:nvPr>
+        </p:nvSpPr>
+        <p:spPr/>
+        <p:txBody>
+          <a:bodyPr/>
+          <a:lstStyle/>
+          <a:p>
+            <a:r>
+              <a:t>Section header — the team's own slides go after this one.</a:t>
+            </a:r>
+          </a:p>
+        </p:txBody>
+      </p:sp>
+      <p:sp>
+        <p:nvSpPr>
+          <p:cNvPr id="4" name="Slide Number Placeholder 3"/>
+          <p:cNvSpPr>
+            <a:spLocks noGrp="1"/>
+          </p:cNvSpPr>
+          <p:nvPr>
+            <p:ph type="sldNum" idx="5" sz="quarter"/>
+          </p:nvPr>
+        </p:nvSpPr>
+        <p:spPr/>
+      </p:sp>
+    </p:spTree>
+  </p:cSld>
+  <p:clrMapOvr>
+    <a:masterClrMapping/>
+  </p:clrMapOvr>
+</p:notes>
+</file>
+
 <file path=ppt/notesSlides/notesSlide2.xml><?xml version="1.0" encoding="utf-8"?>
 <p:notes xmlns:a="http://schemas.openxmlformats.org/drawingml/2006/main" xmlns:p="http://schemas.openxmlformats.org/presentationml/2006/main" xmlns:r="http://schemas.openxmlformats.org/officeDocument/2006/relationships">
   <p:cSld>
@@ -792,7 +863,7 @@
           <a:lstStyle/>
           <a:p>
             <a:r>
-              <a:t>Evan Birnbaum's individual contribution: the design intervention they researched. Reflection lives in their own FigJam lane.</a:t>
+              <a:t>Section header — the team's own slides go after this one.</a:t>
             </a:r>
           </a:p>
         </p:txBody>
@@ -862,7 +933,7 @@
           <a:lstStyle/>
           <a:p>
             <a:r>
-              <a:t>Derin Sezgin's individual contribution: the design intervention they researched. Reflection lives in their own FigJam lane.</a:t>
+              <a:t>Evan Birnbaum's individual contribution: the real paper they found (AI academic search) and READ - not just an AI summary. Reflection lives in their own FigJam lane (block 06).</a:t>
             </a:r>
           </a:p>
         </p:txBody>
@@ -932,7 +1003,7 @@
           <a:lstStyle/>
           <a:p>
             <a:r>
-              <a:t>Magnes Dugan's individual contribution: the design intervention they researched. Reflection lives in their own FigJam lane.</a:t>
+              <a:t>Derin Sezgin's individual contribution: the real paper they found (AI academic search) and READ - not just an AI summary. Reflection lives in their own FigJam lane (block 06).</a:t>
             </a:r>
           </a:p>
         </p:txBody>
@@ -1002,7 +1073,7 @@
           <a:lstStyle/>
           <a:p>
             <a:r>
-              <a:t>[ +1 - add your name ]'s individual contribution: the design intervention they researched. Reflection lives in their own FigJam lane.</a:t>
+              <a:t>Magnes Dugan's individual contribution: the real paper they found (AI academic search) and READ - not just an AI summary. Reflection lives in their own FigJam lane (block 06).</a:t>
             </a:r>
           </a:p>
         </p:txBody>
@@ -1072,7 +1143,7 @@
           <a:lstStyle/>
           <a:p>
             <a:r>
-              <a:t>Section header — the team's own slides go after this one.</a:t>
+              <a:t>[ +1 - add your name ]'s individual contribution: the real paper they found (AI academic search) and READ - not just an AI summary. Reflection lives in their own FigJam lane (block 06).</a:t>
             </a:r>
           </a:p>
         </p:txBody>
@@ -4401,14 +4472,53 @@
       <p:grpSpPr/>
       <p:sp>
         <p:nvSpPr>
-          <p:cNvPr id="2" name="Rectangle 1"/>
+          <p:cNvPr id="2" name="TextBox 1"/>
+          <p:cNvSpPr txBox="1"/>
+          <p:nvPr/>
+        </p:nvSpPr>
+        <p:spPr>
+          <a:xfrm>
+            <a:off x="640080" y="502920"/>
+            <a:ext cx="10058400" cy="365760"/>
+          </a:xfrm>
+          <a:prstGeom prst="rect">
+            <a:avLst/>
+          </a:prstGeom>
+          <a:noFill/>
+        </p:spPr>
+        <p:txBody>
+          <a:bodyPr wrap="square" anchor="t">
+            <a:spAutoFit/>
+          </a:bodyPr>
+          <a:lstStyle/>
+          <a:p>
+            <a:pPr algn="l">
+              <a:lnSpc>
+                <a:spcPct val="100000"/>
+              </a:lnSpc>
+            </a:pPr>
+            <a:r>
+              <a:rPr sz="1300" b="1">
+                <a:solidFill>
+                  <a:srgbClr val="00FF41"/>
+                </a:solidFill>
+                <a:latin typeface="Courier New"/>
+              </a:rPr>
+              <a:t>04.4  ·  YOUR PAPER (your individual contribution)</a:t>
+            </a:r>
+          </a:p>
+        </p:txBody>
+      </p:sp>
+      <p:sp>
+        <p:nvSpPr>
+          <p:cNvPr id="3" name="Rectangle 2"/>
           <p:cNvSpPr/>
           <p:nvPr/>
         </p:nvSpPr>
         <p:spPr>
           <a:xfrm>
-            <a:off x="0" y="0"/>
-            <a:ext cx="256032" cy="6858000"/>
+            <a:off x="640080" y="932688"/>
+            <a:ext cx="822960" cy="73152"/>
           </a:xfrm>
           <a:prstGeom prst="rect">
             <a:avLst/>
@@ -4445,14 +4555,14 @@
       </p:sp>
       <p:sp>
         <p:nvSpPr>
-          <p:cNvPr id="3" name="TextBox 2"/>
+          <p:cNvPr id="4" name="TextBox 3"/>
           <p:cNvSpPr txBox="1"/>
           <p:nvPr/>
         </p:nvSpPr>
         <p:spPr>
           <a:xfrm>
-            <a:off x="822960" y="1417320"/>
-            <a:ext cx="2743200" cy="1097280"/>
+            <a:off x="640080" y="1170432"/>
+            <a:ext cx="10972800" cy="914400"/>
           </a:xfrm>
           <a:prstGeom prst="rect">
             <a:avLst/>
@@ -4471,27 +4581,27 @@
               </a:lnSpc>
             </a:pPr>
             <a:r>
-              <a:rPr sz="6400" b="1">
-                <a:solidFill>
-                  <a:srgbClr val="00FF41"/>
-                </a:solidFill>
-                <a:latin typeface="Courier New"/>
-              </a:rPr>
-              <a:t>04</a:t>
-            </a:r>
-          </a:p>
-        </p:txBody>
-      </p:sp>
-      <p:sp>
-        <p:nvSpPr>
-          <p:cNvPr id="4" name="TextBox 3"/>
+              <a:rPr sz="3600" b="1">
+                <a:solidFill>
+                  <a:srgbClr val="F5F7FA"/>
+                </a:solidFill>
+                <a:latin typeface="Arial"/>
+              </a:rPr>
+              <a:t>[ +1 - add your name ]</a:t>
+            </a:r>
+          </a:p>
+        </p:txBody>
+      </p:sp>
+      <p:sp>
+        <p:nvSpPr>
+          <p:cNvPr id="5" name="TextBox 4"/>
           <p:cNvSpPr txBox="1"/>
           <p:nvPr/>
         </p:nvSpPr>
         <p:spPr>
           <a:xfrm>
-            <a:off x="841248" y="2487168"/>
-            <a:ext cx="10424160" cy="457200"/>
+            <a:off x="658368" y="2286000"/>
+            <a:ext cx="10881360" cy="2834640"/>
           </a:xfrm>
           <a:prstGeom prst="rect">
             <a:avLst/>
@@ -4506,31 +4616,161 @@
           <a:p>
             <a:pPr algn="l">
               <a:lnSpc>
-                <a:spcPct val="100000"/>
-              </a:lnSpc>
-            </a:pPr>
-            <a:r>
-              <a:rPr sz="1500" b="1">
+                <a:spcPct val="134000"/>
+              </a:lnSpc>
+            </a:pPr>
+            <a:r>
+              <a:rPr sz="1900" b="1">
                 <a:solidFill>
                   <a:srgbClr val="00FF41"/>
                 </a:solidFill>
-                <a:latin typeface="Courier New"/>
-              </a:rPr>
-              <a:t>OUR DESIGN DIRECTIONS</a:t>
-            </a:r>
-          </a:p>
-        </p:txBody>
-      </p:sp>
-      <p:sp>
-        <p:nvSpPr>
-          <p:cNvPr id="5" name="TextBox 4"/>
+                <a:latin typeface="Arial"/>
+              </a:rPr>
+              <a:t>→  </a:t>
+            </a:r>
+            <a:r>
+              <a:rPr sz="1900" b="0">
+                <a:solidFill>
+                  <a:srgbClr val="F5F7FA"/>
+                </a:solidFill>
+                <a:latin typeface="Arial"/>
+              </a:rPr>
+              <a:t>The paper you found + READ - [ author, year, title ]  (AI search to FIND it; then read the actual paper)</a:t>
+            </a:r>
+          </a:p>
+          <a:p>
+            <a:pPr algn="l">
+              <a:lnSpc>
+                <a:spcPct val="134000"/>
+              </a:lnSpc>
+            </a:pPr>
+            <a:r>
+              <a:rPr sz="1900" b="1">
+                <a:solidFill>
+                  <a:srgbClr val="00FF41"/>
+                </a:solidFill>
+                <a:latin typeface="Arial"/>
+              </a:rPr>
+              <a:t>→  </a:t>
+            </a:r>
+            <a:r>
+              <a:rPr sz="1900" b="0">
+                <a:solidFill>
+                  <a:srgbClr val="F5F7FA"/>
+                </a:solidFill>
+                <a:latin typeface="Arial"/>
+              </a:rPr>
+              <a:t>The design intervention they tried to move THIS value - [ what they did ]</a:t>
+            </a:r>
+          </a:p>
+          <a:p>
+            <a:pPr algn="l">
+              <a:lnSpc>
+                <a:spcPct val="134000"/>
+              </a:lnSpc>
+            </a:pPr>
+            <a:r>
+              <a:rPr sz="1900" b="1">
+                <a:solidFill>
+                  <a:srgbClr val="00FF41"/>
+                </a:solidFill>
+                <a:latin typeface="Arial"/>
+              </a:rPr>
+              <a:t>→  </a:t>
+            </a:r>
+            <a:r>
+              <a:rPr sz="1900" b="0">
+                <a:solidFill>
+                  <a:srgbClr val="F5F7FA"/>
+                </a:solidFill>
+                <a:latin typeface="Arial"/>
+              </a:rPr>
+              <a:t>What WORKED - [ ___ ]     |     What FAILED / to avoid - [ ___ ]</a:t>
+            </a:r>
+          </a:p>
+          <a:p>
+            <a:pPr algn="l">
+              <a:lnSpc>
+                <a:spcPct val="134000"/>
+              </a:lnSpc>
+            </a:pPr>
+            <a:r>
+              <a:rPr sz="1900" b="1">
+                <a:solidFill>
+                  <a:srgbClr val="00FF41"/>
+                </a:solidFill>
+                <a:latin typeface="Arial"/>
+              </a:rPr>
+              <a:t>→  </a:t>
+            </a:r>
+            <a:r>
+              <a:rPr sz="1900" b="0">
+                <a:solidFill>
+                  <a:srgbClr val="F5F7FA"/>
+                </a:solidFill>
+                <a:latin typeface="Arial"/>
+              </a:rPr>
+              <a:t>Does it support or challenge our design direction? - [ ___ ]</a:t>
+            </a:r>
+          </a:p>
+        </p:txBody>
+      </p:sp>
+      <p:sp>
+        <p:nvSpPr>
+          <p:cNvPr id="6" name="Rounded Rectangle 5"/>
+          <p:cNvSpPr/>
+          <p:nvPr/>
+        </p:nvSpPr>
+        <p:spPr>
+          <a:xfrm>
+            <a:off x="640080" y="5440680"/>
+            <a:ext cx="10881360" cy="658368"/>
+          </a:xfrm>
+          <a:prstGeom prst="roundRect">
+            <a:avLst/>
+          </a:prstGeom>
+          <a:solidFill>
+            <a:srgbClr val="151B26"/>
+          </a:solidFill>
+          <a:ln w="19050">
+            <a:solidFill>
+              <a:srgbClr val="00FF41"/>
+            </a:solidFill>
+          </a:ln>
+          <a:effectLst/>
+        </p:spPr>
+        <p:style>
+          <a:lnRef idx="1">
+            <a:schemeClr val="accent1"/>
+          </a:lnRef>
+          <a:fillRef idx="3">
+            <a:schemeClr val="accent1"/>
+          </a:fillRef>
+          <a:effectRef idx="2">
+            <a:schemeClr val="accent1"/>
+          </a:effectRef>
+          <a:fontRef idx="minor">
+            <a:schemeClr val="lt1"/>
+          </a:fontRef>
+        </p:style>
+        <p:txBody>
+          <a:bodyPr rtlCol="0" anchor="ctr"/>
+          <a:lstStyle/>
+          <a:p>
+            <a:pPr algn="ctr"/>
+          </a:p>
+        </p:txBody>
+      </p:sp>
+      <p:sp>
+        <p:nvSpPr>
+          <p:cNvPr id="7" name="TextBox 6"/>
           <p:cNvSpPr txBox="1"/>
           <p:nvPr/>
         </p:nvSpPr>
         <p:spPr>
           <a:xfrm>
-            <a:off x="804672" y="2971800"/>
-            <a:ext cx="10607040" cy="1097280"/>
+            <a:off x="914400" y="5440680"/>
+            <a:ext cx="10332720" cy="658368"/>
           </a:xfrm>
           <a:prstGeom prst="rect">
             <a:avLst/>
@@ -4538,129 +4778,40 @@
           <a:noFill/>
         </p:spPr>
         <p:txBody>
-          <a:bodyPr wrap="square" anchor="t">
+          <a:bodyPr wrap="square" anchor="ctr">
             <a:spAutoFit/>
           </a:bodyPr>
           <a:lstStyle/>
           <a:p>
             <a:pPr algn="l">
               <a:lnSpc>
-                <a:spcPct val="103000"/>
-              </a:lnSpc>
-            </a:pPr>
-            <a:r>
-              <a:rPr sz="3800" b="1">
+                <a:spcPct val="100000"/>
+              </a:lnSpc>
+            </a:pPr>
+            <a:r>
+              <a:rPr sz="1600" b="1">
+                <a:solidFill>
+                  <a:srgbClr val="00FF41"/>
+                </a:solidFill>
+                <a:latin typeface="Arial"/>
+              </a:rPr>
+              <a:t>▸  </a:t>
+            </a:r>
+            <a:r>
+              <a:rPr sz="1500" b="1">
                 <a:solidFill>
                   <a:srgbClr val="F5F7FA"/>
                 </a:solidFill>
                 <a:latin typeface="Arial"/>
               </a:rPr>
-              <a:t>Generative - where the evidence points (carry into Wednesday)</a:t>
-            </a:r>
-          </a:p>
-        </p:txBody>
-      </p:sp>
-      <p:sp>
-        <p:nvSpPr>
-          <p:cNvPr id="6" name="TextBox 5"/>
-          <p:cNvSpPr txBox="1"/>
-          <p:nvPr/>
-        </p:nvSpPr>
-        <p:spPr>
-          <a:xfrm>
-            <a:off x="841248" y="4224528"/>
-            <a:ext cx="10424160" cy="1737360"/>
-          </a:xfrm>
-          <a:prstGeom prst="rect">
-            <a:avLst/>
-          </a:prstGeom>
-          <a:noFill/>
-        </p:spPr>
-        <p:txBody>
-          <a:bodyPr wrap="square" anchor="t">
-            <a:spAutoFit/>
-          </a:bodyPr>
-          <a:lstStyle/>
-          <a:p>
-            <a:pPr algn="l">
-              <a:lnSpc>
-                <a:spcPct val="128000"/>
-              </a:lnSpc>
-            </a:pPr>
-            <a:r>
-              <a:rPr sz="1700" b="1">
-                <a:solidFill>
-                  <a:srgbClr val="00FF41"/>
-                </a:solidFill>
-                <a:latin typeface="Arial"/>
-              </a:rPr>
-              <a:t>→  </a:t>
-            </a:r>
-            <a:r>
-              <a:rPr sz="1700" b="0">
-                <a:solidFill>
-                  <a:srgbClr val="8A94A6"/>
-                </a:solidFill>
-                <a:latin typeface="Arial"/>
-              </a:rPr>
-              <a:t>2-3 design directions our research points to.</a:t>
-            </a:r>
-          </a:p>
-          <a:p>
-            <a:pPr algn="l">
-              <a:lnSpc>
-                <a:spcPct val="128000"/>
-              </a:lnSpc>
-            </a:pPr>
-            <a:r>
-              <a:rPr sz="1700" b="1">
-                <a:solidFill>
-                  <a:srgbClr val="00FF41"/>
-                </a:solidFill>
-                <a:latin typeface="Arial"/>
-              </a:rPr>
-              <a:t>→  </a:t>
-            </a:r>
-            <a:r>
-              <a:rPr sz="1700" b="0">
-                <a:solidFill>
-                  <a:srgbClr val="8A94A6"/>
-                </a:solidFill>
-                <a:latin typeface="Arial"/>
-              </a:rPr>
-              <a:t>Which one has the strongest evidence behind it?</a:t>
-            </a:r>
-          </a:p>
-          <a:p>
-            <a:pPr algn="l">
-              <a:lnSpc>
-                <a:spcPct val="128000"/>
-              </a:lnSpc>
-            </a:pPr>
-            <a:r>
-              <a:rPr sz="1700" b="1">
-                <a:solidFill>
-                  <a:srgbClr val="00FF41"/>
-                </a:solidFill>
-                <a:latin typeface="Arial"/>
-              </a:rPr>
-              <a:t>→  </a:t>
-            </a:r>
-            <a:r>
-              <a:rPr sz="1700" b="0">
-                <a:solidFill>
-                  <a:srgbClr val="8A94A6"/>
-                </a:solidFill>
-                <a:latin typeface="Arial"/>
-              </a:rPr>
-              <a:t>What would we still need to verify - and how?</a:t>
-            </a:r>
-          </a:p>
-        </p:txBody>
-      </p:sp>
-      <p:sp>
-        <p:nvSpPr>
-          <p:cNvPr id="7" name="TextBox 6"/>
+              <a:t>This slide is yours - the paper you actually read. Add more behind it if you need to - keep your name on them.</a:t>
+            </a:r>
+          </a:p>
+        </p:txBody>
+      </p:sp>
+      <p:sp>
+        <p:nvSpPr>
+          <p:cNvPr id="8" name="TextBox 7"/>
           <p:cNvSpPr txBox="1"/>
           <p:nvPr/>
         </p:nvSpPr>
@@ -4725,6 +4876,330 @@
       <p:grpSpPr/>
       <p:sp>
         <p:nvSpPr>
+          <p:cNvPr id="2" name="Rectangle 1"/>
+          <p:cNvSpPr/>
+          <p:nvPr/>
+        </p:nvSpPr>
+        <p:spPr>
+          <a:xfrm>
+            <a:off x="0" y="0"/>
+            <a:ext cx="256032" cy="6858000"/>
+          </a:xfrm>
+          <a:prstGeom prst="rect">
+            <a:avLst/>
+          </a:prstGeom>
+          <a:solidFill>
+            <a:srgbClr val="00FF41"/>
+          </a:solidFill>
+          <a:ln>
+            <a:noFill/>
+          </a:ln>
+          <a:effectLst/>
+        </p:spPr>
+        <p:style>
+          <a:lnRef idx="1">
+            <a:schemeClr val="accent1"/>
+          </a:lnRef>
+          <a:fillRef idx="3">
+            <a:schemeClr val="accent1"/>
+          </a:fillRef>
+          <a:effectRef idx="2">
+            <a:schemeClr val="accent1"/>
+          </a:effectRef>
+          <a:fontRef idx="minor">
+            <a:schemeClr val="lt1"/>
+          </a:fontRef>
+        </p:style>
+        <p:txBody>
+          <a:bodyPr rtlCol="0" anchor="ctr"/>
+          <a:lstStyle/>
+          <a:p>
+            <a:pPr algn="ctr"/>
+          </a:p>
+        </p:txBody>
+      </p:sp>
+      <p:sp>
+        <p:nvSpPr>
+          <p:cNvPr id="3" name="TextBox 2"/>
+          <p:cNvSpPr txBox="1"/>
+          <p:nvPr/>
+        </p:nvSpPr>
+        <p:spPr>
+          <a:xfrm>
+            <a:off x="822960" y="1417320"/>
+            <a:ext cx="2743200" cy="1097280"/>
+          </a:xfrm>
+          <a:prstGeom prst="rect">
+            <a:avLst/>
+          </a:prstGeom>
+          <a:noFill/>
+        </p:spPr>
+        <p:txBody>
+          <a:bodyPr wrap="square" anchor="t">
+            <a:spAutoFit/>
+          </a:bodyPr>
+          <a:lstStyle/>
+          <a:p>
+            <a:pPr algn="l">
+              <a:lnSpc>
+                <a:spcPct val="100000"/>
+              </a:lnSpc>
+            </a:pPr>
+            <a:r>
+              <a:rPr sz="6400" b="1">
+                <a:solidFill>
+                  <a:srgbClr val="00FF41"/>
+                </a:solidFill>
+                <a:latin typeface="Courier New"/>
+              </a:rPr>
+              <a:t>05</a:t>
+            </a:r>
+          </a:p>
+        </p:txBody>
+      </p:sp>
+      <p:sp>
+        <p:nvSpPr>
+          <p:cNvPr id="4" name="TextBox 3"/>
+          <p:cNvSpPr txBox="1"/>
+          <p:nvPr/>
+        </p:nvSpPr>
+        <p:spPr>
+          <a:xfrm>
+            <a:off x="841248" y="2487168"/>
+            <a:ext cx="10424160" cy="457200"/>
+          </a:xfrm>
+          <a:prstGeom prst="rect">
+            <a:avLst/>
+          </a:prstGeom>
+          <a:noFill/>
+        </p:spPr>
+        <p:txBody>
+          <a:bodyPr wrap="square" anchor="t">
+            <a:spAutoFit/>
+          </a:bodyPr>
+          <a:lstStyle/>
+          <a:p>
+            <a:pPr algn="l">
+              <a:lnSpc>
+                <a:spcPct val="100000"/>
+              </a:lnSpc>
+            </a:pPr>
+            <a:r>
+              <a:rPr sz="1500" b="1">
+                <a:solidFill>
+                  <a:srgbClr val="00FF41"/>
+                </a:solidFill>
+                <a:latin typeface="Courier New"/>
+              </a:rPr>
+              <a:t>SO WHAT - OUR NEXT DESIGN DIRECTION</a:t>
+            </a:r>
+          </a:p>
+        </p:txBody>
+      </p:sp>
+      <p:sp>
+        <p:nvSpPr>
+          <p:cNvPr id="5" name="TextBox 4"/>
+          <p:cNvSpPr txBox="1"/>
+          <p:nvPr/>
+        </p:nvSpPr>
+        <p:spPr>
+          <a:xfrm>
+            <a:off x="804672" y="2971800"/>
+            <a:ext cx="10607040" cy="1097280"/>
+          </a:xfrm>
+          <a:prstGeom prst="rect">
+            <a:avLst/>
+          </a:prstGeom>
+          <a:noFill/>
+        </p:spPr>
+        <p:txBody>
+          <a:bodyPr wrap="square" anchor="t">
+            <a:spAutoFit/>
+          </a:bodyPr>
+          <a:lstStyle/>
+          <a:p>
+            <a:pPr algn="l">
+              <a:lnSpc>
+                <a:spcPct val="103000"/>
+              </a:lnSpc>
+            </a:pPr>
+            <a:r>
+              <a:rPr sz="3800" b="1">
+                <a:solidFill>
+                  <a:srgbClr val="F5F7FA"/>
+                </a:solidFill>
+                <a:latin typeface="Arial"/>
+              </a:rPr>
+              <a:t>Verification opens the next design  ·  FigJam: 05  ·  carry into Wednesday</a:t>
+            </a:r>
+          </a:p>
+        </p:txBody>
+      </p:sp>
+      <p:sp>
+        <p:nvSpPr>
+          <p:cNvPr id="6" name="TextBox 5"/>
+          <p:cNvSpPr txBox="1"/>
+          <p:nvPr/>
+        </p:nvSpPr>
+        <p:spPr>
+          <a:xfrm>
+            <a:off x="841248" y="4224528"/>
+            <a:ext cx="10424160" cy="1737360"/>
+          </a:xfrm>
+          <a:prstGeom prst="rect">
+            <a:avLst/>
+          </a:prstGeom>
+          <a:noFill/>
+        </p:spPr>
+        <p:txBody>
+          <a:bodyPr wrap="square" anchor="t">
+            <a:spAutoFit/>
+          </a:bodyPr>
+          <a:lstStyle/>
+          <a:p>
+            <a:pPr algn="l">
+              <a:lnSpc>
+                <a:spcPct val="128000"/>
+              </a:lnSpc>
+            </a:pPr>
+            <a:r>
+              <a:rPr sz="1700" b="1">
+                <a:solidFill>
+                  <a:srgbClr val="00FF41"/>
+                </a:solidFill>
+                <a:latin typeface="Arial"/>
+              </a:rPr>
+              <a:t>→  </a:t>
+            </a:r>
+            <a:r>
+              <a:rPr sz="1700" b="0">
+                <a:solidFill>
+                  <a:srgbClr val="8A94A6"/>
+                </a:solidFill>
+                <a:latin typeface="Arial"/>
+              </a:rPr>
+              <a:t>If the design does NOT move the value, what WOULD?  Another design that could achieve it.</a:t>
+            </a:r>
+          </a:p>
+          <a:p>
+            <a:pPr algn="l">
+              <a:lnSpc>
+                <a:spcPct val="128000"/>
+              </a:lnSpc>
+            </a:pPr>
+            <a:r>
+              <a:rPr sz="1700" b="1">
+                <a:solidFill>
+                  <a:srgbClr val="00FF41"/>
+                </a:solidFill>
+                <a:latin typeface="Arial"/>
+              </a:rPr>
+              <a:t>→  </a:t>
+            </a:r>
+            <a:r>
+              <a:rPr sz="1700" b="0">
+                <a:solidFill>
+                  <a:srgbClr val="8A94A6"/>
+                </a:solidFill>
+                <a:latin typeface="Arial"/>
+              </a:rPr>
+              <a:t>What should the next cycle discover?</a:t>
+            </a:r>
+          </a:p>
+          <a:p>
+            <a:pPr algn="l">
+              <a:lnSpc>
+                <a:spcPct val="128000"/>
+              </a:lnSpc>
+            </a:pPr>
+            <a:r>
+              <a:rPr sz="1700" b="1">
+                <a:solidFill>
+                  <a:srgbClr val="00FF41"/>
+                </a:solidFill>
+                <a:latin typeface="Arial"/>
+              </a:rPr>
+              <a:t>→  </a:t>
+            </a:r>
+            <a:r>
+              <a:rPr sz="1700" b="0">
+                <a:solidFill>
+                  <a:srgbClr val="8A94A6"/>
+                </a:solidFill>
+                <a:latin typeface="Arial"/>
+              </a:rPr>
+              <a:t>2-3 directions the evidence points to - you carry these into Wednesday.</a:t>
+            </a:r>
+          </a:p>
+        </p:txBody>
+      </p:sp>
+      <p:sp>
+        <p:nvSpPr>
+          <p:cNvPr id="7" name="TextBox 6"/>
+          <p:cNvSpPr txBox="1"/>
+          <p:nvPr/>
+        </p:nvSpPr>
+        <p:spPr>
+          <a:xfrm>
+            <a:off x="640080" y="6355080"/>
+            <a:ext cx="10972800" cy="365760"/>
+          </a:xfrm>
+          <a:prstGeom prst="rect">
+            <a:avLst/>
+          </a:prstGeom>
+          <a:noFill/>
+        </p:spPr>
+        <p:txBody>
+          <a:bodyPr wrap="square" anchor="t">
+            <a:spAutoFit/>
+          </a:bodyPr>
+          <a:lstStyle/>
+          <a:p>
+            <a:pPr algn="l">
+              <a:lnSpc>
+                <a:spcPct val="100000"/>
+              </a:lnSpc>
+            </a:pPr>
+            <a:r>
+              <a:rPr sz="1000" b="0">
+                <a:solidFill>
+                  <a:srgbClr val="5A6474"/>
+                </a:solidFill>
+                <a:latin typeface="Courier New"/>
+              </a:rPr>
+              <a:t>Value Verification · TECHIE 1121 · Cornell Tech · Tue Jul 28</a:t>
+            </a:r>
+          </a:p>
+        </p:txBody>
+      </p:sp>
+    </p:spTree>
+  </p:cSld>
+  <p:clrMapOvr>
+    <a:masterClrMapping/>
+  </p:clrMapOvr>
+</p:sld>
+</file>
+
+<file path=ppt/slides/slide12.xml><?xml version="1.0" encoding="utf-8"?>
+<p:sld xmlns:a="http://schemas.openxmlformats.org/drawingml/2006/main" xmlns:p="http://schemas.openxmlformats.org/presentationml/2006/main" xmlns:r="http://schemas.openxmlformats.org/officeDocument/2006/relationships">
+  <p:cSld>
+    <p:bg>
+      <p:bgPr>
+        <a:solidFill>
+          <a:srgbClr val="0B0E14"/>
+        </a:solidFill>
+        <a:effectLst/>
+      </p:bgPr>
+    </p:bg>
+    <p:spTree>
+      <p:nvGrpSpPr>
+        <p:cNvPr id="1" name=""/>
+        <p:cNvGrpSpPr/>
+        <p:nvPr/>
+      </p:nvGrpSpPr>
+      <p:grpSpPr/>
+      <p:sp>
+        <p:nvSpPr>
           <p:cNvPr id="2" name="TextBox 1"/>
           <p:cNvSpPr txBox="1"/>
           <p:nvPr/>
@@ -5237,7 +5712,7 @@
                 </a:solidFill>
                 <a:latin typeface="Arial"/>
               </a:rPr>
-              <a:t>Four section headers follow — they are the spine of your talk.</a:t>
+              <a:t>Five section headers follow — they MIRROR the FigJam canvas blocks. The canvas is where you work it out; this deck is where you present it.</a:t>
             </a:r>
           </a:p>
           <a:p>
@@ -5262,7 +5737,7 @@
                 </a:solidFill>
                 <a:latin typeface="Arial"/>
               </a:rPr>
-              <a:t>Sections 01, 02, 04 are the TEAM's. Section 03 has one named slide per person — your individual contribution.</a:t>
+              <a:t>Sections 01, 02, 03, 05 are the TEAM's. Section 04 has one named slide per person — the paper you found and READ.</a:t>
             </a:r>
           </a:p>
           <a:p>
@@ -5312,7 +5787,7 @@
                 </a:solidFill>
                 <a:latin typeface="Arial"/>
               </a:rPr>
-              <a:t>No time to run full tests today - so RESEARCH the method, and what interventions have actually moved this value.</a:t>
+              <a:t>No full user study today — for '03 What we found', apply your metrics with a partner (speculating is fine).</a:t>
             </a:r>
           </a:p>
           <a:p>
@@ -5337,6 +5812,31 @@
                 </a:solidFill>
                 <a:latin typeface="Arial"/>
               </a:rPr>
+              <a:t>Each person READS one real paper (not just an AI summary) — that's section 04 / the FigJam Outlook.</a:t>
+            </a:r>
+          </a:p>
+          <a:p>
+            <a:pPr algn="l">
+              <a:lnSpc>
+                <a:spcPct val="130000"/>
+              </a:lnSpc>
+            </a:pPr>
+            <a:r>
+              <a:rPr sz="1900" b="1">
+                <a:solidFill>
+                  <a:srgbClr val="00FF41"/>
+                </a:solidFill>
+                <a:latin typeface="Arial"/>
+              </a:rPr>
+              <a:t>•  </a:t>
+            </a:r>
+            <a:r>
+              <a:rPr sz="1900" b="0">
+                <a:solidFill>
+                  <a:srgbClr val="F5F7FA"/>
+                </a:solidFill>
+                <a:latin typeface="Arial"/>
+              </a:rPr>
               <a:t>Real citations only — if you can't find the paper, leave the claim out.</a:t>
             </a:r>
           </a:p>
@@ -5362,7 +5862,7 @@
                 </a:solidFill>
                 <a:latin typeface="Arial"/>
               </a:rPr>
-              <a:t>Your reflection is NOT a document — it goes in your own lane on the team FigJam canvas.</a:t>
+              <a:t>Your reflection is NOT in this deck — it goes in your own lane on the team FigJam canvas (block 06).</a:t>
             </a:r>
           </a:p>
           <a:p>
@@ -5613,7 +6113,7 @@
                 </a:solidFill>
                 <a:latin typeface="Arial"/>
               </a:rPr>
-              <a:t>Discovery - operationalize the value</a:t>
+              <a:t>Operationalize the value  ·  FigJam: Value Definition</a:t>
             </a:r>
           </a:p>
         </p:txBody>
@@ -5937,7 +6437,7 @@
                 </a:solidFill>
                 <a:latin typeface="Arial"/>
               </a:rPr>
-              <a:t>Pick a method per lens - we won't run them all today</a:t>
+              <a:t>A method per lens + how others measure it  ·  FigJam: Brainstorm 1-2-3 + 02</a:t>
             </a:r>
           </a:p>
         </p:txBody>
@@ -5985,7 +6485,7 @@
                 </a:solidFill>
                 <a:latin typeface="Arial"/>
               </a:rPr>
-              <a:t>BEHAVIOR - do users ACT differently?  -&gt;  hard to test in class, so we RESEARCH it: [ method + what studies show ].</a:t>
+              <a:t>BEHAVIOR - do users ACT differently?  -&gt;  [ method + metric ].</a:t>
             </a:r>
           </a:p>
           <a:p>
@@ -6010,7 +6510,7 @@
                 </a:solidFill>
                 <a:latin typeface="Arial"/>
               </a:rPr>
-              <a:t>UNDERSTANDING - do they GRASP the value?  -&gt;  a quick check with fellow students is possible: [ method ].</a:t>
+              <a:t>UNDERSTANDING - do they GRASP the value?  -&gt;  [ method + metric ].</a:t>
             </a:r>
           </a:p>
           <a:p>
@@ -6035,7 +6535,32 @@
                 </a:solidFill>
                 <a:latin typeface="Arial"/>
               </a:rPr>
-              <a:t>AFFECT - do they FEEL differently?  -&gt;  a quick check with fellow students is possible: [ method ].</a:t>
+              <a:t>AFFECT - do they FEEL differently?  -&gt;  [ method + metric ].</a:t>
+            </a:r>
+          </a:p>
+          <a:p>
+            <a:pPr algn="l">
+              <a:lnSpc>
+                <a:spcPct val="128000"/>
+              </a:lnSpc>
+            </a:pPr>
+            <a:r>
+              <a:rPr sz="1700" b="1">
+                <a:solidFill>
+                  <a:srgbClr val="00FF41"/>
+                </a:solidFill>
+                <a:latin typeface="Arial"/>
+              </a:rPr>
+              <a:t>→  </a:t>
+            </a:r>
+            <a:r>
+              <a:rPr sz="1700" b="0">
+                <a:solidFill>
+                  <a:srgbClr val="8A94A6"/>
+                </a:solidFill>
+                <a:latin typeface="Arial"/>
+              </a:rPr>
+              <a:t>How do OTHERS measure it, and which INSTRUMENT would we borrow?  (UEQ / HRI / METUX / slop)</a:t>
             </a:r>
           </a:p>
         </p:txBody>
@@ -6222,7 +6747,7 @@
                 </a:solidFill>
                 <a:latin typeface="Courier New"/>
               </a:rPr>
-              <a:t>DESIGN INTERVENTIONS THAT MOVED THIS VALUE</a:t>
+              <a:t>WHAT WE FOUND</a:t>
             </a:r>
           </a:p>
         </p:txBody>
@@ -6261,7 +6786,7 @@
                 </a:solidFill>
                 <a:latin typeface="Arial"/>
               </a:rPr>
-              <a:t>Research - what has actually worked? (each member owns a slide)</a:t>
+              <a:t>Run the check - speculate with a partner if needed  ·  FigJam: 03</a:t>
             </a:r>
           </a:p>
         </p:txBody>
@@ -6309,7 +6834,7 @@
                 </a:solidFill>
                 <a:latin typeface="Arial"/>
               </a:rPr>
-              <a:t>Each member presents their OWN researched intervention - the named slides that follow.</a:t>
+              <a:t>Apply your metrics with a partner - it is fine to SPECULATE today; real verification takes time.</a:t>
             </a:r>
           </a:p>
           <a:p>
@@ -6334,7 +6859,7 @@
                 </a:solidFill>
                 <a:latin typeface="Arial"/>
               </a:rPr>
-              <a:t>A real design intervention tried for this value, and its result: worked / mixed / failed.</a:t>
+              <a:t>BEHAVIOR: do they ACT differently?   UNDERSTANDING: do they GRASP it?   AFFECT: do they FEEL differently?</a:t>
             </a:r>
           </a:p>
           <a:p>
@@ -6359,7 +6884,7 @@
                 </a:solidFill>
                 <a:latin typeface="Arial"/>
               </a:rPr>
-              <a:t>Real sources only - never invent a citation.</a:t>
+              <a:t>Green = it works.  Red = it does not.  Does the design move the value - for whom, and who is left out?</a:t>
             </a:r>
           </a:p>
         </p:txBody>
@@ -6431,53 +6956,14 @@
       <p:grpSpPr/>
       <p:sp>
         <p:nvSpPr>
-          <p:cNvPr id="2" name="TextBox 1"/>
-          <p:cNvSpPr txBox="1"/>
-          <p:nvPr/>
-        </p:nvSpPr>
-        <p:spPr>
-          <a:xfrm>
-            <a:off x="640080" y="502920"/>
-            <a:ext cx="10058400" cy="365760"/>
-          </a:xfrm>
-          <a:prstGeom prst="rect">
-            <a:avLst/>
-          </a:prstGeom>
-          <a:noFill/>
-        </p:spPr>
-        <p:txBody>
-          <a:bodyPr wrap="square" anchor="t">
-            <a:spAutoFit/>
-          </a:bodyPr>
-          <a:lstStyle/>
-          <a:p>
-            <a:pPr algn="l">
-              <a:lnSpc>
-                <a:spcPct val="100000"/>
-              </a:lnSpc>
-            </a:pPr>
-            <a:r>
-              <a:rPr sz="1300" b="1">
-                <a:solidFill>
-                  <a:srgbClr val="00FF41"/>
-                </a:solidFill>
-                <a:latin typeface="Courier New"/>
-              </a:rPr>
-              <a:t>03.1  ·  YOUR SLIDE (your individual contribution)</a:t>
-            </a:r>
-          </a:p>
-        </p:txBody>
-      </p:sp>
-      <p:sp>
-        <p:nvSpPr>
-          <p:cNvPr id="3" name="Rectangle 2"/>
+          <p:cNvPr id="2" name="Rectangle 1"/>
           <p:cNvSpPr/>
           <p:nvPr/>
         </p:nvSpPr>
         <p:spPr>
           <a:xfrm>
-            <a:off x="640080" y="932688"/>
-            <a:ext cx="822960" cy="73152"/>
+            <a:off x="0" y="0"/>
+            <a:ext cx="256032" cy="6858000"/>
           </a:xfrm>
           <a:prstGeom prst="rect">
             <a:avLst/>
@@ -6514,14 +7000,14 @@
       </p:sp>
       <p:sp>
         <p:nvSpPr>
-          <p:cNvPr id="4" name="TextBox 3"/>
+          <p:cNvPr id="3" name="TextBox 2"/>
           <p:cNvSpPr txBox="1"/>
           <p:nvPr/>
         </p:nvSpPr>
         <p:spPr>
           <a:xfrm>
-            <a:off x="640080" y="1170432"/>
-            <a:ext cx="10972800" cy="914400"/>
+            <a:off x="822960" y="1417320"/>
+            <a:ext cx="2743200" cy="1097280"/>
           </a:xfrm>
           <a:prstGeom prst="rect">
             <a:avLst/>
@@ -6540,27 +7026,27 @@
               </a:lnSpc>
             </a:pPr>
             <a:r>
-              <a:rPr sz="3600" b="1">
-                <a:solidFill>
-                  <a:srgbClr val="F5F7FA"/>
-                </a:solidFill>
-                <a:latin typeface="Arial"/>
-              </a:rPr>
-              <a:t>Evan Birnbaum</a:t>
-            </a:r>
-          </a:p>
-        </p:txBody>
-      </p:sp>
-      <p:sp>
-        <p:nvSpPr>
-          <p:cNvPr id="5" name="TextBox 4"/>
+              <a:rPr sz="6400" b="1">
+                <a:solidFill>
+                  <a:srgbClr val="00FF41"/>
+                </a:solidFill>
+                <a:latin typeface="Courier New"/>
+              </a:rPr>
+              <a:t>04</a:t>
+            </a:r>
+          </a:p>
+        </p:txBody>
+      </p:sp>
+      <p:sp>
+        <p:nvSpPr>
+          <p:cNvPr id="4" name="TextBox 3"/>
           <p:cNvSpPr txBox="1"/>
           <p:nvPr/>
         </p:nvSpPr>
         <p:spPr>
           <a:xfrm>
-            <a:off x="658368" y="2286000"/>
-            <a:ext cx="10881360" cy="2834640"/>
+            <a:off x="841248" y="2487168"/>
+            <a:ext cx="10424160" cy="457200"/>
           </a:xfrm>
           <a:prstGeom prst="rect">
             <a:avLst/>
@@ -6575,161 +7061,31 @@
           <a:p>
             <a:pPr algn="l">
               <a:lnSpc>
-                <a:spcPct val="134000"/>
-              </a:lnSpc>
-            </a:pPr>
-            <a:r>
-              <a:rPr sz="1900" b="1">
+                <a:spcPct val="100000"/>
+              </a:lnSpc>
+            </a:pPr>
+            <a:r>
+              <a:rPr sz="1500" b="1">
                 <a:solidFill>
                   <a:srgbClr val="00FF41"/>
                 </a:solidFill>
-                <a:latin typeface="Arial"/>
-              </a:rPr>
-              <a:t>→  </a:t>
-            </a:r>
-            <a:r>
-              <a:rPr sz="1900" b="0">
-                <a:solidFill>
-                  <a:srgbClr val="F5F7FA"/>
-                </a:solidFill>
-                <a:latin typeface="Arial"/>
-              </a:rPr>
-              <a:t>A design intervention someone tried to move THIS value - [ what they did ]</a:t>
-            </a:r>
-          </a:p>
-          <a:p>
-            <a:pPr algn="l">
-              <a:lnSpc>
-                <a:spcPct val="134000"/>
-              </a:lnSpc>
-            </a:pPr>
-            <a:r>
-              <a:rPr sz="1900" b="1">
-                <a:solidFill>
-                  <a:srgbClr val="00FF41"/>
-                </a:solidFill>
-                <a:latin typeface="Arial"/>
-              </a:rPr>
-              <a:t>→  </a:t>
-            </a:r>
-            <a:r>
-              <a:rPr sz="1900" b="0">
-                <a:solidFill>
-                  <a:srgbClr val="F5F7FA"/>
-                </a:solidFill>
-                <a:latin typeface="Arial"/>
-              </a:rPr>
-              <a:t>The result - [ worked / mixed / failed ] - and the real source [ author, year ]</a:t>
-            </a:r>
-          </a:p>
-          <a:p>
-            <a:pPr algn="l">
-              <a:lnSpc>
-                <a:spcPct val="134000"/>
-              </a:lnSpc>
-            </a:pPr>
-            <a:r>
-              <a:rPr sz="1900" b="1">
-                <a:solidFill>
-                  <a:srgbClr val="00FF41"/>
-                </a:solidFill>
-                <a:latin typeface="Arial"/>
-              </a:rPr>
-              <a:t>→  </a:t>
-            </a:r>
-            <a:r>
-              <a:rPr sz="1900" b="0">
-                <a:solidFill>
-                  <a:srgbClr val="F5F7FA"/>
-                </a:solidFill>
-                <a:latin typeface="Arial"/>
-              </a:rPr>
-              <a:t>How you'd test it - [ method ]  (behavior = research it; understanding/affect = quick student check)</a:t>
-            </a:r>
-          </a:p>
-          <a:p>
-            <a:pPr algn="l">
-              <a:lnSpc>
-                <a:spcPct val="134000"/>
-              </a:lnSpc>
-            </a:pPr>
-            <a:r>
-              <a:rPr sz="1900" b="1">
-                <a:solidFill>
-                  <a:srgbClr val="00FF41"/>
-                </a:solidFill>
-                <a:latin typeface="Arial"/>
-              </a:rPr>
-              <a:t>→  </a:t>
-            </a:r>
-            <a:r>
-              <a:rPr sz="1900" b="0">
-                <a:solidFill>
-                  <a:srgbClr val="F5F7FA"/>
-                </a:solidFill>
-                <a:latin typeface="Arial"/>
-              </a:rPr>
-              <a:t>Does it support or challenge our design direction? - [ ___ ]</a:t>
-            </a:r>
-          </a:p>
-        </p:txBody>
-      </p:sp>
-      <p:sp>
-        <p:nvSpPr>
-          <p:cNvPr id="6" name="Rounded Rectangle 5"/>
-          <p:cNvSpPr/>
-          <p:nvPr/>
-        </p:nvSpPr>
-        <p:spPr>
-          <a:xfrm>
-            <a:off x="640080" y="5440680"/>
-            <a:ext cx="10881360" cy="658368"/>
-          </a:xfrm>
-          <a:prstGeom prst="roundRect">
-            <a:avLst/>
-          </a:prstGeom>
-          <a:solidFill>
-            <a:srgbClr val="151B26"/>
-          </a:solidFill>
-          <a:ln w="19050">
-            <a:solidFill>
-              <a:srgbClr val="00FF41"/>
-            </a:solidFill>
-          </a:ln>
-          <a:effectLst/>
-        </p:spPr>
-        <p:style>
-          <a:lnRef idx="1">
-            <a:schemeClr val="accent1"/>
-          </a:lnRef>
-          <a:fillRef idx="3">
-            <a:schemeClr val="accent1"/>
-          </a:fillRef>
-          <a:effectRef idx="2">
-            <a:schemeClr val="accent1"/>
-          </a:effectRef>
-          <a:fontRef idx="minor">
-            <a:schemeClr val="lt1"/>
-          </a:fontRef>
-        </p:style>
-        <p:txBody>
-          <a:bodyPr rtlCol="0" anchor="ctr"/>
-          <a:lstStyle/>
-          <a:p>
-            <a:pPr algn="ctr"/>
-          </a:p>
-        </p:txBody>
-      </p:sp>
-      <p:sp>
-        <p:nvSpPr>
-          <p:cNvPr id="7" name="TextBox 6"/>
+                <a:latin typeface="Courier New"/>
+              </a:rPr>
+              <a:t>WHAT RELATED RESEARCH FOUND</a:t>
+            </a:r>
+          </a:p>
+        </p:txBody>
+      </p:sp>
+      <p:sp>
+        <p:nvSpPr>
+          <p:cNvPr id="5" name="TextBox 4"/>
           <p:cNvSpPr txBox="1"/>
           <p:nvPr/>
         </p:nvSpPr>
         <p:spPr>
           <a:xfrm>
-            <a:off x="914400" y="5440680"/>
-            <a:ext cx="10332720" cy="658368"/>
+            <a:off x="804672" y="2971800"/>
+            <a:ext cx="10607040" cy="1097280"/>
           </a:xfrm>
           <a:prstGeom prst="rect">
             <a:avLst/>
@@ -6737,40 +7093,129 @@
           <a:noFill/>
         </p:spPr>
         <p:txBody>
-          <a:bodyPr wrap="square" anchor="ctr">
+          <a:bodyPr wrap="square" anchor="t">
             <a:spAutoFit/>
           </a:bodyPr>
           <a:lstStyle/>
           <a:p>
             <a:pPr algn="l">
               <a:lnSpc>
-                <a:spcPct val="100000"/>
-              </a:lnSpc>
-            </a:pPr>
-            <a:r>
-              <a:rPr sz="1600" b="1">
+                <a:spcPct val="103000"/>
+              </a:lnSpc>
+            </a:pPr>
+            <a:r>
+              <a:rPr sz="3800" b="1">
+                <a:solidFill>
+                  <a:srgbClr val="F5F7FA"/>
+                </a:solidFill>
+                <a:latin typeface="Arial"/>
+              </a:rPr>
+              <a:t>Each member READS one real paper  ·  FigJam: 04 Outlook  ·  the named slides follow</a:t>
+            </a:r>
+          </a:p>
+        </p:txBody>
+      </p:sp>
+      <p:sp>
+        <p:nvSpPr>
+          <p:cNvPr id="6" name="TextBox 5"/>
+          <p:cNvSpPr txBox="1"/>
+          <p:nvPr/>
+        </p:nvSpPr>
+        <p:spPr>
+          <a:xfrm>
+            <a:off x="841248" y="4224528"/>
+            <a:ext cx="10424160" cy="1737360"/>
+          </a:xfrm>
+          <a:prstGeom prst="rect">
+            <a:avLst/>
+          </a:prstGeom>
+          <a:noFill/>
+        </p:spPr>
+        <p:txBody>
+          <a:bodyPr wrap="square" anchor="t">
+            <a:spAutoFit/>
+          </a:bodyPr>
+          <a:lstStyle/>
+          <a:p>
+            <a:pPr algn="l">
+              <a:lnSpc>
+                <a:spcPct val="128000"/>
+              </a:lnSpc>
+            </a:pPr>
+            <a:r>
+              <a:rPr sz="1700" b="1">
                 <a:solidFill>
                   <a:srgbClr val="00FF41"/>
                 </a:solidFill>
                 <a:latin typeface="Arial"/>
               </a:rPr>
-              <a:t>▸  </a:t>
-            </a:r>
-            <a:r>
-              <a:rPr sz="1500" b="1">
-                <a:solidFill>
-                  <a:srgbClr val="F5F7FA"/>
-                </a:solidFill>
-                <a:latin typeface="Arial"/>
-              </a:rPr>
-              <a:t>This slide is yours. Add more slides behind it if you need them - keep your name on them.</a:t>
-            </a:r>
-          </a:p>
-        </p:txBody>
-      </p:sp>
-      <p:sp>
-        <p:nvSpPr>
-          <p:cNvPr id="8" name="TextBox 7"/>
+              <a:t>→  </a:t>
+            </a:r>
+            <a:r>
+              <a:rPr sz="1700" b="0">
+                <a:solidFill>
+                  <a:srgbClr val="8A94A6"/>
+                </a:solidFill>
+                <a:latin typeface="Arial"/>
+              </a:rPr>
+              <a:t>Each member presents their OWN paper - found via AI academic search (Claude / ChatGPT / Elicit / Semantic Scholar / Scholar Labs), then READ.</a:t>
+            </a:r>
+          </a:p>
+          <a:p>
+            <a:pPr algn="l">
+              <a:lnSpc>
+                <a:spcPct val="128000"/>
+              </a:lnSpc>
+            </a:pPr>
+            <a:r>
+              <a:rPr sz="1700" b="1">
+                <a:solidFill>
+                  <a:srgbClr val="00FF41"/>
+                </a:solidFill>
+                <a:latin typeface="Arial"/>
+              </a:rPr>
+              <a:t>→  </a:t>
+            </a:r>
+            <a:r>
+              <a:rPr sz="1700" b="0">
+                <a:solidFill>
+                  <a:srgbClr val="8A94A6"/>
+                </a:solidFill>
+                <a:latin typeface="Arial"/>
+              </a:rPr>
+              <a:t>Source (author, year)  -  what WORKED  -  what FAILED (avoid this).</a:t>
+            </a:r>
+          </a:p>
+          <a:p>
+            <a:pPr algn="l">
+              <a:lnSpc>
+                <a:spcPct val="128000"/>
+              </a:lnSpc>
+            </a:pPr>
+            <a:r>
+              <a:rPr sz="1700" b="1">
+                <a:solidFill>
+                  <a:srgbClr val="00FF41"/>
+                </a:solidFill>
+                <a:latin typeface="Arial"/>
+              </a:rPr>
+              <a:t>→  </a:t>
+            </a:r>
+            <a:r>
+              <a:rPr sz="1700" b="0">
+                <a:solidFill>
+                  <a:srgbClr val="8A94A6"/>
+                </a:solidFill>
+                <a:latin typeface="Arial"/>
+              </a:rPr>
+              <a:t>Real papers only, actually read - never invent a citation, never rely on an AI summary alone.</a:t>
+            </a:r>
+          </a:p>
+        </p:txBody>
+      </p:sp>
+      <p:sp>
+        <p:nvSpPr>
+          <p:cNvPr id="7" name="TextBox 6"/>
           <p:cNvSpPr txBox="1"/>
           <p:nvPr/>
         </p:nvSpPr>
@@ -6867,7 +7312,7 @@
                 </a:solidFill>
                 <a:latin typeface="Courier New"/>
               </a:rPr>
-              <a:t>03.2  ·  YOUR SLIDE (your individual contribution)</a:t>
+              <a:t>04.1  ·  YOUR PAPER (your individual contribution)</a:t>
             </a:r>
           </a:p>
         </p:txBody>
@@ -6950,7 +7395,7 @@
                 </a:solidFill>
                 <a:latin typeface="Arial"/>
               </a:rPr>
-              <a:t>Derin Sezgin</a:t>
+              <a:t>Evan Birnbaum</a:t>
             </a:r>
           </a:p>
         </p:txBody>
@@ -6998,7 +7443,7 @@
                 </a:solidFill>
                 <a:latin typeface="Arial"/>
               </a:rPr>
-              <a:t>A design intervention someone tried to move THIS value - [ what they did ]</a:t>
+              <a:t>The paper you found + READ - [ author, year, title ]  (AI search to FIND it; then read the actual paper)</a:t>
             </a:r>
           </a:p>
           <a:p>
@@ -7023,7 +7468,7 @@
                 </a:solidFill>
                 <a:latin typeface="Arial"/>
               </a:rPr>
-              <a:t>The result - [ worked / mixed / failed ] - and the real source [ author, year ]</a:t>
+              <a:t>The design intervention they tried to move THIS value - [ what they did ]</a:t>
             </a:r>
           </a:p>
           <a:p>
@@ -7048,7 +7493,7 @@
                 </a:solidFill>
                 <a:latin typeface="Arial"/>
               </a:rPr>
-              <a:t>How you'd test it - [ method ]  (behavior = research it; understanding/affect = quick student check)</a:t>
+              <a:t>What WORKED - [ ___ ]     |     What FAILED / to avoid - [ ___ ]</a:t>
             </a:r>
           </a:p>
           <a:p>
@@ -7167,7 +7612,7 @@
                 </a:solidFill>
                 <a:latin typeface="Arial"/>
               </a:rPr>
-              <a:t>This slide is yours. Add more slides behind it if you need them - keep your name on them.</a:t>
+              <a:t>This slide is yours - the paper you actually read. Add more behind it if you need to - keep your name on them.</a:t>
             </a:r>
           </a:p>
         </p:txBody>
@@ -7271,7 +7716,7 @@
                 </a:solidFill>
                 <a:latin typeface="Courier New"/>
               </a:rPr>
-              <a:t>03.3  ·  YOUR SLIDE (your individual contribution)</a:t>
+              <a:t>04.2  ·  YOUR PAPER (your individual contribution)</a:t>
             </a:r>
           </a:p>
         </p:txBody>
@@ -7354,7 +7799,7 @@
                 </a:solidFill>
                 <a:latin typeface="Arial"/>
               </a:rPr>
-              <a:t>Magnes Dugan</a:t>
+              <a:t>Derin Sezgin</a:t>
             </a:r>
           </a:p>
         </p:txBody>
@@ -7402,7 +7847,7 @@
                 </a:solidFill>
                 <a:latin typeface="Arial"/>
               </a:rPr>
-              <a:t>A design intervention someone tried to move THIS value - [ what they did ]</a:t>
+              <a:t>The paper you found + READ - [ author, year, title ]  (AI search to FIND it; then read the actual paper)</a:t>
             </a:r>
           </a:p>
           <a:p>
@@ -7427,7 +7872,7 @@
                 </a:solidFill>
                 <a:latin typeface="Arial"/>
               </a:rPr>
-              <a:t>The result - [ worked / mixed / failed ] - and the real source [ author, year ]</a:t>
+              <a:t>The design intervention they tried to move THIS value - [ what they did ]</a:t>
             </a:r>
           </a:p>
           <a:p>
@@ -7452,7 +7897,7 @@
                 </a:solidFill>
                 <a:latin typeface="Arial"/>
               </a:rPr>
-              <a:t>How you'd test it - [ method ]  (behavior = research it; understanding/affect = quick student check)</a:t>
+              <a:t>What WORKED - [ ___ ]     |     What FAILED / to avoid - [ ___ ]</a:t>
             </a:r>
           </a:p>
           <a:p>
@@ -7571,7 +8016,7 @@
                 </a:solidFill>
                 <a:latin typeface="Arial"/>
               </a:rPr>
-              <a:t>This slide is yours. Add more slides behind it if you need them - keep your name on them.</a:t>
+              <a:t>This slide is yours - the paper you actually read. Add more behind it if you need to - keep your name on them.</a:t>
             </a:r>
           </a:p>
         </p:txBody>
@@ -7675,7 +8120,7 @@
                 </a:solidFill>
                 <a:latin typeface="Courier New"/>
               </a:rPr>
-              <a:t>03.4  ·  YOUR SLIDE (your individual contribution)</a:t>
+              <a:t>04.3  ·  YOUR PAPER (your individual contribution)</a:t>
             </a:r>
           </a:p>
         </p:txBody>
@@ -7758,7 +8203,7 @@
                 </a:solidFill>
                 <a:latin typeface="Arial"/>
               </a:rPr>
-              <a:t>[ +1 - add your name ]</a:t>
+              <a:t>Magnes Dugan</a:t>
             </a:r>
           </a:p>
         </p:txBody>
@@ -7806,7 +8251,7 @@
                 </a:solidFill>
                 <a:latin typeface="Arial"/>
               </a:rPr>
-              <a:t>A design intervention someone tried to move THIS value - [ what they did ]</a:t>
+              <a:t>The paper you found + READ - [ author, year, title ]  (AI search to FIND it; then read the actual paper)</a:t>
             </a:r>
           </a:p>
           <a:p>
@@ -7831,7 +8276,7 @@
                 </a:solidFill>
                 <a:latin typeface="Arial"/>
               </a:rPr>
-              <a:t>The result - [ worked / mixed / failed ] - and the real source [ author, year ]</a:t>
+              <a:t>The design intervention they tried to move THIS value - [ what they did ]</a:t>
             </a:r>
           </a:p>
           <a:p>
@@ -7856,7 +8301,7 @@
                 </a:solidFill>
                 <a:latin typeface="Arial"/>
               </a:rPr>
-              <a:t>How you'd test it - [ method ]  (behavior = research it; understanding/affect = quick student check)</a:t>
+              <a:t>What WORKED - [ ___ ]     |     What FAILED / to avoid - [ ___ ]</a:t>
             </a:r>
           </a:p>
           <a:p>
@@ -7975,7 +8420,7 @@
                 </a:solidFill>
                 <a:latin typeface="Arial"/>
               </a:rPr>
-              <a:t>This slide is yours. Add more slides behind it if you need them - keep your name on them.</a:t>
+              <a:t>This slide is yours - the paper you actually read. Add more behind it if you need to - keep your name on them.</a:t>
             </a:r>
           </a:p>
         </p:txBody>

--- a/slides/team-decks/Week3-Tue-guantanamo-bay-wendys.pptx
+++ b/slides/team-decks/Week3-Tue-guantanamo-bay-wendys.pptx
@@ -583,7 +583,7 @@
           <a:lstStyle/>
           <a:p>
             <a:r>
-              <a:t>Section header — the team's own slides go after this one.</a:t>
+              <a:t>Section header (FigJam: 05 SO WHAT) — the team's own slides go after this one.</a:t>
             </a:r>
           </a:p>
         </p:txBody>
@@ -653,7 +653,7 @@
           <a:lstStyle/>
           <a:p>
             <a:r>
-              <a:t>Section header — the team's own slides go after this one.</a:t>
+              <a:t>Section header (FigJam: VALUE DEFINITION) — the team's own slides go after this one.</a:t>
             </a:r>
           </a:p>
         </p:txBody>
@@ -723,7 +723,7 @@
           <a:lstStyle/>
           <a:p>
             <a:r>
-              <a:t>Section header — the team's own slides go after this one.</a:t>
+              <a:t>Section header (FigJam: BRAINSTORM 1·2·3 + 02) — the team's own slides go after this one.</a:t>
             </a:r>
           </a:p>
         </p:txBody>
@@ -793,7 +793,7 @@
           <a:lstStyle/>
           <a:p>
             <a:r>
-              <a:t>Section header — the team's own slides go after this one.</a:t>
+              <a:t>Section header (FigJam: 03 WHAT WE FOUND) — the team's own slides go after this one.</a:t>
             </a:r>
           </a:p>
         </p:txBody>
@@ -863,7 +863,7 @@
           <a:lstStyle/>
           <a:p>
             <a:r>
-              <a:t>Section header — the team's own slides go after this one.</a:t>
+              <a:t>Section header (FigJam: 04 OUTLOOK) — the team's own slides go after this one.</a:t>
             </a:r>
           </a:p>
         </p:txBody>
@@ -4249,7 +4249,7 @@
         <p:spPr>
           <a:xfrm>
             <a:off x="804672" y="2103120"/>
-            <a:ext cx="10607040" cy="1737360"/>
+            <a:ext cx="10607040" cy="1554480"/>
           </a:xfrm>
           <a:prstGeom prst="rect">
             <a:avLst/>
@@ -4268,7 +4268,7 @@
               </a:lnSpc>
             </a:pPr>
             <a:r>
-              <a:rPr sz="4600" b="1">
+              <a:rPr sz="4400" b="1">
                 <a:solidFill>
                   <a:srgbClr val="F5F7FA"/>
                 </a:solidFill>
@@ -4326,7 +4326,7 @@
         </p:nvSpPr>
         <p:spPr>
           <a:xfrm>
-            <a:off x="841248" y="4206240"/>
+            <a:off x="841248" y="4224528"/>
             <a:ext cx="10607040" cy="457200"/>
           </a:xfrm>
           <a:prstGeom prst="rect">
@@ -4374,7 +4374,7 @@
         </p:nvSpPr>
         <p:spPr>
           <a:xfrm>
-            <a:off x="841248" y="4709160"/>
+            <a:off x="841248" y="4681728"/>
             <a:ext cx="10424160" cy="457200"/>
           </a:xfrm>
           <a:prstGeom prst="rect">
@@ -4504,7 +4504,7 @@
                 </a:solidFill>
                 <a:latin typeface="Courier New"/>
               </a:rPr>
-              <a:t>04.4  ·  YOUR PAPER (your individual contribution)</a:t>
+              <a:t>04.4   ·   YOUR PAPER  (your individual contribution)</a:t>
             </a:r>
           </a:p>
         </p:txBody>
@@ -4561,8 +4561,8 @@
         </p:nvSpPr>
         <p:spPr>
           <a:xfrm>
-            <a:off x="640080" y="1170432"/>
-            <a:ext cx="10972800" cy="914400"/>
+            <a:off x="822960" y="1207008"/>
+            <a:ext cx="10515600" cy="914400"/>
           </a:xfrm>
           <a:prstGeom prst="rect">
             <a:avLst/>
@@ -4600,8 +4600,8 @@
         </p:nvSpPr>
         <p:spPr>
           <a:xfrm>
-            <a:off x="658368" y="2286000"/>
-            <a:ext cx="10881360" cy="2834640"/>
+            <a:off x="841248" y="2084831"/>
+            <a:ext cx="10424160" cy="457200"/>
           </a:xfrm>
           <a:prstGeom prst="rect">
             <a:avLst/>
@@ -4616,101 +4616,17 @@
           <a:p>
             <a:pPr algn="l">
               <a:lnSpc>
-                <a:spcPct val="134000"/>
-              </a:lnSpc>
-            </a:pPr>
-            <a:r>
-              <a:rPr sz="1900" b="1">
-                <a:solidFill>
-                  <a:srgbClr val="00FF41"/>
-                </a:solidFill>
-                <a:latin typeface="Arial"/>
-              </a:rPr>
-              <a:t>→  </a:t>
-            </a:r>
-            <a:r>
-              <a:rPr sz="1900" b="0">
-                <a:solidFill>
-                  <a:srgbClr val="F5F7FA"/>
-                </a:solidFill>
-                <a:latin typeface="Arial"/>
-              </a:rPr>
-              <a:t>The paper you found + READ - [ author, year, title ]  (AI search to FIND it; then read the actual paper)</a:t>
-            </a:r>
-          </a:p>
-          <a:p>
-            <a:pPr algn="l">
-              <a:lnSpc>
-                <a:spcPct val="134000"/>
-              </a:lnSpc>
-            </a:pPr>
-            <a:r>
-              <a:rPr sz="1900" b="1">
-                <a:solidFill>
-                  <a:srgbClr val="00FF41"/>
-                </a:solidFill>
-                <a:latin typeface="Arial"/>
-              </a:rPr>
-              <a:t>→  </a:t>
-            </a:r>
-            <a:r>
-              <a:rPr sz="1900" b="0">
-                <a:solidFill>
-                  <a:srgbClr val="F5F7FA"/>
-                </a:solidFill>
-                <a:latin typeface="Arial"/>
-              </a:rPr>
-              <a:t>The design intervention they tried to move THIS value - [ what they did ]</a:t>
-            </a:r>
-          </a:p>
-          <a:p>
-            <a:pPr algn="l">
-              <a:lnSpc>
-                <a:spcPct val="134000"/>
-              </a:lnSpc>
-            </a:pPr>
-            <a:r>
-              <a:rPr sz="1900" b="1">
-                <a:solidFill>
-                  <a:srgbClr val="00FF41"/>
-                </a:solidFill>
-                <a:latin typeface="Arial"/>
-              </a:rPr>
-              <a:t>→  </a:t>
-            </a:r>
-            <a:r>
-              <a:rPr sz="1900" b="0">
-                <a:solidFill>
-                  <a:srgbClr val="F5F7FA"/>
-                </a:solidFill>
-                <a:latin typeface="Arial"/>
-              </a:rPr>
-              <a:t>What WORKED - [ ___ ]     |     What FAILED / to avoid - [ ___ ]</a:t>
-            </a:r>
-          </a:p>
-          <a:p>
-            <a:pPr algn="l">
-              <a:lnSpc>
-                <a:spcPct val="134000"/>
-              </a:lnSpc>
-            </a:pPr>
-            <a:r>
-              <a:rPr sz="1900" b="1">
-                <a:solidFill>
-                  <a:srgbClr val="00FF41"/>
-                </a:solidFill>
-                <a:latin typeface="Arial"/>
-              </a:rPr>
-              <a:t>→  </a:t>
-            </a:r>
-            <a:r>
-              <a:rPr sz="1900" b="0">
-                <a:solidFill>
-                  <a:srgbClr val="F5F7FA"/>
-                </a:solidFill>
-                <a:latin typeface="Arial"/>
-              </a:rPr>
-              <a:t>Does it support or challenge our design direction? - [ ___ ]</a:t>
+                <a:spcPct val="100000"/>
+              </a:lnSpc>
+            </a:pPr>
+            <a:r>
+              <a:rPr sz="1600" b="0">
+                <a:solidFill>
+                  <a:srgbClr val="8A94A6"/>
+                </a:solidFill>
+                <a:latin typeface="Arial"/>
+              </a:rPr>
+              <a:t>The paper you found via AI search — and actually READ (not just the AI summary).</a:t>
             </a:r>
           </a:p>
         </p:txBody>
@@ -4723,8 +4639,8 @@
         </p:nvSpPr>
         <p:spPr>
           <a:xfrm>
-            <a:off x="640080" y="5440680"/>
-            <a:ext cx="10881360" cy="658368"/>
+            <a:off x="822960" y="2743200"/>
+            <a:ext cx="10543032" cy="2606040"/>
           </a:xfrm>
           <a:prstGeom prst="roundRect">
             <a:avLst/>
@@ -4732,10 +4648,8 @@
           <a:solidFill>
             <a:srgbClr val="151B26"/>
           </a:solidFill>
-          <a:ln w="19050">
-            <a:solidFill>
-              <a:srgbClr val="00FF41"/>
-            </a:solidFill>
+          <a:ln>
+            <a:noFill/>
           </a:ln>
           <a:effectLst/>
         </p:spPr>
@@ -4769,8 +4683,8 @@
         </p:nvSpPr>
         <p:spPr>
           <a:xfrm>
-            <a:off x="914400" y="5440680"/>
-            <a:ext cx="10332720" cy="658368"/>
+            <a:off x="1143000" y="3127248"/>
+            <a:ext cx="9921240" cy="1965960"/>
           </a:xfrm>
           <a:prstGeom prst="rect">
             <a:avLst/>
@@ -4778,40 +4692,129 @@
           <a:noFill/>
         </p:spPr>
         <p:txBody>
-          <a:bodyPr wrap="square" anchor="ctr">
+          <a:bodyPr wrap="square" anchor="t">
             <a:spAutoFit/>
           </a:bodyPr>
           <a:lstStyle/>
           <a:p>
             <a:pPr algn="l">
               <a:lnSpc>
+                <a:spcPct val="150000"/>
+              </a:lnSpc>
+            </a:pPr>
+            <a:r>
+              <a:rPr sz="1900" b="1">
+                <a:solidFill>
+                  <a:srgbClr val="00FF41"/>
+                </a:solidFill>
+                <a:latin typeface="Arial"/>
+              </a:rPr>
+              <a:t>→  </a:t>
+            </a:r>
+            <a:r>
+              <a:rPr sz="1900" b="0">
+                <a:solidFill>
+                  <a:srgbClr val="F5F7FA"/>
+                </a:solidFill>
+                <a:latin typeface="Arial"/>
+              </a:rPr>
+              <a:t>The paper — [ author, year, title ]</a:t>
+            </a:r>
+          </a:p>
+          <a:p>
+            <a:pPr algn="l">
+              <a:lnSpc>
+                <a:spcPct val="150000"/>
+              </a:lnSpc>
+            </a:pPr>
+            <a:r>
+              <a:rPr sz="1900" b="1">
+                <a:solidFill>
+                  <a:srgbClr val="00FF41"/>
+                </a:solidFill>
+                <a:latin typeface="Arial"/>
+              </a:rPr>
+              <a:t>→  </a:t>
+            </a:r>
+            <a:r>
+              <a:rPr sz="1900" b="0">
+                <a:solidFill>
+                  <a:srgbClr val="F5F7FA"/>
+                </a:solidFill>
+                <a:latin typeface="Arial"/>
+              </a:rPr>
+              <a:t>What WORKED — [ … ]     |     What FAILED / to avoid — [ … ]</a:t>
+            </a:r>
+          </a:p>
+          <a:p>
+            <a:pPr algn="l">
+              <a:lnSpc>
+                <a:spcPct val="150000"/>
+              </a:lnSpc>
+            </a:pPr>
+            <a:r>
+              <a:rPr sz="1900" b="1">
+                <a:solidFill>
+                  <a:srgbClr val="00FF41"/>
+                </a:solidFill>
+                <a:latin typeface="Arial"/>
+              </a:rPr>
+              <a:t>→  </a:t>
+            </a:r>
+            <a:r>
+              <a:rPr sz="1900" b="0">
+                <a:solidFill>
+                  <a:srgbClr val="F5F7FA"/>
+                </a:solidFill>
+                <a:latin typeface="Arial"/>
+              </a:rPr>
+              <a:t>Supports or challenges our design direction? — [ … ]</a:t>
+            </a:r>
+          </a:p>
+        </p:txBody>
+      </p:sp>
+      <p:sp>
+        <p:nvSpPr>
+          <p:cNvPr id="8" name="TextBox 7"/>
+          <p:cNvSpPr txBox="1"/>
+          <p:nvPr/>
+        </p:nvSpPr>
+        <p:spPr>
+          <a:xfrm>
+            <a:off x="822960" y="5623560"/>
+            <a:ext cx="10515600" cy="365760"/>
+          </a:xfrm>
+          <a:prstGeom prst="rect">
+            <a:avLst/>
+          </a:prstGeom>
+          <a:noFill/>
+        </p:spPr>
+        <p:txBody>
+          <a:bodyPr wrap="square" anchor="t">
+            <a:spAutoFit/>
+          </a:bodyPr>
+          <a:lstStyle/>
+          <a:p>
+            <a:pPr algn="l">
+              <a:lnSpc>
                 <a:spcPct val="100000"/>
               </a:lnSpc>
             </a:pPr>
             <a:r>
-              <a:rPr sz="1600" b="1">
-                <a:solidFill>
-                  <a:srgbClr val="00FF41"/>
-                </a:solidFill>
-                <a:latin typeface="Arial"/>
-              </a:rPr>
-              <a:t>▸  </a:t>
-            </a:r>
-            <a:r>
-              <a:rPr sz="1500" b="1">
-                <a:solidFill>
-                  <a:srgbClr val="F5F7FA"/>
-                </a:solidFill>
-                <a:latin typeface="Arial"/>
-              </a:rPr>
-              <a:t>This slide is yours - the paper you actually read. Add more behind it if you need to - keep your name on them.</a:t>
-            </a:r>
-          </a:p>
-        </p:txBody>
-      </p:sp>
-      <p:sp>
-        <p:nvSpPr>
-          <p:cNvPr id="8" name="TextBox 7"/>
+              <a:rPr sz="1300" b="0">
+                <a:solidFill>
+                  <a:srgbClr val="5A6474"/>
+                </a:solidFill>
+                <a:latin typeface="Courier New"/>
+              </a:rPr>
+              <a:t>▸  This slide is yours — add more behind it if you need to, keep your name on them.</a:t>
+            </a:r>
+          </a:p>
+        </p:txBody>
+      </p:sp>
+      <p:sp>
+        <p:nvSpPr>
+          <p:cNvPr id="9" name="TextBox 8"/>
           <p:cNvSpPr txBox="1"/>
           <p:nvPr/>
         </p:nvSpPr>
@@ -4926,8 +4929,8 @@
         </p:nvSpPr>
         <p:spPr>
           <a:xfrm>
-            <a:off x="822960" y="1417320"/>
-            <a:ext cx="2743200" cy="1097280"/>
+            <a:off x="822960" y="566928"/>
+            <a:ext cx="10543032" cy="365760"/>
           </a:xfrm>
           <a:prstGeom prst="rect">
             <a:avLst/>
@@ -4946,13 +4949,13 @@
               </a:lnSpc>
             </a:pPr>
             <a:r>
-              <a:rPr sz="6400" b="1">
+              <a:rPr sz="1300" b="1">
                 <a:solidFill>
                   <a:srgbClr val="00FF41"/>
                 </a:solidFill>
                 <a:latin typeface="Courier New"/>
               </a:rPr>
-              <a:t>05</a:t>
+              <a:t>SECTION 05   ·   FIGJAM: 05 SO WHAT</a:t>
             </a:r>
           </a:p>
         </p:txBody>
@@ -4965,8 +4968,8 @@
         </p:nvSpPr>
         <p:spPr>
           <a:xfrm>
-            <a:off x="841248" y="2487168"/>
-            <a:ext cx="10424160" cy="457200"/>
+            <a:off x="822960" y="1207008"/>
+            <a:ext cx="1737360" cy="1280160"/>
           </a:xfrm>
           <a:prstGeom prst="rect">
             <a:avLst/>
@@ -4985,13 +4988,13 @@
               </a:lnSpc>
             </a:pPr>
             <a:r>
-              <a:rPr sz="1500" b="1">
+              <a:rPr sz="6600" b="1">
                 <a:solidFill>
                   <a:srgbClr val="00FF41"/>
                 </a:solidFill>
                 <a:latin typeface="Courier New"/>
               </a:rPr>
-              <a:t>SO WHAT - OUR NEXT DESIGN DIRECTION</a:t>
+              <a:t>05</a:t>
             </a:r>
           </a:p>
         </p:txBody>
@@ -5004,8 +5007,8 @@
         </p:nvSpPr>
         <p:spPr>
           <a:xfrm>
-            <a:off x="804672" y="2971800"/>
-            <a:ext cx="10607040" cy="1097280"/>
+            <a:off x="2697480" y="1298448"/>
+            <a:ext cx="8686800" cy="1097280"/>
           </a:xfrm>
           <a:prstGeom prst="rect">
             <a:avLst/>
@@ -5024,13 +5027,13 @@
               </a:lnSpc>
             </a:pPr>
             <a:r>
-              <a:rPr sz="3800" b="1">
+              <a:rPr sz="3000" b="1">
                 <a:solidFill>
                   <a:srgbClr val="F5F7FA"/>
                 </a:solidFill>
                 <a:latin typeface="Arial"/>
               </a:rPr>
-              <a:t>Verification opens the next design  ·  FigJam: 05  ·  carry into Wednesday</a:t>
+              <a:t>So what — our next design direction</a:t>
             </a:r>
           </a:p>
         </p:txBody>
@@ -5043,8 +5046,8 @@
         </p:nvSpPr>
         <p:spPr>
           <a:xfrm>
-            <a:off x="841248" y="4224528"/>
-            <a:ext cx="10424160" cy="1737360"/>
+            <a:off x="2697480" y="2395728"/>
+            <a:ext cx="8686800" cy="640080"/>
           </a:xfrm>
           <a:prstGeom prst="rect">
             <a:avLst/>
@@ -5059,36 +5062,158 @@
           <a:p>
             <a:pPr algn="l">
               <a:lnSpc>
-                <a:spcPct val="128000"/>
-              </a:lnSpc>
-            </a:pPr>
-            <a:r>
-              <a:rPr sz="1700" b="1">
+                <a:spcPct val="110000"/>
+              </a:lnSpc>
+            </a:pPr>
+            <a:r>
+              <a:rPr sz="1600" b="0">
+                <a:solidFill>
+                  <a:srgbClr val="8A94A6"/>
+                </a:solidFill>
+                <a:latin typeface="Arial"/>
+              </a:rPr>
+              <a:t>If the design doesn't move the value, what would? This starts Wednesday.</a:t>
+            </a:r>
+          </a:p>
+        </p:txBody>
+      </p:sp>
+      <p:sp>
+        <p:nvSpPr>
+          <p:cNvPr id="7" name="Rounded Rectangle 6"/>
+          <p:cNvSpPr/>
+          <p:nvPr/>
+        </p:nvSpPr>
+        <p:spPr>
+          <a:xfrm>
+            <a:off x="822960" y="3310128"/>
+            <a:ext cx="10543032" cy="2606040"/>
+          </a:xfrm>
+          <a:prstGeom prst="roundRect">
+            <a:avLst/>
+          </a:prstGeom>
+          <a:solidFill>
+            <a:srgbClr val="151B26"/>
+          </a:solidFill>
+          <a:ln>
+            <a:noFill/>
+          </a:ln>
+          <a:effectLst/>
+        </p:spPr>
+        <p:style>
+          <a:lnRef idx="1">
+            <a:schemeClr val="accent1"/>
+          </a:lnRef>
+          <a:fillRef idx="3">
+            <a:schemeClr val="accent1"/>
+          </a:fillRef>
+          <a:effectRef idx="2">
+            <a:schemeClr val="accent1"/>
+          </a:effectRef>
+          <a:fontRef idx="minor">
+            <a:schemeClr val="lt1"/>
+          </a:fontRef>
+        </p:style>
+        <p:txBody>
+          <a:bodyPr rtlCol="0" anchor="ctr"/>
+          <a:lstStyle/>
+          <a:p>
+            <a:pPr algn="ctr"/>
+          </a:p>
+        </p:txBody>
+      </p:sp>
+      <p:sp>
+        <p:nvSpPr>
+          <p:cNvPr id="8" name="TextBox 7"/>
+          <p:cNvSpPr txBox="1"/>
+          <p:nvPr/>
+        </p:nvSpPr>
+        <p:spPr>
+          <a:xfrm>
+            <a:off x="1143000" y="3584448"/>
+            <a:ext cx="9966960" cy="365760"/>
+          </a:xfrm>
+          <a:prstGeom prst="rect">
+            <a:avLst/>
+          </a:prstGeom>
+          <a:noFill/>
+        </p:spPr>
+        <p:txBody>
+          <a:bodyPr wrap="square" anchor="t">
+            <a:spAutoFit/>
+          </a:bodyPr>
+          <a:lstStyle/>
+          <a:p>
+            <a:pPr algn="l">
+              <a:lnSpc>
+                <a:spcPct val="100000"/>
+              </a:lnSpc>
+            </a:pPr>
+            <a:r>
+              <a:rPr sz="1200" b="1">
                 <a:solidFill>
                   <a:srgbClr val="00FF41"/>
                 </a:solidFill>
+                <a:latin typeface="Courier New"/>
+              </a:rPr>
+              <a:t>WHAT GOES ON THIS SLIDE  ·  replace the [ … ]</a:t>
+            </a:r>
+          </a:p>
+        </p:txBody>
+      </p:sp>
+      <p:sp>
+        <p:nvSpPr>
+          <p:cNvPr id="9" name="TextBox 8"/>
+          <p:cNvSpPr txBox="1"/>
+          <p:nvPr/>
+        </p:nvSpPr>
+        <p:spPr>
+          <a:xfrm>
+            <a:off x="1143000" y="4133088"/>
+            <a:ext cx="9921240" cy="1554480"/>
+          </a:xfrm>
+          <a:prstGeom prst="rect">
+            <a:avLst/>
+          </a:prstGeom>
+          <a:noFill/>
+        </p:spPr>
+        <p:txBody>
+          <a:bodyPr wrap="square" anchor="t">
+            <a:spAutoFit/>
+          </a:bodyPr>
+          <a:lstStyle/>
+          <a:p>
+            <a:pPr algn="l">
+              <a:lnSpc>
+                <a:spcPct val="140000"/>
+              </a:lnSpc>
+            </a:pPr>
+            <a:r>
+              <a:rPr sz="1800" b="1">
+                <a:solidFill>
+                  <a:srgbClr val="00FF41"/>
+                </a:solidFill>
                 <a:latin typeface="Arial"/>
               </a:rPr>
               <a:t>→  </a:t>
             </a:r>
             <a:r>
-              <a:rPr sz="1700" b="0">
-                <a:solidFill>
-                  <a:srgbClr val="8A94A6"/>
-                </a:solidFill>
-                <a:latin typeface="Arial"/>
-              </a:rPr>
-              <a:t>If the design does NOT move the value, what WOULD?  Another design that could achieve it.</a:t>
-            </a:r>
-          </a:p>
-          <a:p>
-            <a:pPr algn="l">
-              <a:lnSpc>
-                <a:spcPct val="128000"/>
-              </a:lnSpc>
-            </a:pPr>
-            <a:r>
-              <a:rPr sz="1700" b="1">
+              <a:rPr sz="1800" b="0">
+                <a:solidFill>
+                  <a:srgbClr val="F5F7FA"/>
+                </a:solidFill>
+                <a:latin typeface="Arial"/>
+              </a:rPr>
+              <a:t>Another design that could achieve the value</a:t>
+            </a:r>
+          </a:p>
+          <a:p>
+            <a:pPr algn="l">
+              <a:lnSpc>
+                <a:spcPct val="140000"/>
+              </a:lnSpc>
+            </a:pPr>
+            <a:r>
+              <a:rPr sz="1800" b="1">
                 <a:solidFill>
                   <a:srgbClr val="00FF41"/>
                 </a:solidFill>
@@ -5097,23 +5222,23 @@
               <a:t>→  </a:t>
             </a:r>
             <a:r>
-              <a:rPr sz="1700" b="0">
-                <a:solidFill>
-                  <a:srgbClr val="8A94A6"/>
-                </a:solidFill>
-                <a:latin typeface="Arial"/>
-              </a:rPr>
-              <a:t>What should the next cycle discover?</a:t>
-            </a:r>
-          </a:p>
-          <a:p>
-            <a:pPr algn="l">
-              <a:lnSpc>
-                <a:spcPct val="128000"/>
-              </a:lnSpc>
-            </a:pPr>
-            <a:r>
-              <a:rPr sz="1700" b="1">
+              <a:rPr sz="1800" b="0">
+                <a:solidFill>
+                  <a:srgbClr val="F5F7FA"/>
+                </a:solidFill>
+                <a:latin typeface="Arial"/>
+              </a:rPr>
+              <a:t>What the next cycle should discover</a:t>
+            </a:r>
+          </a:p>
+          <a:p>
+            <a:pPr algn="l">
+              <a:lnSpc>
+                <a:spcPct val="140000"/>
+              </a:lnSpc>
+            </a:pPr>
+            <a:r>
+              <a:rPr sz="1800" b="1">
                 <a:solidFill>
                   <a:srgbClr val="00FF41"/>
                 </a:solidFill>
@@ -5122,20 +5247,20 @@
               <a:t>→  </a:t>
             </a:r>
             <a:r>
-              <a:rPr sz="1700" b="0">
-                <a:solidFill>
-                  <a:srgbClr val="8A94A6"/>
-                </a:solidFill>
-                <a:latin typeface="Arial"/>
-              </a:rPr>
-              <a:t>2-3 directions the evidence points to - you carry these into Wednesday.</a:t>
-            </a:r>
-          </a:p>
-        </p:txBody>
-      </p:sp>
-      <p:sp>
-        <p:nvSpPr>
-          <p:cNvPr id="7" name="TextBox 6"/>
+              <a:rPr sz="1800" b="0">
+                <a:solidFill>
+                  <a:srgbClr val="F5F7FA"/>
+                </a:solidFill>
+                <a:latin typeface="Arial"/>
+              </a:rPr>
+              <a:t>2–3 directions the evidence points to</a:t>
+            </a:r>
+          </a:p>
+        </p:txBody>
+      </p:sp>
+      <p:sp>
+        <p:nvSpPr>
+          <p:cNvPr id="10" name="TextBox 9"/>
           <p:cNvSpPr txBox="1"/>
           <p:nvPr/>
         </p:nvSpPr>
@@ -5289,8 +5414,8 @@
         </p:nvSpPr>
         <p:spPr>
           <a:xfrm>
-            <a:off x="640080" y="1188720"/>
-            <a:ext cx="10972800" cy="914400"/>
+            <a:off x="822960" y="1188720"/>
+            <a:ext cx="10515600" cy="914400"/>
           </a:xfrm>
           <a:prstGeom prst="rect">
             <a:avLst/>
@@ -5328,8 +5453,8 @@
         </p:nvSpPr>
         <p:spPr>
           <a:xfrm>
-            <a:off x="658368" y="2377440"/>
-            <a:ext cx="10881360" cy="3108960"/>
+            <a:off x="841248" y="2331720"/>
+            <a:ext cx="10515600" cy="3108960"/>
           </a:xfrm>
           <a:prstGeom prst="rect">
             <a:avLst/>
@@ -5344,11 +5469,11 @@
           <a:p>
             <a:pPr algn="l">
               <a:lnSpc>
-                <a:spcPct val="145000"/>
-              </a:lnSpc>
-            </a:pPr>
-            <a:r>
-              <a:rPr sz="1700" b="1">
+                <a:spcPct val="150000"/>
+              </a:lnSpc>
+            </a:pPr>
+            <a:r>
+              <a:rPr sz="1800" b="1">
                 <a:solidFill>
                   <a:srgbClr val="00FF41"/>
                 </a:solidFill>
@@ -5357,7 +5482,7 @@
               <a:t>•  </a:t>
             </a:r>
             <a:r>
-              <a:rPr sz="1700" b="0">
+              <a:rPr sz="1800" b="0">
                 <a:solidFill>
                   <a:srgbClr val="8A94A6"/>
                 </a:solidFill>
@@ -5369,11 +5494,11 @@
           <a:p>
             <a:pPr algn="l">
               <a:lnSpc>
-                <a:spcPct val="145000"/>
-              </a:lnSpc>
-            </a:pPr>
-            <a:r>
-              <a:rPr sz="1700" b="1">
+                <a:spcPct val="150000"/>
+              </a:lnSpc>
+            </a:pPr>
+            <a:r>
+              <a:rPr sz="1800" b="1">
                 <a:solidFill>
                   <a:srgbClr val="00FF41"/>
                 </a:solidFill>
@@ -5382,7 +5507,7 @@
               <a:t>•  </a:t>
             </a:r>
             <a:r>
-              <a:rPr sz="1700" b="0">
+              <a:rPr sz="1800" b="0">
                 <a:solidFill>
                   <a:srgbClr val="8A94A6"/>
                 </a:solidFill>
@@ -5394,11 +5519,11 @@
           <a:p>
             <a:pPr algn="l">
               <a:lnSpc>
-                <a:spcPct val="145000"/>
-              </a:lnSpc>
-            </a:pPr>
-            <a:r>
-              <a:rPr sz="1700" b="1">
+                <a:spcPct val="150000"/>
+              </a:lnSpc>
+            </a:pPr>
+            <a:r>
+              <a:rPr sz="1800" b="1">
                 <a:solidFill>
                   <a:srgbClr val="00FF41"/>
                 </a:solidFill>
@@ -5407,7 +5532,7 @@
               <a:t>•  </a:t>
             </a:r>
             <a:r>
-              <a:rPr sz="1700" b="0">
+              <a:rPr sz="1800" b="0">
                 <a:solidFill>
                   <a:srgbClr val="8A94A6"/>
                 </a:solidFill>
@@ -5419,11 +5544,11 @@
           <a:p>
             <a:pPr algn="l">
               <a:lnSpc>
-                <a:spcPct val="145000"/>
-              </a:lnSpc>
-            </a:pPr>
-            <a:r>
-              <a:rPr sz="1700" b="1">
+                <a:spcPct val="150000"/>
+              </a:lnSpc>
+            </a:pPr>
+            <a:r>
+              <a:rPr sz="1800" b="1">
                 <a:solidFill>
                   <a:srgbClr val="00FF41"/>
                 </a:solidFill>
@@ -5432,7 +5557,7 @@
               <a:t>•  </a:t>
             </a:r>
             <a:r>
-              <a:rPr sz="1700" b="0">
+              <a:rPr sz="1800" b="0">
                 <a:solidFill>
                   <a:srgbClr val="8A94A6"/>
                 </a:solidFill>
@@ -5451,8 +5576,8 @@
         </p:nvSpPr>
         <p:spPr>
           <a:xfrm>
-            <a:off x="658368" y="5715000"/>
-            <a:ext cx="10881360" cy="365760"/>
+            <a:off x="841248" y="5760720"/>
+            <a:ext cx="10515600" cy="365760"/>
           </a:xfrm>
           <a:prstGeom prst="rect">
             <a:avLst/>
@@ -5638,8 +5763,8 @@
         </p:nvSpPr>
         <p:spPr>
           <a:xfrm>
-            <a:off x="640080" y="1188720"/>
-            <a:ext cx="10972800" cy="914400"/>
+            <a:off x="822960" y="1188720"/>
+            <a:ext cx="10515600" cy="914400"/>
           </a:xfrm>
           <a:prstGeom prst="rect">
             <a:avLst/>
@@ -5658,13 +5783,13 @@
               </a:lnSpc>
             </a:pPr>
             <a:r>
-              <a:rPr sz="3200" b="1">
+              <a:rPr sz="3000" b="1">
                 <a:solidFill>
                   <a:srgbClr val="F5F7FA"/>
                 </a:solidFill>
                 <a:latin typeface="Arial"/>
               </a:rPr>
-              <a:t>Keep the headers. Put your slides behind them.</a:t>
+              <a:t>Keep the 5 headers. Put your slides behind them.</a:t>
             </a:r>
           </a:p>
         </p:txBody>
@@ -5677,8 +5802,8 @@
         </p:nvSpPr>
         <p:spPr>
           <a:xfrm>
-            <a:off x="658368" y="2377440"/>
-            <a:ext cx="10881360" cy="3474720"/>
+            <a:off x="841248" y="2331720"/>
+            <a:ext cx="10515600" cy="3749039"/>
           </a:xfrm>
           <a:prstGeom prst="rect">
             <a:avLst/>
@@ -5693,11 +5818,11 @@
           <a:p>
             <a:pPr algn="l">
               <a:lnSpc>
-                <a:spcPct val="130000"/>
-              </a:lnSpc>
-            </a:pPr>
-            <a:r>
-              <a:rPr sz="1900" b="1">
+                <a:spcPct val="134000"/>
+              </a:lnSpc>
+            </a:pPr>
+            <a:r>
+              <a:rPr sz="1800" b="1">
                 <a:solidFill>
                   <a:srgbClr val="00FF41"/>
                 </a:solidFill>
@@ -5706,98 +5831,143 @@
               <a:t>•  </a:t>
             </a:r>
             <a:r>
-              <a:rPr sz="1900" b="0">
+              <a:rPr sz="1800" b="0">
                 <a:solidFill>
                   <a:srgbClr val="F5F7FA"/>
                 </a:solidFill>
                 <a:latin typeface="Arial"/>
               </a:rPr>
-              <a:t>Five section headers follow — they MIRROR the FigJam canvas blocks. The canvas is where you work it out; this deck is where you present it.</a:t>
-            </a:r>
-          </a:p>
-          <a:p>
-            <a:pPr algn="l">
-              <a:lnSpc>
-                <a:spcPct val="130000"/>
-              </a:lnSpc>
-            </a:pPr>
-            <a:r>
-              <a:rPr sz="1900" b="1">
+              <a:t>These 5 headers </a:t>
+            </a:r>
+            <a:r>
+              <a:rPr sz="1800" b="1">
                 <a:solidFill>
                   <a:srgbClr val="00FF41"/>
                 </a:solidFill>
                 <a:latin typeface="Arial"/>
               </a:rPr>
+              <a:t>mirror your FigJam board</a:t>
+            </a:r>
+            <a:r>
+              <a:rPr sz="1800" b="0">
+                <a:solidFill>
+                  <a:srgbClr val="F5F7FA"/>
+                </a:solidFill>
+                <a:latin typeface="Arial"/>
+              </a:rPr>
+              <a:t> — the canvas is where you work it out; this deck is where you present it.</a:t>
+            </a:r>
+          </a:p>
+          <a:p>
+            <a:pPr algn="l">
+              <a:lnSpc>
+                <a:spcPct val="134000"/>
+              </a:lnSpc>
+            </a:pPr>
+            <a:r>
+              <a:rPr sz="1800" b="1">
+                <a:solidFill>
+                  <a:srgbClr val="00FF41"/>
+                </a:solidFill>
+                <a:latin typeface="Arial"/>
+              </a:rPr>
               <a:t>•  </a:t>
             </a:r>
             <a:r>
-              <a:rPr sz="1900" b="0">
+              <a:rPr sz="1800" b="0">
                 <a:solidFill>
                   <a:srgbClr val="F5F7FA"/>
                 </a:solidFill>
                 <a:latin typeface="Arial"/>
               </a:rPr>
-              <a:t>Sections 01, 02, 03, 05 are the TEAM's. Section 04 has one named slide per person — the paper you found and READ.</a:t>
-            </a:r>
-          </a:p>
-          <a:p>
-            <a:pPr algn="l">
-              <a:lnSpc>
-                <a:spcPct val="130000"/>
-              </a:lnSpc>
-            </a:pPr>
-            <a:r>
-              <a:rPr sz="1900" b="1">
+              <a:t>Add your slides </a:t>
+            </a:r>
+            <a:r>
+              <a:rPr sz="1800" b="1">
                 <a:solidFill>
                   <a:srgbClr val="00FF41"/>
                 </a:solidFill>
                 <a:latin typeface="Arial"/>
               </a:rPr>
+              <a:t>behind</a:t>
+            </a:r>
+            <a:r>
+              <a:rPr sz="1800" b="0">
+                <a:solidFill>
+                  <a:srgbClr val="F5F7FA"/>
+                </a:solidFill>
+                <a:latin typeface="Arial"/>
+              </a:rPr>
+              <a:t> each header — don't delete the headers.</a:t>
+            </a:r>
+          </a:p>
+          <a:p>
+            <a:pPr algn="l">
+              <a:lnSpc>
+                <a:spcPct val="134000"/>
+              </a:lnSpc>
+            </a:pPr>
+            <a:r>
+              <a:rPr sz="1800" b="1">
+                <a:solidFill>
+                  <a:srgbClr val="00FF41"/>
+                </a:solidFill>
+                <a:latin typeface="Arial"/>
+              </a:rPr>
               <a:t>•  </a:t>
             </a:r>
             <a:r>
-              <a:rPr sz="1900" b="0">
+              <a:rPr sz="1800" b="0">
                 <a:solidFill>
                   <a:srgbClr val="F5F7FA"/>
                 </a:solidFill>
                 <a:latin typeface="Arial"/>
               </a:rPr>
-              <a:t>Add your own slides AFTER each header. Don't delete the headers.</a:t>
-            </a:r>
-          </a:p>
-          <a:p>
-            <a:pPr algn="l">
-              <a:lnSpc>
-                <a:spcPct val="130000"/>
-              </a:lnSpc>
-            </a:pPr>
-            <a:r>
-              <a:rPr sz="1900" b="1">
+              <a:t>Sections 01, 02, 03, 05 are the team's. </a:t>
+            </a:r>
+            <a:r>
+              <a:rPr sz="1800" b="1">
                 <a:solidFill>
                   <a:srgbClr val="00FF41"/>
                 </a:solidFill>
                 <a:latin typeface="Arial"/>
               </a:rPr>
+              <a:t>04 = one ‘YOUR PAPER’ slide per person.</a:t>
+            </a:r>
+          </a:p>
+          <a:p>
+            <a:pPr algn="l">
+              <a:lnSpc>
+                <a:spcPct val="134000"/>
+              </a:lnSpc>
+            </a:pPr>
+            <a:r>
+              <a:rPr sz="1800" b="1">
+                <a:solidFill>
+                  <a:srgbClr val="00FF41"/>
+                </a:solidFill>
+                <a:latin typeface="Arial"/>
+              </a:rPr>
               <a:t>•  </a:t>
             </a:r>
             <a:r>
-              <a:rPr sz="1900" b="0">
+              <a:rPr sz="1800" b="0">
                 <a:solidFill>
                   <a:srgbClr val="F5F7FA"/>
                 </a:solidFill>
                 <a:latin typeface="Arial"/>
               </a:rPr>
-              <a:t>No full user study today — for '03 What we found', apply your metrics with a partner (speculating is fine).</a:t>
-            </a:r>
-          </a:p>
-          <a:p>
-            <a:pPr algn="l">
-              <a:lnSpc>
-                <a:spcPct val="130000"/>
-              </a:lnSpc>
-            </a:pPr>
-            <a:r>
-              <a:rPr sz="1900" b="1">
+              <a:t>No full study today — for ‘03 What we found’, check with a partner (speculating is fine).</a:t>
+            </a:r>
+          </a:p>
+          <a:p>
+            <a:pPr algn="l">
+              <a:lnSpc>
+                <a:spcPct val="134000"/>
+              </a:lnSpc>
+            </a:pPr>
+            <a:r>
+              <a:rPr sz="1800" b="1">
                 <a:solidFill>
                   <a:srgbClr val="00FF41"/>
                 </a:solidFill>
@@ -5806,84 +5976,95 @@
               <a:t>•  </a:t>
             </a:r>
             <a:r>
-              <a:rPr sz="1900" b="0">
+              <a:rPr sz="1800" b="0">
                 <a:solidFill>
                   <a:srgbClr val="F5F7FA"/>
                 </a:solidFill>
                 <a:latin typeface="Arial"/>
               </a:rPr>
-              <a:t>Each person READS one real paper (not just an AI summary) — that's section 04 / the FigJam Outlook.</a:t>
-            </a:r>
-          </a:p>
-          <a:p>
-            <a:pPr algn="l">
-              <a:lnSpc>
-                <a:spcPct val="130000"/>
-              </a:lnSpc>
-            </a:pPr>
-            <a:r>
-              <a:rPr sz="1900" b="1">
+              <a:t>Each person </a:t>
+            </a:r>
+            <a:r>
+              <a:rPr sz="1800" b="1">
                 <a:solidFill>
                   <a:srgbClr val="00FF41"/>
                 </a:solidFill>
                 <a:latin typeface="Arial"/>
               </a:rPr>
+              <a:t>READS one real paper</a:t>
+            </a:r>
+            <a:r>
+              <a:rPr sz="1800" b="0">
+                <a:solidFill>
+                  <a:srgbClr val="F5F7FA"/>
+                </a:solidFill>
+                <a:latin typeface="Arial"/>
+              </a:rPr>
+              <a:t> — not just an AI summary.</a:t>
+            </a:r>
+          </a:p>
+          <a:p>
+            <a:pPr algn="l">
+              <a:lnSpc>
+                <a:spcPct val="134000"/>
+              </a:lnSpc>
+            </a:pPr>
+            <a:r>
+              <a:rPr sz="1800" b="1">
+                <a:solidFill>
+                  <a:srgbClr val="00FF41"/>
+                </a:solidFill>
+                <a:latin typeface="Arial"/>
+              </a:rPr>
               <a:t>•  </a:t>
             </a:r>
             <a:r>
-              <a:rPr sz="1900" b="0">
+              <a:rPr sz="1800" b="0">
                 <a:solidFill>
                   <a:srgbClr val="F5F7FA"/>
                 </a:solidFill>
                 <a:latin typeface="Arial"/>
               </a:rPr>
-              <a:t>Real citations only — if you can't find the paper, leave the claim out.</a:t>
-            </a:r>
-          </a:p>
-          <a:p>
-            <a:pPr algn="l">
-              <a:lnSpc>
-                <a:spcPct val="130000"/>
-              </a:lnSpc>
-            </a:pPr>
-            <a:r>
-              <a:rPr sz="1900" b="1">
+              <a:t>Your reflection goes on the </a:t>
+            </a:r>
+            <a:r>
+              <a:rPr sz="1800" b="1">
                 <a:solidFill>
                   <a:srgbClr val="00FF41"/>
                 </a:solidFill>
                 <a:latin typeface="Arial"/>
               </a:rPr>
+              <a:t>FigJam board (block 06)</a:t>
+            </a:r>
+            <a:r>
+              <a:rPr sz="1800" b="0">
+                <a:solidFill>
+                  <a:srgbClr val="F5F7FA"/>
+                </a:solidFill>
+                <a:latin typeface="Arial"/>
+              </a:rPr>
+              <a:t>, not in this deck.</a:t>
+            </a:r>
+          </a:p>
+          <a:p>
+            <a:pPr algn="l">
+              <a:lnSpc>
+                <a:spcPct val="134000"/>
+              </a:lnSpc>
+            </a:pPr>
+            <a:r>
+              <a:rPr sz="1800" b="1">
+                <a:solidFill>
+                  <a:srgbClr val="00FF41"/>
+                </a:solidFill>
+                <a:latin typeface="Arial"/>
+              </a:rPr>
               <a:t>•  </a:t>
             </a:r>
             <a:r>
-              <a:rPr sz="1900" b="0">
-                <a:solidFill>
-                  <a:srgbClr val="F5F7FA"/>
-                </a:solidFill>
-                <a:latin typeface="Arial"/>
-              </a:rPr>
-              <a:t>Your reflection is NOT in this deck — it goes in your own lane on the team FigJam canvas (block 06).</a:t>
-            </a:r>
-          </a:p>
-          <a:p>
-            <a:pPr algn="l">
-              <a:lnSpc>
-                <a:spcPct val="130000"/>
-              </a:lnSpc>
-            </a:pPr>
-            <a:r>
-              <a:rPr sz="1900" b="1">
-                <a:solidFill>
-                  <a:srgbClr val="00FF41"/>
-                </a:solidFill>
-                <a:latin typeface="Arial"/>
-              </a:rPr>
-              <a:t>•  </a:t>
-            </a:r>
-            <a:r>
-              <a:rPr sz="1900" b="0">
-                <a:solidFill>
-                  <a:srgbClr val="F5F7FA"/>
+              <a:rPr sz="1800" b="0">
+                <a:solidFill>
+                  <a:srgbClr val="8A94A6"/>
                 </a:solidFill>
                 <a:latin typeface="Arial"/>
               </a:rPr>
@@ -6009,8 +6190,8 @@
         </p:nvSpPr>
         <p:spPr>
           <a:xfrm>
-            <a:off x="822960" y="1417320"/>
-            <a:ext cx="2743200" cy="1097280"/>
+            <a:off x="822960" y="566928"/>
+            <a:ext cx="10543032" cy="365760"/>
           </a:xfrm>
           <a:prstGeom prst="rect">
             <a:avLst/>
@@ -6029,13 +6210,13 @@
               </a:lnSpc>
             </a:pPr>
             <a:r>
-              <a:rPr sz="6400" b="1">
+              <a:rPr sz="1300" b="1">
                 <a:solidFill>
                   <a:srgbClr val="00FF41"/>
                 </a:solidFill>
                 <a:latin typeface="Courier New"/>
               </a:rPr>
-              <a:t>01</a:t>
+              <a:t>SECTION 01   ·   FIGJAM: VALUE DEFINITION</a:t>
             </a:r>
           </a:p>
         </p:txBody>
@@ -6048,8 +6229,8 @@
         </p:nvSpPr>
         <p:spPr>
           <a:xfrm>
-            <a:off x="841248" y="2487168"/>
-            <a:ext cx="10424160" cy="457200"/>
+            <a:off x="822960" y="1207008"/>
+            <a:ext cx="1737360" cy="1280160"/>
           </a:xfrm>
           <a:prstGeom prst="rect">
             <a:avLst/>
@@ -6068,13 +6249,13 @@
               </a:lnSpc>
             </a:pPr>
             <a:r>
-              <a:rPr sz="1500" b="1">
+              <a:rPr sz="6600" b="1">
                 <a:solidFill>
                   <a:srgbClr val="00FF41"/>
                 </a:solidFill>
                 <a:latin typeface="Courier New"/>
               </a:rPr>
-              <a:t>THE VALUE &amp; HOW WE DEFINE IT</a:t>
+              <a:t>01</a:t>
             </a:r>
           </a:p>
         </p:txBody>
@@ -6087,8 +6268,8 @@
         </p:nvSpPr>
         <p:spPr>
           <a:xfrm>
-            <a:off x="804672" y="2971800"/>
-            <a:ext cx="10607040" cy="1097280"/>
+            <a:off x="2697480" y="1298448"/>
+            <a:ext cx="8686800" cy="1097280"/>
           </a:xfrm>
           <a:prstGeom prst="rect">
             <a:avLst/>
@@ -6107,13 +6288,13 @@
               </a:lnSpc>
             </a:pPr>
             <a:r>
-              <a:rPr sz="3800" b="1">
+              <a:rPr sz="3000" b="1">
                 <a:solidFill>
                   <a:srgbClr val="F5F7FA"/>
                 </a:solidFill>
                 <a:latin typeface="Arial"/>
               </a:rPr>
-              <a:t>Operationalize the value  ·  FigJam: Value Definition</a:t>
+              <a:t>The value &amp; how we define it</a:t>
             </a:r>
           </a:p>
         </p:txBody>
@@ -6126,8 +6307,8 @@
         </p:nvSpPr>
         <p:spPr>
           <a:xfrm>
-            <a:off x="841248" y="4224528"/>
-            <a:ext cx="10424160" cy="1737360"/>
+            <a:off x="2697480" y="2395728"/>
+            <a:ext cx="8686800" cy="640080"/>
           </a:xfrm>
           <a:prstGeom prst="rect">
             <a:avLst/>
@@ -6142,36 +6323,158 @@
           <a:p>
             <a:pPr algn="l">
               <a:lnSpc>
-                <a:spcPct val="128000"/>
-              </a:lnSpc>
-            </a:pPr>
-            <a:r>
-              <a:rPr sz="1700" b="1">
+                <a:spcPct val="110000"/>
+              </a:lnSpc>
+            </a:pPr>
+            <a:r>
+              <a:rPr sz="1600" b="0">
+                <a:solidFill>
+                  <a:srgbClr val="8A94A6"/>
+                </a:solidFill>
+                <a:latin typeface="Arial"/>
+              </a:rPr>
+              <a:t>Name the value, and pin down what it concretely means for your app.</a:t>
+            </a:r>
+          </a:p>
+        </p:txBody>
+      </p:sp>
+      <p:sp>
+        <p:nvSpPr>
+          <p:cNvPr id="7" name="Rounded Rectangle 6"/>
+          <p:cNvSpPr/>
+          <p:nvPr/>
+        </p:nvSpPr>
+        <p:spPr>
+          <a:xfrm>
+            <a:off x="822960" y="3310128"/>
+            <a:ext cx="10543032" cy="2606040"/>
+          </a:xfrm>
+          <a:prstGeom prst="roundRect">
+            <a:avLst/>
+          </a:prstGeom>
+          <a:solidFill>
+            <a:srgbClr val="151B26"/>
+          </a:solidFill>
+          <a:ln>
+            <a:noFill/>
+          </a:ln>
+          <a:effectLst/>
+        </p:spPr>
+        <p:style>
+          <a:lnRef idx="1">
+            <a:schemeClr val="accent1"/>
+          </a:lnRef>
+          <a:fillRef idx="3">
+            <a:schemeClr val="accent1"/>
+          </a:fillRef>
+          <a:effectRef idx="2">
+            <a:schemeClr val="accent1"/>
+          </a:effectRef>
+          <a:fontRef idx="minor">
+            <a:schemeClr val="lt1"/>
+          </a:fontRef>
+        </p:style>
+        <p:txBody>
+          <a:bodyPr rtlCol="0" anchor="ctr"/>
+          <a:lstStyle/>
+          <a:p>
+            <a:pPr algn="ctr"/>
+          </a:p>
+        </p:txBody>
+      </p:sp>
+      <p:sp>
+        <p:nvSpPr>
+          <p:cNvPr id="8" name="TextBox 7"/>
+          <p:cNvSpPr txBox="1"/>
+          <p:nvPr/>
+        </p:nvSpPr>
+        <p:spPr>
+          <a:xfrm>
+            <a:off x="1143000" y="3584448"/>
+            <a:ext cx="9966960" cy="365760"/>
+          </a:xfrm>
+          <a:prstGeom prst="rect">
+            <a:avLst/>
+          </a:prstGeom>
+          <a:noFill/>
+        </p:spPr>
+        <p:txBody>
+          <a:bodyPr wrap="square" anchor="t">
+            <a:spAutoFit/>
+          </a:bodyPr>
+          <a:lstStyle/>
+          <a:p>
+            <a:pPr algn="l">
+              <a:lnSpc>
+                <a:spcPct val="100000"/>
+              </a:lnSpc>
+            </a:pPr>
+            <a:r>
+              <a:rPr sz="1200" b="1">
                 <a:solidFill>
                   <a:srgbClr val="00FF41"/>
                 </a:solidFill>
+                <a:latin typeface="Courier New"/>
+              </a:rPr>
+              <a:t>WHAT GOES ON THIS SLIDE  ·  replace the [ … ]</a:t>
+            </a:r>
+          </a:p>
+        </p:txBody>
+      </p:sp>
+      <p:sp>
+        <p:nvSpPr>
+          <p:cNvPr id="9" name="TextBox 8"/>
+          <p:cNvSpPr txBox="1"/>
+          <p:nvPr/>
+        </p:nvSpPr>
+        <p:spPr>
+          <a:xfrm>
+            <a:off x="1143000" y="4133088"/>
+            <a:ext cx="9921240" cy="1554480"/>
+          </a:xfrm>
+          <a:prstGeom prst="rect">
+            <a:avLst/>
+          </a:prstGeom>
+          <a:noFill/>
+        </p:spPr>
+        <p:txBody>
+          <a:bodyPr wrap="square" anchor="t">
+            <a:spAutoFit/>
+          </a:bodyPr>
+          <a:lstStyle/>
+          <a:p>
+            <a:pPr algn="l">
+              <a:lnSpc>
+                <a:spcPct val="140000"/>
+              </a:lnSpc>
+            </a:pPr>
+            <a:r>
+              <a:rPr sz="1800" b="1">
+                <a:solidFill>
+                  <a:srgbClr val="00FF41"/>
+                </a:solidFill>
                 <a:latin typeface="Arial"/>
               </a:rPr>
               <a:t>→  </a:t>
             </a:r>
             <a:r>
-              <a:rPr sz="1700" b="0">
-                <a:solidFill>
-                  <a:srgbClr val="8A94A6"/>
-                </a:solidFill>
-                <a:latin typeface="Arial"/>
-              </a:rPr>
-              <a:t>[ our app, in one line ]  -  and the value it claims.</a:t>
-            </a:r>
-          </a:p>
-          <a:p>
-            <a:pPr algn="l">
-              <a:lnSpc>
-                <a:spcPct val="128000"/>
-              </a:lnSpc>
-            </a:pPr>
-            <a:r>
-              <a:rPr sz="1700" b="1">
+              <a:rPr sz="1800" b="0">
+                <a:solidFill>
+                  <a:srgbClr val="F5F7FA"/>
+                </a:solidFill>
+                <a:latin typeface="Arial"/>
+              </a:rPr>
+              <a:t>[ our app in one line ] — and the value it claims</a:t>
+            </a:r>
+          </a:p>
+          <a:p>
+            <a:pPr algn="l">
+              <a:lnSpc>
+                <a:spcPct val="140000"/>
+              </a:lnSpc>
+            </a:pPr>
+            <a:r>
+              <a:rPr sz="1800" b="1">
                 <a:solidFill>
                   <a:srgbClr val="00FF41"/>
                 </a:solidFill>
@@ -6180,23 +6483,23 @@
               <a:t>→  </a:t>
             </a:r>
             <a:r>
-              <a:rPr sz="1700" b="0">
-                <a:solidFill>
-                  <a:srgbClr val="8A94A6"/>
-                </a:solidFill>
-                <a:latin typeface="Arial"/>
-              </a:rPr>
-              <a:t>How do we operationalize / define the value?  (privacy as control vs. security vs. contextual integrity)</a:t>
-            </a:r>
-          </a:p>
-          <a:p>
-            <a:pPr algn="l">
-              <a:lnSpc>
-                <a:spcPct val="128000"/>
-              </a:lnSpc>
-            </a:pPr>
-            <a:r>
-              <a:rPr sz="1700" b="1">
+              <a:rPr sz="1800" b="0">
+                <a:solidFill>
+                  <a:srgbClr val="F5F7FA"/>
+                </a:solidFill>
+                <a:latin typeface="Arial"/>
+              </a:rPr>
+              <a:t>How we define it (privacy as control vs. security vs. contextual integrity)</a:t>
+            </a:r>
+          </a:p>
+          <a:p>
+            <a:pPr algn="l">
+              <a:lnSpc>
+                <a:spcPct val="140000"/>
+              </a:lnSpc>
+            </a:pPr>
+            <a:r>
+              <a:rPr sz="1800" b="1">
                 <a:solidFill>
                   <a:srgbClr val="00FF41"/>
                 </a:solidFill>
@@ -6205,20 +6508,20 @@
               <a:t>→  </a:t>
             </a:r>
             <a:r>
-              <a:rPr sz="1700" b="0">
-                <a:solidFill>
-                  <a:srgbClr val="8A94A6"/>
-                </a:solidFill>
-                <a:latin typeface="Arial"/>
-              </a:rPr>
-              <a:t>If it is present, users will DO [ ___ ] / UNDERSTAND [ ___ ] / FEEL [ ___ ].</a:t>
-            </a:r>
-          </a:p>
-        </p:txBody>
-      </p:sp>
-      <p:sp>
-        <p:nvSpPr>
-          <p:cNvPr id="7" name="TextBox 6"/>
+              <a:rPr sz="1800" b="0">
+                <a:solidFill>
+                  <a:srgbClr val="F5F7FA"/>
+                </a:solidFill>
+                <a:latin typeface="Arial"/>
+              </a:rPr>
+              <a:t>If it's present, users will DO / UNDERSTAND / FEEL [ … ]</a:t>
+            </a:r>
+          </a:p>
+        </p:txBody>
+      </p:sp>
+      <p:sp>
+        <p:nvSpPr>
+          <p:cNvPr id="10" name="TextBox 9"/>
           <p:cNvSpPr txBox="1"/>
           <p:nvPr/>
         </p:nvSpPr>
@@ -6333,8 +6636,8 @@
         </p:nvSpPr>
         <p:spPr>
           <a:xfrm>
-            <a:off x="822960" y="1417320"/>
-            <a:ext cx="2743200" cy="1097280"/>
+            <a:off x="822960" y="566928"/>
+            <a:ext cx="10543032" cy="365760"/>
           </a:xfrm>
           <a:prstGeom prst="rect">
             <a:avLst/>
@@ -6353,13 +6656,13 @@
               </a:lnSpc>
             </a:pPr>
             <a:r>
-              <a:rPr sz="6400" b="1">
+              <a:rPr sz="1300" b="1">
                 <a:solidFill>
                   <a:srgbClr val="00FF41"/>
                 </a:solidFill>
                 <a:latin typeface="Courier New"/>
               </a:rPr>
-              <a:t>02</a:t>
+              <a:t>SECTION 02   ·   FIGJAM: BRAINSTORM 1·2·3 + 02</a:t>
             </a:r>
           </a:p>
         </p:txBody>
@@ -6372,8 +6675,8 @@
         </p:nvSpPr>
         <p:spPr>
           <a:xfrm>
-            <a:off x="841248" y="2487168"/>
-            <a:ext cx="10424160" cy="457200"/>
+            <a:off x="822960" y="1207008"/>
+            <a:ext cx="1737360" cy="1280160"/>
           </a:xfrm>
           <a:prstGeom prst="rect">
             <a:avLst/>
@@ -6392,13 +6695,13 @@
               </a:lnSpc>
             </a:pPr>
             <a:r>
-              <a:rPr sz="1500" b="1">
+              <a:rPr sz="6600" b="1">
                 <a:solidFill>
                   <a:srgbClr val="00FF41"/>
                 </a:solidFill>
                 <a:latin typeface="Courier New"/>
               </a:rPr>
-              <a:t>HOW WOULD WE VERIFY IT?</a:t>
+              <a:t>02</a:t>
             </a:r>
           </a:p>
         </p:txBody>
@@ -6411,8 +6714,8 @@
         </p:nvSpPr>
         <p:spPr>
           <a:xfrm>
-            <a:off x="804672" y="2971800"/>
-            <a:ext cx="10607040" cy="1097280"/>
+            <a:off x="2697480" y="1298448"/>
+            <a:ext cx="8686800" cy="1097280"/>
           </a:xfrm>
           <a:prstGeom prst="rect">
             <a:avLst/>
@@ -6431,13 +6734,13 @@
               </a:lnSpc>
             </a:pPr>
             <a:r>
-              <a:rPr sz="3800" b="1">
+              <a:rPr sz="3000" b="1">
                 <a:solidFill>
                   <a:srgbClr val="F5F7FA"/>
                 </a:solidFill>
                 <a:latin typeface="Arial"/>
               </a:rPr>
-              <a:t>A method per lens + how others measure it  ·  FigJam: Brainstorm 1-2-3 + 02</a:t>
+              <a:t>How would we verify it?</a:t>
             </a:r>
           </a:p>
         </p:txBody>
@@ -6450,8 +6753,8 @@
         </p:nvSpPr>
         <p:spPr>
           <a:xfrm>
-            <a:off x="841248" y="4224528"/>
-            <a:ext cx="10424160" cy="1737360"/>
+            <a:off x="2697480" y="2395728"/>
+            <a:ext cx="8686800" cy="640080"/>
           </a:xfrm>
           <a:prstGeom prst="rect">
             <a:avLst/>
@@ -6466,36 +6769,158 @@
           <a:p>
             <a:pPr algn="l">
               <a:lnSpc>
-                <a:spcPct val="128000"/>
-              </a:lnSpc>
-            </a:pPr>
-            <a:r>
-              <a:rPr sz="1700" b="1">
+                <a:spcPct val="110000"/>
+              </a:lnSpc>
+            </a:pPr>
+            <a:r>
+              <a:rPr sz="1600" b="0">
+                <a:solidFill>
+                  <a:srgbClr val="8A94A6"/>
+                </a:solidFill>
+                <a:latin typeface="Arial"/>
+              </a:rPr>
+              <a:t>One way to check each lens — and how researchers measure it.</a:t>
+            </a:r>
+          </a:p>
+        </p:txBody>
+      </p:sp>
+      <p:sp>
+        <p:nvSpPr>
+          <p:cNvPr id="7" name="Rounded Rectangle 6"/>
+          <p:cNvSpPr/>
+          <p:nvPr/>
+        </p:nvSpPr>
+        <p:spPr>
+          <a:xfrm>
+            <a:off x="822960" y="3310128"/>
+            <a:ext cx="10543032" cy="2606040"/>
+          </a:xfrm>
+          <a:prstGeom prst="roundRect">
+            <a:avLst/>
+          </a:prstGeom>
+          <a:solidFill>
+            <a:srgbClr val="151B26"/>
+          </a:solidFill>
+          <a:ln>
+            <a:noFill/>
+          </a:ln>
+          <a:effectLst/>
+        </p:spPr>
+        <p:style>
+          <a:lnRef idx="1">
+            <a:schemeClr val="accent1"/>
+          </a:lnRef>
+          <a:fillRef idx="3">
+            <a:schemeClr val="accent1"/>
+          </a:fillRef>
+          <a:effectRef idx="2">
+            <a:schemeClr val="accent1"/>
+          </a:effectRef>
+          <a:fontRef idx="minor">
+            <a:schemeClr val="lt1"/>
+          </a:fontRef>
+        </p:style>
+        <p:txBody>
+          <a:bodyPr rtlCol="0" anchor="ctr"/>
+          <a:lstStyle/>
+          <a:p>
+            <a:pPr algn="ctr"/>
+          </a:p>
+        </p:txBody>
+      </p:sp>
+      <p:sp>
+        <p:nvSpPr>
+          <p:cNvPr id="8" name="TextBox 7"/>
+          <p:cNvSpPr txBox="1"/>
+          <p:nvPr/>
+        </p:nvSpPr>
+        <p:spPr>
+          <a:xfrm>
+            <a:off x="1143000" y="3584448"/>
+            <a:ext cx="9966960" cy="365760"/>
+          </a:xfrm>
+          <a:prstGeom prst="rect">
+            <a:avLst/>
+          </a:prstGeom>
+          <a:noFill/>
+        </p:spPr>
+        <p:txBody>
+          <a:bodyPr wrap="square" anchor="t">
+            <a:spAutoFit/>
+          </a:bodyPr>
+          <a:lstStyle/>
+          <a:p>
+            <a:pPr algn="l">
+              <a:lnSpc>
+                <a:spcPct val="100000"/>
+              </a:lnSpc>
+            </a:pPr>
+            <a:r>
+              <a:rPr sz="1200" b="1">
                 <a:solidFill>
                   <a:srgbClr val="00FF41"/>
                 </a:solidFill>
+                <a:latin typeface="Courier New"/>
+              </a:rPr>
+              <a:t>WHAT GOES ON THIS SLIDE  ·  replace the [ … ]</a:t>
+            </a:r>
+          </a:p>
+        </p:txBody>
+      </p:sp>
+      <p:sp>
+        <p:nvSpPr>
+          <p:cNvPr id="9" name="TextBox 8"/>
+          <p:cNvSpPr txBox="1"/>
+          <p:nvPr/>
+        </p:nvSpPr>
+        <p:spPr>
+          <a:xfrm>
+            <a:off x="1143000" y="4133088"/>
+            <a:ext cx="9921240" cy="1554480"/>
+          </a:xfrm>
+          <a:prstGeom prst="rect">
+            <a:avLst/>
+          </a:prstGeom>
+          <a:noFill/>
+        </p:spPr>
+        <p:txBody>
+          <a:bodyPr wrap="square" anchor="t">
+            <a:spAutoFit/>
+          </a:bodyPr>
+          <a:lstStyle/>
+          <a:p>
+            <a:pPr algn="l">
+              <a:lnSpc>
+                <a:spcPct val="140000"/>
+              </a:lnSpc>
+            </a:pPr>
+            <a:r>
+              <a:rPr sz="1800" b="1">
+                <a:solidFill>
+                  <a:srgbClr val="00FF41"/>
+                </a:solidFill>
                 <a:latin typeface="Arial"/>
               </a:rPr>
               <a:t>→  </a:t>
             </a:r>
             <a:r>
-              <a:rPr sz="1700" b="0">
-                <a:solidFill>
-                  <a:srgbClr val="8A94A6"/>
-                </a:solidFill>
-                <a:latin typeface="Arial"/>
-              </a:rPr>
-              <a:t>BEHAVIOR - do users ACT differently?  -&gt;  [ method + metric ].</a:t>
-            </a:r>
-          </a:p>
-          <a:p>
-            <a:pPr algn="l">
-              <a:lnSpc>
-                <a:spcPct val="128000"/>
-              </a:lnSpc>
-            </a:pPr>
-            <a:r>
-              <a:rPr sz="1700" b="1">
+              <a:rPr sz="1800" b="0">
+                <a:solidFill>
+                  <a:srgbClr val="F5F7FA"/>
+                </a:solidFill>
+                <a:latin typeface="Arial"/>
+              </a:rPr>
+              <a:t>BEHAVIOR: do users ACT differently? → [ method + metric ]</a:t>
+            </a:r>
+          </a:p>
+          <a:p>
+            <a:pPr algn="l">
+              <a:lnSpc>
+                <a:spcPct val="140000"/>
+              </a:lnSpc>
+            </a:pPr>
+            <a:r>
+              <a:rPr sz="1800" b="1">
                 <a:solidFill>
                   <a:srgbClr val="00FF41"/>
                 </a:solidFill>
@@ -6504,23 +6929,23 @@
               <a:t>→  </a:t>
             </a:r>
             <a:r>
-              <a:rPr sz="1700" b="0">
-                <a:solidFill>
-                  <a:srgbClr val="8A94A6"/>
-                </a:solidFill>
-                <a:latin typeface="Arial"/>
-              </a:rPr>
-              <a:t>UNDERSTANDING - do they GRASP the value?  -&gt;  [ method + metric ].</a:t>
-            </a:r>
-          </a:p>
-          <a:p>
-            <a:pPr algn="l">
-              <a:lnSpc>
-                <a:spcPct val="128000"/>
-              </a:lnSpc>
-            </a:pPr>
-            <a:r>
-              <a:rPr sz="1700" b="1">
+              <a:rPr sz="1800" b="0">
+                <a:solidFill>
+                  <a:srgbClr val="F5F7FA"/>
+                </a:solidFill>
+                <a:latin typeface="Arial"/>
+              </a:rPr>
+              <a:t>UNDERSTANDING / AFFECT: do they GRASP / FEEL it? → [ method + metric ]</a:t>
+            </a:r>
+          </a:p>
+          <a:p>
+            <a:pPr algn="l">
+              <a:lnSpc>
+                <a:spcPct val="140000"/>
+              </a:lnSpc>
+            </a:pPr>
+            <a:r>
+              <a:rPr sz="1800" b="1">
                 <a:solidFill>
                   <a:srgbClr val="00FF41"/>
                 </a:solidFill>
@@ -6529,45 +6954,20 @@
               <a:t>→  </a:t>
             </a:r>
             <a:r>
-              <a:rPr sz="1700" b="0">
-                <a:solidFill>
-                  <a:srgbClr val="8A94A6"/>
-                </a:solidFill>
-                <a:latin typeface="Arial"/>
-              </a:rPr>
-              <a:t>AFFECT - do they FEEL differently?  -&gt;  [ method + metric ].</a:t>
-            </a:r>
-          </a:p>
-          <a:p>
-            <a:pPr algn="l">
-              <a:lnSpc>
-                <a:spcPct val="128000"/>
-              </a:lnSpc>
-            </a:pPr>
-            <a:r>
-              <a:rPr sz="1700" b="1">
-                <a:solidFill>
-                  <a:srgbClr val="00FF41"/>
-                </a:solidFill>
-                <a:latin typeface="Arial"/>
-              </a:rPr>
-              <a:t>→  </a:t>
-            </a:r>
-            <a:r>
-              <a:rPr sz="1700" b="0">
-                <a:solidFill>
-                  <a:srgbClr val="8A94A6"/>
-                </a:solidFill>
-                <a:latin typeface="Arial"/>
-              </a:rPr>
-              <a:t>How do OTHERS measure it, and which INSTRUMENT would we borrow?  (UEQ / HRI / METUX / slop)</a:t>
-            </a:r>
-          </a:p>
-        </p:txBody>
-      </p:sp>
-      <p:sp>
-        <p:nvSpPr>
-          <p:cNvPr id="7" name="TextBox 6"/>
+              <a:rPr sz="1800" b="0">
+                <a:solidFill>
+                  <a:srgbClr val="F5F7FA"/>
+                </a:solidFill>
+                <a:latin typeface="Arial"/>
+              </a:rPr>
+              <a:t>An instrument we'd borrow: UEQ / HRI / METUX / slop</a:t>
+            </a:r>
+          </a:p>
+        </p:txBody>
+      </p:sp>
+      <p:sp>
+        <p:nvSpPr>
+          <p:cNvPr id="10" name="TextBox 9"/>
           <p:cNvSpPr txBox="1"/>
           <p:nvPr/>
         </p:nvSpPr>
@@ -6682,8 +7082,8 @@
         </p:nvSpPr>
         <p:spPr>
           <a:xfrm>
-            <a:off x="822960" y="1417320"/>
-            <a:ext cx="2743200" cy="1097280"/>
+            <a:off x="822960" y="566928"/>
+            <a:ext cx="10543032" cy="365760"/>
           </a:xfrm>
           <a:prstGeom prst="rect">
             <a:avLst/>
@@ -6702,13 +7102,13 @@
               </a:lnSpc>
             </a:pPr>
             <a:r>
-              <a:rPr sz="6400" b="1">
+              <a:rPr sz="1300" b="1">
                 <a:solidFill>
                   <a:srgbClr val="00FF41"/>
                 </a:solidFill>
                 <a:latin typeface="Courier New"/>
               </a:rPr>
-              <a:t>03</a:t>
+              <a:t>SECTION 03   ·   FIGJAM: 03 WHAT WE FOUND</a:t>
             </a:r>
           </a:p>
         </p:txBody>
@@ -6721,8 +7121,8 @@
         </p:nvSpPr>
         <p:spPr>
           <a:xfrm>
-            <a:off x="841248" y="2487168"/>
-            <a:ext cx="10424160" cy="457200"/>
+            <a:off x="822960" y="1207008"/>
+            <a:ext cx="1737360" cy="1280160"/>
           </a:xfrm>
           <a:prstGeom prst="rect">
             <a:avLst/>
@@ -6741,13 +7141,13 @@
               </a:lnSpc>
             </a:pPr>
             <a:r>
-              <a:rPr sz="1500" b="1">
+              <a:rPr sz="6600" b="1">
                 <a:solidFill>
                   <a:srgbClr val="00FF41"/>
                 </a:solidFill>
                 <a:latin typeface="Courier New"/>
               </a:rPr>
-              <a:t>WHAT WE FOUND</a:t>
+              <a:t>03</a:t>
             </a:r>
           </a:p>
         </p:txBody>
@@ -6760,8 +7160,8 @@
         </p:nvSpPr>
         <p:spPr>
           <a:xfrm>
-            <a:off x="804672" y="2971800"/>
-            <a:ext cx="10607040" cy="1097280"/>
+            <a:off x="2697480" y="1298448"/>
+            <a:ext cx="8686800" cy="1097280"/>
           </a:xfrm>
           <a:prstGeom prst="rect">
             <a:avLst/>
@@ -6780,13 +7180,13 @@
               </a:lnSpc>
             </a:pPr>
             <a:r>
-              <a:rPr sz="3800" b="1">
+              <a:rPr sz="3000" b="1">
                 <a:solidFill>
                   <a:srgbClr val="F5F7FA"/>
                 </a:solidFill>
                 <a:latin typeface="Arial"/>
               </a:rPr>
-              <a:t>Run the check - speculate with a partner if needed  ·  FigJam: 03</a:t>
+              <a:t>What we found</a:t>
             </a:r>
           </a:p>
         </p:txBody>
@@ -6799,8 +7199,8 @@
         </p:nvSpPr>
         <p:spPr>
           <a:xfrm>
-            <a:off x="841248" y="4224528"/>
-            <a:ext cx="10424160" cy="1737360"/>
+            <a:off x="2697480" y="2395728"/>
+            <a:ext cx="8686800" cy="640080"/>
           </a:xfrm>
           <a:prstGeom prst="rect">
             <a:avLst/>
@@ -6815,36 +7215,158 @@
           <a:p>
             <a:pPr algn="l">
               <a:lnSpc>
-                <a:spcPct val="128000"/>
-              </a:lnSpc>
-            </a:pPr>
-            <a:r>
-              <a:rPr sz="1700" b="1">
+                <a:spcPct val="110000"/>
+              </a:lnSpc>
+            </a:pPr>
+            <a:r>
+              <a:rPr sz="1600" b="0">
+                <a:solidFill>
+                  <a:srgbClr val="8A94A6"/>
+                </a:solidFill>
+                <a:latin typeface="Arial"/>
+              </a:rPr>
+              <a:t>A quick partner check — speculating is fine; a real study takes time.</a:t>
+            </a:r>
+          </a:p>
+        </p:txBody>
+      </p:sp>
+      <p:sp>
+        <p:nvSpPr>
+          <p:cNvPr id="7" name="Rounded Rectangle 6"/>
+          <p:cNvSpPr/>
+          <p:nvPr/>
+        </p:nvSpPr>
+        <p:spPr>
+          <a:xfrm>
+            <a:off x="822960" y="3310128"/>
+            <a:ext cx="10543032" cy="2606040"/>
+          </a:xfrm>
+          <a:prstGeom prst="roundRect">
+            <a:avLst/>
+          </a:prstGeom>
+          <a:solidFill>
+            <a:srgbClr val="151B26"/>
+          </a:solidFill>
+          <a:ln>
+            <a:noFill/>
+          </a:ln>
+          <a:effectLst/>
+        </p:spPr>
+        <p:style>
+          <a:lnRef idx="1">
+            <a:schemeClr val="accent1"/>
+          </a:lnRef>
+          <a:fillRef idx="3">
+            <a:schemeClr val="accent1"/>
+          </a:fillRef>
+          <a:effectRef idx="2">
+            <a:schemeClr val="accent1"/>
+          </a:effectRef>
+          <a:fontRef idx="minor">
+            <a:schemeClr val="lt1"/>
+          </a:fontRef>
+        </p:style>
+        <p:txBody>
+          <a:bodyPr rtlCol="0" anchor="ctr"/>
+          <a:lstStyle/>
+          <a:p>
+            <a:pPr algn="ctr"/>
+          </a:p>
+        </p:txBody>
+      </p:sp>
+      <p:sp>
+        <p:nvSpPr>
+          <p:cNvPr id="8" name="TextBox 7"/>
+          <p:cNvSpPr txBox="1"/>
+          <p:nvPr/>
+        </p:nvSpPr>
+        <p:spPr>
+          <a:xfrm>
+            <a:off x="1143000" y="3584448"/>
+            <a:ext cx="9966960" cy="365760"/>
+          </a:xfrm>
+          <a:prstGeom prst="rect">
+            <a:avLst/>
+          </a:prstGeom>
+          <a:noFill/>
+        </p:spPr>
+        <p:txBody>
+          <a:bodyPr wrap="square" anchor="t">
+            <a:spAutoFit/>
+          </a:bodyPr>
+          <a:lstStyle/>
+          <a:p>
+            <a:pPr algn="l">
+              <a:lnSpc>
+                <a:spcPct val="100000"/>
+              </a:lnSpc>
+            </a:pPr>
+            <a:r>
+              <a:rPr sz="1200" b="1">
                 <a:solidFill>
                   <a:srgbClr val="00FF41"/>
                 </a:solidFill>
+                <a:latin typeface="Courier New"/>
+              </a:rPr>
+              <a:t>WHAT GOES ON THIS SLIDE  ·  replace the [ … ]</a:t>
+            </a:r>
+          </a:p>
+        </p:txBody>
+      </p:sp>
+      <p:sp>
+        <p:nvSpPr>
+          <p:cNvPr id="9" name="TextBox 8"/>
+          <p:cNvSpPr txBox="1"/>
+          <p:nvPr/>
+        </p:nvSpPr>
+        <p:spPr>
+          <a:xfrm>
+            <a:off x="1143000" y="4133088"/>
+            <a:ext cx="9921240" cy="1554480"/>
+          </a:xfrm>
+          <a:prstGeom prst="rect">
+            <a:avLst/>
+          </a:prstGeom>
+          <a:noFill/>
+        </p:spPr>
+        <p:txBody>
+          <a:bodyPr wrap="square" anchor="t">
+            <a:spAutoFit/>
+          </a:bodyPr>
+          <a:lstStyle/>
+          <a:p>
+            <a:pPr algn="l">
+              <a:lnSpc>
+                <a:spcPct val="140000"/>
+              </a:lnSpc>
+            </a:pPr>
+            <a:r>
+              <a:rPr sz="1800" b="1">
+                <a:solidFill>
+                  <a:srgbClr val="00FF41"/>
+                </a:solidFill>
                 <a:latin typeface="Arial"/>
               </a:rPr>
               <a:t>→  </a:t>
             </a:r>
             <a:r>
-              <a:rPr sz="1700" b="0">
-                <a:solidFill>
-                  <a:srgbClr val="8A94A6"/>
-                </a:solidFill>
-                <a:latin typeface="Arial"/>
-              </a:rPr>
-              <a:t>Apply your metrics with a partner - it is fine to SPECULATE today; real verification takes time.</a:t>
-            </a:r>
-          </a:p>
-          <a:p>
-            <a:pPr algn="l">
-              <a:lnSpc>
-                <a:spcPct val="128000"/>
-              </a:lnSpc>
-            </a:pPr>
-            <a:r>
-              <a:rPr sz="1700" b="1">
+              <a:rPr sz="1800" b="0">
+                <a:solidFill>
+                  <a:srgbClr val="F5F7FA"/>
+                </a:solidFill>
+                <a:latin typeface="Arial"/>
+              </a:rPr>
+              <a:t>Do they ACT / GRASP / FEEL differently? [ what we saw ]</a:t>
+            </a:r>
+          </a:p>
+          <a:p>
+            <a:pPr algn="l">
+              <a:lnSpc>
+                <a:spcPct val="140000"/>
+              </a:lnSpc>
+            </a:pPr>
+            <a:r>
+              <a:rPr sz="1800" b="1">
                 <a:solidFill>
                   <a:srgbClr val="00FF41"/>
                 </a:solidFill>
@@ -6853,23 +7375,23 @@
               <a:t>→  </a:t>
             </a:r>
             <a:r>
-              <a:rPr sz="1700" b="0">
-                <a:solidFill>
-                  <a:srgbClr val="8A94A6"/>
-                </a:solidFill>
-                <a:latin typeface="Arial"/>
-              </a:rPr>
-              <a:t>BEHAVIOR: do they ACT differently?   UNDERSTANDING: do they GRASP it?   AFFECT: do they FEEL differently?</a:t>
-            </a:r>
-          </a:p>
-          <a:p>
-            <a:pPr algn="l">
-              <a:lnSpc>
-                <a:spcPct val="128000"/>
-              </a:lnSpc>
-            </a:pPr>
-            <a:r>
-              <a:rPr sz="1700" b="1">
+              <a:rPr sz="1800" b="0">
+                <a:solidFill>
+                  <a:srgbClr val="F5F7FA"/>
+                </a:solidFill>
+                <a:latin typeface="Arial"/>
+              </a:rPr>
+              <a:t>Green = it works   ·   Red = it doesn't</a:t>
+            </a:r>
+          </a:p>
+          <a:p>
+            <a:pPr algn="l">
+              <a:lnSpc>
+                <a:spcPct val="140000"/>
+              </a:lnSpc>
+            </a:pPr>
+            <a:r>
+              <a:rPr sz="1800" b="1">
                 <a:solidFill>
                   <a:srgbClr val="00FF41"/>
                 </a:solidFill>
@@ -6878,20 +7400,20 @@
               <a:t>→  </a:t>
             </a:r>
             <a:r>
-              <a:rPr sz="1700" b="0">
-                <a:solidFill>
-                  <a:srgbClr val="8A94A6"/>
-                </a:solidFill>
-                <a:latin typeface="Arial"/>
-              </a:rPr>
-              <a:t>Green = it works.  Red = it does not.  Does the design move the value - for whom, and who is left out?</a:t>
-            </a:r>
-          </a:p>
-        </p:txBody>
-      </p:sp>
-      <p:sp>
-        <p:nvSpPr>
-          <p:cNvPr id="7" name="TextBox 6"/>
+              <a:rPr sz="1800" b="0">
+                <a:solidFill>
+                  <a:srgbClr val="F5F7FA"/>
+                </a:solidFill>
+                <a:latin typeface="Arial"/>
+              </a:rPr>
+              <a:t>Does it move the value — for whom, and who's left out?</a:t>
+            </a:r>
+          </a:p>
+        </p:txBody>
+      </p:sp>
+      <p:sp>
+        <p:nvSpPr>
+          <p:cNvPr id="10" name="TextBox 9"/>
           <p:cNvSpPr txBox="1"/>
           <p:nvPr/>
         </p:nvSpPr>
@@ -7006,8 +7528,8 @@
         </p:nvSpPr>
         <p:spPr>
           <a:xfrm>
-            <a:off x="822960" y="1417320"/>
-            <a:ext cx="2743200" cy="1097280"/>
+            <a:off x="822960" y="566928"/>
+            <a:ext cx="10543032" cy="365760"/>
           </a:xfrm>
           <a:prstGeom prst="rect">
             <a:avLst/>
@@ -7026,13 +7548,13 @@
               </a:lnSpc>
             </a:pPr>
             <a:r>
-              <a:rPr sz="6400" b="1">
+              <a:rPr sz="1300" b="1">
                 <a:solidFill>
                   <a:srgbClr val="00FF41"/>
                 </a:solidFill>
                 <a:latin typeface="Courier New"/>
               </a:rPr>
-              <a:t>04</a:t>
+              <a:t>SECTION 04   ·   FIGJAM: 04 OUTLOOK</a:t>
             </a:r>
           </a:p>
         </p:txBody>
@@ -7045,8 +7567,8 @@
         </p:nvSpPr>
         <p:spPr>
           <a:xfrm>
-            <a:off x="841248" y="2487168"/>
-            <a:ext cx="10424160" cy="457200"/>
+            <a:off x="822960" y="1207008"/>
+            <a:ext cx="1737360" cy="1280160"/>
           </a:xfrm>
           <a:prstGeom prst="rect">
             <a:avLst/>
@@ -7065,13 +7587,13 @@
               </a:lnSpc>
             </a:pPr>
             <a:r>
-              <a:rPr sz="1500" b="1">
+              <a:rPr sz="6600" b="1">
                 <a:solidFill>
                   <a:srgbClr val="00FF41"/>
                 </a:solidFill>
                 <a:latin typeface="Courier New"/>
               </a:rPr>
-              <a:t>WHAT RELATED RESEARCH FOUND</a:t>
+              <a:t>04</a:t>
             </a:r>
           </a:p>
         </p:txBody>
@@ -7084,8 +7606,8 @@
         </p:nvSpPr>
         <p:spPr>
           <a:xfrm>
-            <a:off x="804672" y="2971800"/>
-            <a:ext cx="10607040" cy="1097280"/>
+            <a:off x="2697480" y="1298448"/>
+            <a:ext cx="8686800" cy="1097280"/>
           </a:xfrm>
           <a:prstGeom prst="rect">
             <a:avLst/>
@@ -7104,13 +7626,13 @@
               </a:lnSpc>
             </a:pPr>
             <a:r>
-              <a:rPr sz="3800" b="1">
+              <a:rPr sz="3000" b="1">
                 <a:solidFill>
                   <a:srgbClr val="F5F7FA"/>
                 </a:solidFill>
                 <a:latin typeface="Arial"/>
               </a:rPr>
-              <a:t>Each member READS one real paper  ·  FigJam: 04 Outlook  ·  the named slides follow</a:t>
+              <a:t>What related research found</a:t>
             </a:r>
           </a:p>
         </p:txBody>
@@ -7123,8 +7645,8 @@
         </p:nvSpPr>
         <p:spPr>
           <a:xfrm>
-            <a:off x="841248" y="4224528"/>
-            <a:ext cx="10424160" cy="1737360"/>
+            <a:off x="2697480" y="2395728"/>
+            <a:ext cx="8686800" cy="640080"/>
           </a:xfrm>
           <a:prstGeom prst="rect">
             <a:avLst/>
@@ -7139,36 +7661,158 @@
           <a:p>
             <a:pPr algn="l">
               <a:lnSpc>
-                <a:spcPct val="128000"/>
-              </a:lnSpc>
-            </a:pPr>
-            <a:r>
-              <a:rPr sz="1700" b="1">
+                <a:spcPct val="110000"/>
+              </a:lnSpc>
+            </a:pPr>
+            <a:r>
+              <a:rPr sz="1600" b="0">
+                <a:solidFill>
+                  <a:srgbClr val="8A94A6"/>
+                </a:solidFill>
+                <a:latin typeface="Arial"/>
+              </a:rPr>
+              <a:t>Each member reads one real paper — a named slide each follows this header.</a:t>
+            </a:r>
+          </a:p>
+        </p:txBody>
+      </p:sp>
+      <p:sp>
+        <p:nvSpPr>
+          <p:cNvPr id="7" name="Rounded Rectangle 6"/>
+          <p:cNvSpPr/>
+          <p:nvPr/>
+        </p:nvSpPr>
+        <p:spPr>
+          <a:xfrm>
+            <a:off x="822960" y="3310128"/>
+            <a:ext cx="10543032" cy="2606040"/>
+          </a:xfrm>
+          <a:prstGeom prst="roundRect">
+            <a:avLst/>
+          </a:prstGeom>
+          <a:solidFill>
+            <a:srgbClr val="151B26"/>
+          </a:solidFill>
+          <a:ln>
+            <a:noFill/>
+          </a:ln>
+          <a:effectLst/>
+        </p:spPr>
+        <p:style>
+          <a:lnRef idx="1">
+            <a:schemeClr val="accent1"/>
+          </a:lnRef>
+          <a:fillRef idx="3">
+            <a:schemeClr val="accent1"/>
+          </a:fillRef>
+          <a:effectRef idx="2">
+            <a:schemeClr val="accent1"/>
+          </a:effectRef>
+          <a:fontRef idx="minor">
+            <a:schemeClr val="lt1"/>
+          </a:fontRef>
+        </p:style>
+        <p:txBody>
+          <a:bodyPr rtlCol="0" anchor="ctr"/>
+          <a:lstStyle/>
+          <a:p>
+            <a:pPr algn="ctr"/>
+          </a:p>
+        </p:txBody>
+      </p:sp>
+      <p:sp>
+        <p:nvSpPr>
+          <p:cNvPr id="8" name="TextBox 7"/>
+          <p:cNvSpPr txBox="1"/>
+          <p:nvPr/>
+        </p:nvSpPr>
+        <p:spPr>
+          <a:xfrm>
+            <a:off x="1143000" y="3584448"/>
+            <a:ext cx="9966960" cy="365760"/>
+          </a:xfrm>
+          <a:prstGeom prst="rect">
+            <a:avLst/>
+          </a:prstGeom>
+          <a:noFill/>
+        </p:spPr>
+        <p:txBody>
+          <a:bodyPr wrap="square" anchor="t">
+            <a:spAutoFit/>
+          </a:bodyPr>
+          <a:lstStyle/>
+          <a:p>
+            <a:pPr algn="l">
+              <a:lnSpc>
+                <a:spcPct val="100000"/>
+              </a:lnSpc>
+            </a:pPr>
+            <a:r>
+              <a:rPr sz="1200" b="1">
                 <a:solidFill>
                   <a:srgbClr val="00FF41"/>
                 </a:solidFill>
+                <a:latin typeface="Courier New"/>
+              </a:rPr>
+              <a:t>WHAT GOES ON THIS SLIDE  ·  replace the [ … ]</a:t>
+            </a:r>
+          </a:p>
+        </p:txBody>
+      </p:sp>
+      <p:sp>
+        <p:nvSpPr>
+          <p:cNvPr id="9" name="TextBox 8"/>
+          <p:cNvSpPr txBox="1"/>
+          <p:nvPr/>
+        </p:nvSpPr>
+        <p:spPr>
+          <a:xfrm>
+            <a:off x="1143000" y="4133088"/>
+            <a:ext cx="9921240" cy="1554480"/>
+          </a:xfrm>
+          <a:prstGeom prst="rect">
+            <a:avLst/>
+          </a:prstGeom>
+          <a:noFill/>
+        </p:spPr>
+        <p:txBody>
+          <a:bodyPr wrap="square" anchor="t">
+            <a:spAutoFit/>
+          </a:bodyPr>
+          <a:lstStyle/>
+          <a:p>
+            <a:pPr algn="l">
+              <a:lnSpc>
+                <a:spcPct val="140000"/>
+              </a:lnSpc>
+            </a:pPr>
+            <a:r>
+              <a:rPr sz="1800" b="1">
+                <a:solidFill>
+                  <a:srgbClr val="00FF41"/>
+                </a:solidFill>
                 <a:latin typeface="Arial"/>
               </a:rPr>
               <a:t>→  </a:t>
             </a:r>
             <a:r>
-              <a:rPr sz="1700" b="0">
-                <a:solidFill>
-                  <a:srgbClr val="8A94A6"/>
-                </a:solidFill>
-                <a:latin typeface="Arial"/>
-              </a:rPr>
-              <a:t>Each member presents their OWN paper - found via AI academic search (Claude / ChatGPT / Elicit / Semantic Scholar / Scholar Labs), then READ.</a:t>
-            </a:r>
-          </a:p>
-          <a:p>
-            <a:pPr algn="l">
-              <a:lnSpc>
-                <a:spcPct val="128000"/>
-              </a:lnSpc>
-            </a:pPr>
-            <a:r>
-              <a:rPr sz="1700" b="1">
+              <a:rPr sz="1800" b="0">
+                <a:solidFill>
+                  <a:srgbClr val="F5F7FA"/>
+                </a:solidFill>
+                <a:latin typeface="Arial"/>
+              </a:rPr>
+              <a:t>Find via AI search (Claude · ChatGPT · Elicit · Semantic Scholar · Scholar Labs), then READ it</a:t>
+            </a:r>
+          </a:p>
+          <a:p>
+            <a:pPr algn="l">
+              <a:lnSpc>
+                <a:spcPct val="140000"/>
+              </a:lnSpc>
+            </a:pPr>
+            <a:r>
+              <a:rPr sz="1800" b="1">
                 <a:solidFill>
                   <a:srgbClr val="00FF41"/>
                 </a:solidFill>
@@ -7177,23 +7821,23 @@
               <a:t>→  </a:t>
             </a:r>
             <a:r>
-              <a:rPr sz="1700" b="0">
-                <a:solidFill>
-                  <a:srgbClr val="8A94A6"/>
-                </a:solidFill>
-                <a:latin typeface="Arial"/>
-              </a:rPr>
-              <a:t>Source (author, year)  -  what WORKED  -  what FAILED (avoid this).</a:t>
-            </a:r>
-          </a:p>
-          <a:p>
-            <a:pPr algn="l">
-              <a:lnSpc>
-                <a:spcPct val="128000"/>
-              </a:lnSpc>
-            </a:pPr>
-            <a:r>
-              <a:rPr sz="1700" b="1">
+              <a:rPr sz="1800" b="0">
+                <a:solidFill>
+                  <a:srgbClr val="F5F7FA"/>
+                </a:solidFill>
+                <a:latin typeface="Arial"/>
+              </a:rPr>
+              <a:t>Source (author, year) · what WORKED · what FAILED</a:t>
+            </a:r>
+          </a:p>
+          <a:p>
+            <a:pPr algn="l">
+              <a:lnSpc>
+                <a:spcPct val="140000"/>
+              </a:lnSpc>
+            </a:pPr>
+            <a:r>
+              <a:rPr sz="1800" b="1">
                 <a:solidFill>
                   <a:srgbClr val="00FF41"/>
                 </a:solidFill>
@@ -7202,20 +7846,20 @@
               <a:t>→  </a:t>
             </a:r>
             <a:r>
-              <a:rPr sz="1700" b="0">
-                <a:solidFill>
-                  <a:srgbClr val="8A94A6"/>
-                </a:solidFill>
-                <a:latin typeface="Arial"/>
-              </a:rPr>
-              <a:t>Real papers only, actually read - never invent a citation, never rely on an AI summary alone.</a:t>
-            </a:r>
-          </a:p>
-        </p:txBody>
-      </p:sp>
-      <p:sp>
-        <p:nvSpPr>
-          <p:cNvPr id="7" name="TextBox 6"/>
+              <a:rPr sz="1800" b="0">
+                <a:solidFill>
+                  <a:srgbClr val="F5F7FA"/>
+                </a:solidFill>
+                <a:latin typeface="Arial"/>
+              </a:rPr>
+              <a:t>Real papers only — never invent a citation</a:t>
+            </a:r>
+          </a:p>
+        </p:txBody>
+      </p:sp>
+      <p:sp>
+        <p:nvSpPr>
+          <p:cNvPr id="10" name="TextBox 9"/>
           <p:cNvSpPr txBox="1"/>
           <p:nvPr/>
         </p:nvSpPr>
@@ -7312,7 +7956,7 @@
                 </a:solidFill>
                 <a:latin typeface="Courier New"/>
               </a:rPr>
-              <a:t>04.1  ·  YOUR PAPER (your individual contribution)</a:t>
+              <a:t>04.1   ·   YOUR PAPER  (your individual contribution)</a:t>
             </a:r>
           </a:p>
         </p:txBody>
@@ -7369,8 +8013,8 @@
         </p:nvSpPr>
         <p:spPr>
           <a:xfrm>
-            <a:off x="640080" y="1170432"/>
-            <a:ext cx="10972800" cy="914400"/>
+            <a:off x="822960" y="1207008"/>
+            <a:ext cx="10515600" cy="914400"/>
           </a:xfrm>
           <a:prstGeom prst="rect">
             <a:avLst/>
@@ -7408,8 +8052,8 @@
         </p:nvSpPr>
         <p:spPr>
           <a:xfrm>
-            <a:off x="658368" y="2286000"/>
-            <a:ext cx="10881360" cy="2834640"/>
+            <a:off x="841248" y="2084831"/>
+            <a:ext cx="10424160" cy="457200"/>
           </a:xfrm>
           <a:prstGeom prst="rect">
             <a:avLst/>
@@ -7424,101 +8068,17 @@
           <a:p>
             <a:pPr algn="l">
               <a:lnSpc>
-                <a:spcPct val="134000"/>
-              </a:lnSpc>
-            </a:pPr>
-            <a:r>
-              <a:rPr sz="1900" b="1">
-                <a:solidFill>
-                  <a:srgbClr val="00FF41"/>
-                </a:solidFill>
-                <a:latin typeface="Arial"/>
-              </a:rPr>
-              <a:t>→  </a:t>
-            </a:r>
-            <a:r>
-              <a:rPr sz="1900" b="0">
-                <a:solidFill>
-                  <a:srgbClr val="F5F7FA"/>
-                </a:solidFill>
-                <a:latin typeface="Arial"/>
-              </a:rPr>
-              <a:t>The paper you found + READ - [ author, year, title ]  (AI search to FIND it; then read the actual paper)</a:t>
-            </a:r>
-          </a:p>
-          <a:p>
-            <a:pPr algn="l">
-              <a:lnSpc>
-                <a:spcPct val="134000"/>
-              </a:lnSpc>
-            </a:pPr>
-            <a:r>
-              <a:rPr sz="1900" b="1">
-                <a:solidFill>
-                  <a:srgbClr val="00FF41"/>
-                </a:solidFill>
-                <a:latin typeface="Arial"/>
-              </a:rPr>
-              <a:t>→  </a:t>
-            </a:r>
-            <a:r>
-              <a:rPr sz="1900" b="0">
-                <a:solidFill>
-                  <a:srgbClr val="F5F7FA"/>
-                </a:solidFill>
-                <a:latin typeface="Arial"/>
-              </a:rPr>
-              <a:t>The design intervention they tried to move THIS value - [ what they did ]</a:t>
-            </a:r>
-          </a:p>
-          <a:p>
-            <a:pPr algn="l">
-              <a:lnSpc>
-                <a:spcPct val="134000"/>
-              </a:lnSpc>
-            </a:pPr>
-            <a:r>
-              <a:rPr sz="1900" b="1">
-                <a:solidFill>
-                  <a:srgbClr val="00FF41"/>
-                </a:solidFill>
-                <a:latin typeface="Arial"/>
-              </a:rPr>
-              <a:t>→  </a:t>
-            </a:r>
-            <a:r>
-              <a:rPr sz="1900" b="0">
-                <a:solidFill>
-                  <a:srgbClr val="F5F7FA"/>
-                </a:solidFill>
-                <a:latin typeface="Arial"/>
-              </a:rPr>
-              <a:t>What WORKED - [ ___ ]     |     What FAILED / to avoid - [ ___ ]</a:t>
-            </a:r>
-          </a:p>
-          <a:p>
-            <a:pPr algn="l">
-              <a:lnSpc>
-                <a:spcPct val="134000"/>
-              </a:lnSpc>
-            </a:pPr>
-            <a:r>
-              <a:rPr sz="1900" b="1">
-                <a:solidFill>
-                  <a:srgbClr val="00FF41"/>
-                </a:solidFill>
-                <a:latin typeface="Arial"/>
-              </a:rPr>
-              <a:t>→  </a:t>
-            </a:r>
-            <a:r>
-              <a:rPr sz="1900" b="0">
-                <a:solidFill>
-                  <a:srgbClr val="F5F7FA"/>
-                </a:solidFill>
-                <a:latin typeface="Arial"/>
-              </a:rPr>
-              <a:t>Does it support or challenge our design direction? - [ ___ ]</a:t>
+                <a:spcPct val="100000"/>
+              </a:lnSpc>
+            </a:pPr>
+            <a:r>
+              <a:rPr sz="1600" b="0">
+                <a:solidFill>
+                  <a:srgbClr val="8A94A6"/>
+                </a:solidFill>
+                <a:latin typeface="Arial"/>
+              </a:rPr>
+              <a:t>The paper you found via AI search — and actually READ (not just the AI summary).</a:t>
             </a:r>
           </a:p>
         </p:txBody>
@@ -7531,8 +8091,8 @@
         </p:nvSpPr>
         <p:spPr>
           <a:xfrm>
-            <a:off x="640080" y="5440680"/>
-            <a:ext cx="10881360" cy="658368"/>
+            <a:off x="822960" y="2743200"/>
+            <a:ext cx="10543032" cy="2606040"/>
           </a:xfrm>
           <a:prstGeom prst="roundRect">
             <a:avLst/>
@@ -7540,10 +8100,8 @@
           <a:solidFill>
             <a:srgbClr val="151B26"/>
           </a:solidFill>
-          <a:ln w="19050">
-            <a:solidFill>
-              <a:srgbClr val="00FF41"/>
-            </a:solidFill>
+          <a:ln>
+            <a:noFill/>
           </a:ln>
           <a:effectLst/>
         </p:spPr>
@@ -7577,8 +8135,8 @@
         </p:nvSpPr>
         <p:spPr>
           <a:xfrm>
-            <a:off x="914400" y="5440680"/>
-            <a:ext cx="10332720" cy="658368"/>
+            <a:off x="1143000" y="3127248"/>
+            <a:ext cx="9921240" cy="1965960"/>
           </a:xfrm>
           <a:prstGeom prst="rect">
             <a:avLst/>
@@ -7586,40 +8144,129 @@
           <a:noFill/>
         </p:spPr>
         <p:txBody>
-          <a:bodyPr wrap="square" anchor="ctr">
+          <a:bodyPr wrap="square" anchor="t">
             <a:spAutoFit/>
           </a:bodyPr>
           <a:lstStyle/>
           <a:p>
             <a:pPr algn="l">
               <a:lnSpc>
+                <a:spcPct val="150000"/>
+              </a:lnSpc>
+            </a:pPr>
+            <a:r>
+              <a:rPr sz="1900" b="1">
+                <a:solidFill>
+                  <a:srgbClr val="00FF41"/>
+                </a:solidFill>
+                <a:latin typeface="Arial"/>
+              </a:rPr>
+              <a:t>→  </a:t>
+            </a:r>
+            <a:r>
+              <a:rPr sz="1900" b="0">
+                <a:solidFill>
+                  <a:srgbClr val="F5F7FA"/>
+                </a:solidFill>
+                <a:latin typeface="Arial"/>
+              </a:rPr>
+              <a:t>The paper — [ author, year, title ]</a:t>
+            </a:r>
+          </a:p>
+          <a:p>
+            <a:pPr algn="l">
+              <a:lnSpc>
+                <a:spcPct val="150000"/>
+              </a:lnSpc>
+            </a:pPr>
+            <a:r>
+              <a:rPr sz="1900" b="1">
+                <a:solidFill>
+                  <a:srgbClr val="00FF41"/>
+                </a:solidFill>
+                <a:latin typeface="Arial"/>
+              </a:rPr>
+              <a:t>→  </a:t>
+            </a:r>
+            <a:r>
+              <a:rPr sz="1900" b="0">
+                <a:solidFill>
+                  <a:srgbClr val="F5F7FA"/>
+                </a:solidFill>
+                <a:latin typeface="Arial"/>
+              </a:rPr>
+              <a:t>What WORKED — [ … ]     |     What FAILED / to avoid — [ … ]</a:t>
+            </a:r>
+          </a:p>
+          <a:p>
+            <a:pPr algn="l">
+              <a:lnSpc>
+                <a:spcPct val="150000"/>
+              </a:lnSpc>
+            </a:pPr>
+            <a:r>
+              <a:rPr sz="1900" b="1">
+                <a:solidFill>
+                  <a:srgbClr val="00FF41"/>
+                </a:solidFill>
+                <a:latin typeface="Arial"/>
+              </a:rPr>
+              <a:t>→  </a:t>
+            </a:r>
+            <a:r>
+              <a:rPr sz="1900" b="0">
+                <a:solidFill>
+                  <a:srgbClr val="F5F7FA"/>
+                </a:solidFill>
+                <a:latin typeface="Arial"/>
+              </a:rPr>
+              <a:t>Supports or challenges our design direction? — [ … ]</a:t>
+            </a:r>
+          </a:p>
+        </p:txBody>
+      </p:sp>
+      <p:sp>
+        <p:nvSpPr>
+          <p:cNvPr id="8" name="TextBox 7"/>
+          <p:cNvSpPr txBox="1"/>
+          <p:nvPr/>
+        </p:nvSpPr>
+        <p:spPr>
+          <a:xfrm>
+            <a:off x="822960" y="5623560"/>
+            <a:ext cx="10515600" cy="365760"/>
+          </a:xfrm>
+          <a:prstGeom prst="rect">
+            <a:avLst/>
+          </a:prstGeom>
+          <a:noFill/>
+        </p:spPr>
+        <p:txBody>
+          <a:bodyPr wrap="square" anchor="t">
+            <a:spAutoFit/>
+          </a:bodyPr>
+          <a:lstStyle/>
+          <a:p>
+            <a:pPr algn="l">
+              <a:lnSpc>
                 <a:spcPct val="100000"/>
               </a:lnSpc>
             </a:pPr>
             <a:r>
-              <a:rPr sz="1600" b="1">
-                <a:solidFill>
-                  <a:srgbClr val="00FF41"/>
-                </a:solidFill>
-                <a:latin typeface="Arial"/>
-              </a:rPr>
-              <a:t>▸  </a:t>
-            </a:r>
-            <a:r>
-              <a:rPr sz="1500" b="1">
-                <a:solidFill>
-                  <a:srgbClr val="F5F7FA"/>
-                </a:solidFill>
-                <a:latin typeface="Arial"/>
-              </a:rPr>
-              <a:t>This slide is yours - the paper you actually read. Add more behind it if you need to - keep your name on them.</a:t>
-            </a:r>
-          </a:p>
-        </p:txBody>
-      </p:sp>
-      <p:sp>
-        <p:nvSpPr>
-          <p:cNvPr id="8" name="TextBox 7"/>
+              <a:rPr sz="1300" b="0">
+                <a:solidFill>
+                  <a:srgbClr val="5A6474"/>
+                </a:solidFill>
+                <a:latin typeface="Courier New"/>
+              </a:rPr>
+              <a:t>▸  This slide is yours — add more behind it if you need to, keep your name on them.</a:t>
+            </a:r>
+          </a:p>
+        </p:txBody>
+      </p:sp>
+      <p:sp>
+        <p:nvSpPr>
+          <p:cNvPr id="9" name="TextBox 8"/>
           <p:cNvSpPr txBox="1"/>
           <p:nvPr/>
         </p:nvSpPr>
@@ -7716,7 +8363,7 @@
                 </a:solidFill>
                 <a:latin typeface="Courier New"/>
               </a:rPr>
-              <a:t>04.2  ·  YOUR PAPER (your individual contribution)</a:t>
+              <a:t>04.2   ·   YOUR PAPER  (your individual contribution)</a:t>
             </a:r>
           </a:p>
         </p:txBody>
@@ -7773,8 +8420,8 @@
         </p:nvSpPr>
         <p:spPr>
           <a:xfrm>
-            <a:off x="640080" y="1170432"/>
-            <a:ext cx="10972800" cy="914400"/>
+            <a:off x="822960" y="1207008"/>
+            <a:ext cx="10515600" cy="914400"/>
           </a:xfrm>
           <a:prstGeom prst="rect">
             <a:avLst/>
@@ -7812,8 +8459,8 @@
         </p:nvSpPr>
         <p:spPr>
           <a:xfrm>
-            <a:off x="658368" y="2286000"/>
-            <a:ext cx="10881360" cy="2834640"/>
+            <a:off x="841248" y="2084831"/>
+            <a:ext cx="10424160" cy="457200"/>
           </a:xfrm>
           <a:prstGeom prst="rect">
             <a:avLst/>
@@ -7828,101 +8475,17 @@
           <a:p>
             <a:pPr algn="l">
               <a:lnSpc>
-                <a:spcPct val="134000"/>
-              </a:lnSpc>
-            </a:pPr>
-            <a:r>
-              <a:rPr sz="1900" b="1">
-                <a:solidFill>
-                  <a:srgbClr val="00FF41"/>
-                </a:solidFill>
-                <a:latin typeface="Arial"/>
-              </a:rPr>
-              <a:t>→  </a:t>
-            </a:r>
-            <a:r>
-              <a:rPr sz="1900" b="0">
-                <a:solidFill>
-                  <a:srgbClr val="F5F7FA"/>
-                </a:solidFill>
-                <a:latin typeface="Arial"/>
-              </a:rPr>
-              <a:t>The paper you found + READ - [ author, year, title ]  (AI search to FIND it; then read the actual paper)</a:t>
-            </a:r>
-          </a:p>
-          <a:p>
-            <a:pPr algn="l">
-              <a:lnSpc>
-                <a:spcPct val="134000"/>
-              </a:lnSpc>
-            </a:pPr>
-            <a:r>
-              <a:rPr sz="1900" b="1">
-                <a:solidFill>
-                  <a:srgbClr val="00FF41"/>
-                </a:solidFill>
-                <a:latin typeface="Arial"/>
-              </a:rPr>
-              <a:t>→  </a:t>
-            </a:r>
-            <a:r>
-              <a:rPr sz="1900" b="0">
-                <a:solidFill>
-                  <a:srgbClr val="F5F7FA"/>
-                </a:solidFill>
-                <a:latin typeface="Arial"/>
-              </a:rPr>
-              <a:t>The design intervention they tried to move THIS value - [ what they did ]</a:t>
-            </a:r>
-          </a:p>
-          <a:p>
-            <a:pPr algn="l">
-              <a:lnSpc>
-                <a:spcPct val="134000"/>
-              </a:lnSpc>
-            </a:pPr>
-            <a:r>
-              <a:rPr sz="1900" b="1">
-                <a:solidFill>
-                  <a:srgbClr val="00FF41"/>
-                </a:solidFill>
-                <a:latin typeface="Arial"/>
-              </a:rPr>
-              <a:t>→  </a:t>
-            </a:r>
-            <a:r>
-              <a:rPr sz="1900" b="0">
-                <a:solidFill>
-                  <a:srgbClr val="F5F7FA"/>
-                </a:solidFill>
-                <a:latin typeface="Arial"/>
-              </a:rPr>
-              <a:t>What WORKED - [ ___ ]     |     What FAILED / to avoid - [ ___ ]</a:t>
-            </a:r>
-          </a:p>
-          <a:p>
-            <a:pPr algn="l">
-              <a:lnSpc>
-                <a:spcPct val="134000"/>
-              </a:lnSpc>
-            </a:pPr>
-            <a:r>
-              <a:rPr sz="1900" b="1">
-                <a:solidFill>
-                  <a:srgbClr val="00FF41"/>
-                </a:solidFill>
-                <a:latin typeface="Arial"/>
-              </a:rPr>
-              <a:t>→  </a:t>
-            </a:r>
-            <a:r>
-              <a:rPr sz="1900" b="0">
-                <a:solidFill>
-                  <a:srgbClr val="F5F7FA"/>
-                </a:solidFill>
-                <a:latin typeface="Arial"/>
-              </a:rPr>
-              <a:t>Does it support or challenge our design direction? - [ ___ ]</a:t>
+                <a:spcPct val="100000"/>
+              </a:lnSpc>
+            </a:pPr>
+            <a:r>
+              <a:rPr sz="1600" b="0">
+                <a:solidFill>
+                  <a:srgbClr val="8A94A6"/>
+                </a:solidFill>
+                <a:latin typeface="Arial"/>
+              </a:rPr>
+              <a:t>The paper you found via AI search — and actually READ (not just the AI summary).</a:t>
             </a:r>
           </a:p>
         </p:txBody>
@@ -7935,8 +8498,8 @@
         </p:nvSpPr>
         <p:spPr>
           <a:xfrm>
-            <a:off x="640080" y="5440680"/>
-            <a:ext cx="10881360" cy="658368"/>
+            <a:off x="822960" y="2743200"/>
+            <a:ext cx="10543032" cy="2606040"/>
           </a:xfrm>
           <a:prstGeom prst="roundRect">
             <a:avLst/>
@@ -7944,10 +8507,8 @@
           <a:solidFill>
             <a:srgbClr val="151B26"/>
           </a:solidFill>
-          <a:ln w="19050">
-            <a:solidFill>
-              <a:srgbClr val="00FF41"/>
-            </a:solidFill>
+          <a:ln>
+            <a:noFill/>
           </a:ln>
           <a:effectLst/>
         </p:spPr>
@@ -7981,8 +8542,8 @@
         </p:nvSpPr>
         <p:spPr>
           <a:xfrm>
-            <a:off x="914400" y="5440680"/>
-            <a:ext cx="10332720" cy="658368"/>
+            <a:off x="1143000" y="3127248"/>
+            <a:ext cx="9921240" cy="1965960"/>
           </a:xfrm>
           <a:prstGeom prst="rect">
             <a:avLst/>
@@ -7990,40 +8551,129 @@
           <a:noFill/>
         </p:spPr>
         <p:txBody>
-          <a:bodyPr wrap="square" anchor="ctr">
+          <a:bodyPr wrap="square" anchor="t">
             <a:spAutoFit/>
           </a:bodyPr>
           <a:lstStyle/>
           <a:p>
             <a:pPr algn="l">
               <a:lnSpc>
+                <a:spcPct val="150000"/>
+              </a:lnSpc>
+            </a:pPr>
+            <a:r>
+              <a:rPr sz="1900" b="1">
+                <a:solidFill>
+                  <a:srgbClr val="00FF41"/>
+                </a:solidFill>
+                <a:latin typeface="Arial"/>
+              </a:rPr>
+              <a:t>→  </a:t>
+            </a:r>
+            <a:r>
+              <a:rPr sz="1900" b="0">
+                <a:solidFill>
+                  <a:srgbClr val="F5F7FA"/>
+                </a:solidFill>
+                <a:latin typeface="Arial"/>
+              </a:rPr>
+              <a:t>The paper — [ author, year, title ]</a:t>
+            </a:r>
+          </a:p>
+          <a:p>
+            <a:pPr algn="l">
+              <a:lnSpc>
+                <a:spcPct val="150000"/>
+              </a:lnSpc>
+            </a:pPr>
+            <a:r>
+              <a:rPr sz="1900" b="1">
+                <a:solidFill>
+                  <a:srgbClr val="00FF41"/>
+                </a:solidFill>
+                <a:latin typeface="Arial"/>
+              </a:rPr>
+              <a:t>→  </a:t>
+            </a:r>
+            <a:r>
+              <a:rPr sz="1900" b="0">
+                <a:solidFill>
+                  <a:srgbClr val="F5F7FA"/>
+                </a:solidFill>
+                <a:latin typeface="Arial"/>
+              </a:rPr>
+              <a:t>What WORKED — [ … ]     |     What FAILED / to avoid — [ … ]</a:t>
+            </a:r>
+          </a:p>
+          <a:p>
+            <a:pPr algn="l">
+              <a:lnSpc>
+                <a:spcPct val="150000"/>
+              </a:lnSpc>
+            </a:pPr>
+            <a:r>
+              <a:rPr sz="1900" b="1">
+                <a:solidFill>
+                  <a:srgbClr val="00FF41"/>
+                </a:solidFill>
+                <a:latin typeface="Arial"/>
+              </a:rPr>
+              <a:t>→  </a:t>
+            </a:r>
+            <a:r>
+              <a:rPr sz="1900" b="0">
+                <a:solidFill>
+                  <a:srgbClr val="F5F7FA"/>
+                </a:solidFill>
+                <a:latin typeface="Arial"/>
+              </a:rPr>
+              <a:t>Supports or challenges our design direction? — [ … ]</a:t>
+            </a:r>
+          </a:p>
+        </p:txBody>
+      </p:sp>
+      <p:sp>
+        <p:nvSpPr>
+          <p:cNvPr id="8" name="TextBox 7"/>
+          <p:cNvSpPr txBox="1"/>
+          <p:nvPr/>
+        </p:nvSpPr>
+        <p:spPr>
+          <a:xfrm>
+            <a:off x="822960" y="5623560"/>
+            <a:ext cx="10515600" cy="365760"/>
+          </a:xfrm>
+          <a:prstGeom prst="rect">
+            <a:avLst/>
+          </a:prstGeom>
+          <a:noFill/>
+        </p:spPr>
+        <p:txBody>
+          <a:bodyPr wrap="square" anchor="t">
+            <a:spAutoFit/>
+          </a:bodyPr>
+          <a:lstStyle/>
+          <a:p>
+            <a:pPr algn="l">
+              <a:lnSpc>
                 <a:spcPct val="100000"/>
               </a:lnSpc>
             </a:pPr>
             <a:r>
-              <a:rPr sz="1600" b="1">
-                <a:solidFill>
-                  <a:srgbClr val="00FF41"/>
-                </a:solidFill>
-                <a:latin typeface="Arial"/>
-              </a:rPr>
-              <a:t>▸  </a:t>
-            </a:r>
-            <a:r>
-              <a:rPr sz="1500" b="1">
-                <a:solidFill>
-                  <a:srgbClr val="F5F7FA"/>
-                </a:solidFill>
-                <a:latin typeface="Arial"/>
-              </a:rPr>
-              <a:t>This slide is yours - the paper you actually read. Add more behind it if you need to - keep your name on them.</a:t>
-            </a:r>
-          </a:p>
-        </p:txBody>
-      </p:sp>
-      <p:sp>
-        <p:nvSpPr>
-          <p:cNvPr id="8" name="TextBox 7"/>
+              <a:rPr sz="1300" b="0">
+                <a:solidFill>
+                  <a:srgbClr val="5A6474"/>
+                </a:solidFill>
+                <a:latin typeface="Courier New"/>
+              </a:rPr>
+              <a:t>▸  This slide is yours — add more behind it if you need to, keep your name on them.</a:t>
+            </a:r>
+          </a:p>
+        </p:txBody>
+      </p:sp>
+      <p:sp>
+        <p:nvSpPr>
+          <p:cNvPr id="9" name="TextBox 8"/>
           <p:cNvSpPr txBox="1"/>
           <p:nvPr/>
         </p:nvSpPr>
@@ -8120,7 +8770,7 @@
                 </a:solidFill>
                 <a:latin typeface="Courier New"/>
               </a:rPr>
-              <a:t>04.3  ·  YOUR PAPER (your individual contribution)</a:t>
+              <a:t>04.3   ·   YOUR PAPER  (your individual contribution)</a:t>
             </a:r>
           </a:p>
         </p:txBody>
@@ -8177,8 +8827,8 @@
         </p:nvSpPr>
         <p:spPr>
           <a:xfrm>
-            <a:off x="640080" y="1170432"/>
-            <a:ext cx="10972800" cy="914400"/>
+            <a:off x="822960" y="1207008"/>
+            <a:ext cx="10515600" cy="914400"/>
           </a:xfrm>
           <a:prstGeom prst="rect">
             <a:avLst/>
@@ -8216,8 +8866,8 @@
         </p:nvSpPr>
         <p:spPr>
           <a:xfrm>
-            <a:off x="658368" y="2286000"/>
-            <a:ext cx="10881360" cy="2834640"/>
+            <a:off x="841248" y="2084831"/>
+            <a:ext cx="10424160" cy="457200"/>
           </a:xfrm>
           <a:prstGeom prst="rect">
             <a:avLst/>
@@ -8232,101 +8882,17 @@
           <a:p>
             <a:pPr algn="l">
               <a:lnSpc>
-                <a:spcPct val="134000"/>
-              </a:lnSpc>
-            </a:pPr>
-            <a:r>
-              <a:rPr sz="1900" b="1">
-                <a:solidFill>
-                  <a:srgbClr val="00FF41"/>
-                </a:solidFill>
-                <a:latin typeface="Arial"/>
-              </a:rPr>
-              <a:t>→  </a:t>
-            </a:r>
-            <a:r>
-              <a:rPr sz="1900" b="0">
-                <a:solidFill>
-                  <a:srgbClr val="F5F7FA"/>
-                </a:solidFill>
-                <a:latin typeface="Arial"/>
-              </a:rPr>
-              <a:t>The paper you found + READ - [ author, year, title ]  (AI search to FIND it; then read the actual paper)</a:t>
-            </a:r>
-          </a:p>
-          <a:p>
-            <a:pPr algn="l">
-              <a:lnSpc>
-                <a:spcPct val="134000"/>
-              </a:lnSpc>
-            </a:pPr>
-            <a:r>
-              <a:rPr sz="1900" b="1">
-                <a:solidFill>
-                  <a:srgbClr val="00FF41"/>
-                </a:solidFill>
-                <a:latin typeface="Arial"/>
-              </a:rPr>
-              <a:t>→  </a:t>
-            </a:r>
-            <a:r>
-              <a:rPr sz="1900" b="0">
-                <a:solidFill>
-                  <a:srgbClr val="F5F7FA"/>
-                </a:solidFill>
-                <a:latin typeface="Arial"/>
-              </a:rPr>
-              <a:t>The design intervention they tried to move THIS value - [ what they did ]</a:t>
-            </a:r>
-          </a:p>
-          <a:p>
-            <a:pPr algn="l">
-              <a:lnSpc>
-                <a:spcPct val="134000"/>
-              </a:lnSpc>
-            </a:pPr>
-            <a:r>
-              <a:rPr sz="1900" b="1">
-                <a:solidFill>
-                  <a:srgbClr val="00FF41"/>
-                </a:solidFill>
-                <a:latin typeface="Arial"/>
-              </a:rPr>
-              <a:t>→  </a:t>
-            </a:r>
-            <a:r>
-              <a:rPr sz="1900" b="0">
-                <a:solidFill>
-                  <a:srgbClr val="F5F7FA"/>
-                </a:solidFill>
-                <a:latin typeface="Arial"/>
-              </a:rPr>
-              <a:t>What WORKED - [ ___ ]     |     What FAILED / to avoid - [ ___ ]</a:t>
-            </a:r>
-          </a:p>
-          <a:p>
-            <a:pPr algn="l">
-              <a:lnSpc>
-                <a:spcPct val="134000"/>
-              </a:lnSpc>
-            </a:pPr>
-            <a:r>
-              <a:rPr sz="1900" b="1">
-                <a:solidFill>
-                  <a:srgbClr val="00FF41"/>
-                </a:solidFill>
-                <a:latin typeface="Arial"/>
-              </a:rPr>
-              <a:t>→  </a:t>
-            </a:r>
-            <a:r>
-              <a:rPr sz="1900" b="0">
-                <a:solidFill>
-                  <a:srgbClr val="F5F7FA"/>
-                </a:solidFill>
-                <a:latin typeface="Arial"/>
-              </a:rPr>
-              <a:t>Does it support or challenge our design direction? - [ ___ ]</a:t>
+                <a:spcPct val="100000"/>
+              </a:lnSpc>
+            </a:pPr>
+            <a:r>
+              <a:rPr sz="1600" b="0">
+                <a:solidFill>
+                  <a:srgbClr val="8A94A6"/>
+                </a:solidFill>
+                <a:latin typeface="Arial"/>
+              </a:rPr>
+              <a:t>The paper you found via AI search — and actually READ (not just the AI summary).</a:t>
             </a:r>
           </a:p>
         </p:txBody>
@@ -8339,8 +8905,8 @@
         </p:nvSpPr>
         <p:spPr>
           <a:xfrm>
-            <a:off x="640080" y="5440680"/>
-            <a:ext cx="10881360" cy="658368"/>
+            <a:off x="822960" y="2743200"/>
+            <a:ext cx="10543032" cy="2606040"/>
           </a:xfrm>
           <a:prstGeom prst="roundRect">
             <a:avLst/>
@@ -8348,10 +8914,8 @@
           <a:solidFill>
             <a:srgbClr val="151B26"/>
           </a:solidFill>
-          <a:ln w="19050">
-            <a:solidFill>
-              <a:srgbClr val="00FF41"/>
-            </a:solidFill>
+          <a:ln>
+            <a:noFill/>
           </a:ln>
           <a:effectLst/>
         </p:spPr>
@@ -8385,8 +8949,8 @@
         </p:nvSpPr>
         <p:spPr>
           <a:xfrm>
-            <a:off x="914400" y="5440680"/>
-            <a:ext cx="10332720" cy="658368"/>
+            <a:off x="1143000" y="3127248"/>
+            <a:ext cx="9921240" cy="1965960"/>
           </a:xfrm>
           <a:prstGeom prst="rect">
             <a:avLst/>
@@ -8394,40 +8958,129 @@
           <a:noFill/>
         </p:spPr>
         <p:txBody>
-          <a:bodyPr wrap="square" anchor="ctr">
+          <a:bodyPr wrap="square" anchor="t">
             <a:spAutoFit/>
           </a:bodyPr>
           <a:lstStyle/>
           <a:p>
             <a:pPr algn="l">
               <a:lnSpc>
+                <a:spcPct val="150000"/>
+              </a:lnSpc>
+            </a:pPr>
+            <a:r>
+              <a:rPr sz="1900" b="1">
+                <a:solidFill>
+                  <a:srgbClr val="00FF41"/>
+                </a:solidFill>
+                <a:latin typeface="Arial"/>
+              </a:rPr>
+              <a:t>→  </a:t>
+            </a:r>
+            <a:r>
+              <a:rPr sz="1900" b="0">
+                <a:solidFill>
+                  <a:srgbClr val="F5F7FA"/>
+                </a:solidFill>
+                <a:latin typeface="Arial"/>
+              </a:rPr>
+              <a:t>The paper — [ author, year, title ]</a:t>
+            </a:r>
+          </a:p>
+          <a:p>
+            <a:pPr algn="l">
+              <a:lnSpc>
+                <a:spcPct val="150000"/>
+              </a:lnSpc>
+            </a:pPr>
+            <a:r>
+              <a:rPr sz="1900" b="1">
+                <a:solidFill>
+                  <a:srgbClr val="00FF41"/>
+                </a:solidFill>
+                <a:latin typeface="Arial"/>
+              </a:rPr>
+              <a:t>→  </a:t>
+            </a:r>
+            <a:r>
+              <a:rPr sz="1900" b="0">
+                <a:solidFill>
+                  <a:srgbClr val="F5F7FA"/>
+                </a:solidFill>
+                <a:latin typeface="Arial"/>
+              </a:rPr>
+              <a:t>What WORKED — [ … ]     |     What FAILED / to avoid — [ … ]</a:t>
+            </a:r>
+          </a:p>
+          <a:p>
+            <a:pPr algn="l">
+              <a:lnSpc>
+                <a:spcPct val="150000"/>
+              </a:lnSpc>
+            </a:pPr>
+            <a:r>
+              <a:rPr sz="1900" b="1">
+                <a:solidFill>
+                  <a:srgbClr val="00FF41"/>
+                </a:solidFill>
+                <a:latin typeface="Arial"/>
+              </a:rPr>
+              <a:t>→  </a:t>
+            </a:r>
+            <a:r>
+              <a:rPr sz="1900" b="0">
+                <a:solidFill>
+                  <a:srgbClr val="F5F7FA"/>
+                </a:solidFill>
+                <a:latin typeface="Arial"/>
+              </a:rPr>
+              <a:t>Supports or challenges our design direction? — [ … ]</a:t>
+            </a:r>
+          </a:p>
+        </p:txBody>
+      </p:sp>
+      <p:sp>
+        <p:nvSpPr>
+          <p:cNvPr id="8" name="TextBox 7"/>
+          <p:cNvSpPr txBox="1"/>
+          <p:nvPr/>
+        </p:nvSpPr>
+        <p:spPr>
+          <a:xfrm>
+            <a:off x="822960" y="5623560"/>
+            <a:ext cx="10515600" cy="365760"/>
+          </a:xfrm>
+          <a:prstGeom prst="rect">
+            <a:avLst/>
+          </a:prstGeom>
+          <a:noFill/>
+        </p:spPr>
+        <p:txBody>
+          <a:bodyPr wrap="square" anchor="t">
+            <a:spAutoFit/>
+          </a:bodyPr>
+          <a:lstStyle/>
+          <a:p>
+            <a:pPr algn="l">
+              <a:lnSpc>
                 <a:spcPct val="100000"/>
               </a:lnSpc>
             </a:pPr>
             <a:r>
-              <a:rPr sz="1600" b="1">
-                <a:solidFill>
-                  <a:srgbClr val="00FF41"/>
-                </a:solidFill>
-                <a:latin typeface="Arial"/>
-              </a:rPr>
-              <a:t>▸  </a:t>
-            </a:r>
-            <a:r>
-              <a:rPr sz="1500" b="1">
-                <a:solidFill>
-                  <a:srgbClr val="F5F7FA"/>
-                </a:solidFill>
-                <a:latin typeface="Arial"/>
-              </a:rPr>
-              <a:t>This slide is yours - the paper you actually read. Add more behind it if you need to - keep your name on them.</a:t>
-            </a:r>
-          </a:p>
-        </p:txBody>
-      </p:sp>
-      <p:sp>
-        <p:nvSpPr>
-          <p:cNvPr id="8" name="TextBox 7"/>
+              <a:rPr sz="1300" b="0">
+                <a:solidFill>
+                  <a:srgbClr val="5A6474"/>
+                </a:solidFill>
+                <a:latin typeface="Courier New"/>
+              </a:rPr>
+              <a:t>▸  This slide is yours — add more behind it if you need to, keep your name on them.</a:t>
+            </a:r>
+          </a:p>
+        </p:txBody>
+      </p:sp>
+      <p:sp>
+        <p:nvSpPr>
+          <p:cNvPr id="9" name="TextBox 8"/>
           <p:cNvSpPr txBox="1"/>
           <p:nvPr/>
         </p:nvSpPr>
